--- a/Network_analysis.pptx
+++ b/Network_analysis.pptx
@@ -5,7 +5,7 @@
     <p:sldMasterId id="2147483765" r:id="rId1"/>
   </p:sldMasterIdLst>
   <p:notesMasterIdLst>
-    <p:notesMasterId r:id="rId40"/>
+    <p:notesMasterId r:id="rId39"/>
   </p:notesMasterIdLst>
   <p:sldIdLst>
     <p:sldId id="257" r:id="rId2"/>
@@ -32,20 +32,19 @@
     <p:sldId id="363" r:id="rId23"/>
     <p:sldId id="364" r:id="rId24"/>
     <p:sldId id="365" r:id="rId25"/>
-    <p:sldId id="366" r:id="rId26"/>
-    <p:sldId id="367" r:id="rId27"/>
-    <p:sldId id="368" r:id="rId28"/>
-    <p:sldId id="369" r:id="rId29"/>
-    <p:sldId id="370" r:id="rId30"/>
-    <p:sldId id="371" r:id="rId31"/>
-    <p:sldId id="372" r:id="rId32"/>
-    <p:sldId id="373" r:id="rId33"/>
-    <p:sldId id="374" r:id="rId34"/>
-    <p:sldId id="375" r:id="rId35"/>
-    <p:sldId id="376" r:id="rId36"/>
-    <p:sldId id="297" r:id="rId37"/>
-    <p:sldId id="298" r:id="rId38"/>
-    <p:sldId id="299" r:id="rId39"/>
+    <p:sldId id="367" r:id="rId26"/>
+    <p:sldId id="368" r:id="rId27"/>
+    <p:sldId id="369" r:id="rId28"/>
+    <p:sldId id="370" r:id="rId29"/>
+    <p:sldId id="371" r:id="rId30"/>
+    <p:sldId id="372" r:id="rId31"/>
+    <p:sldId id="373" r:id="rId32"/>
+    <p:sldId id="374" r:id="rId33"/>
+    <p:sldId id="375" r:id="rId34"/>
+    <p:sldId id="376" r:id="rId35"/>
+    <p:sldId id="297" r:id="rId36"/>
+    <p:sldId id="298" r:id="rId37"/>
+    <p:sldId id="299" r:id="rId38"/>
   </p:sldIdLst>
   <p:sldSz cx="12192000" cy="6858000"/>
   <p:notesSz cx="6858000" cy="9144000"/>
@@ -5649,17 +5648,17 @@
       </dgm:t>
     </dgm:pt>
     <dgm:pt modelId="{AD89E63A-884E-4292-A583-73475C545B24}">
-      <dgm:prSet/>
+      <dgm:prSet custT="1"/>
       <dgm:spPr/>
       <dgm:t>
         <a:bodyPr/>
         <a:lstStyle/>
         <a:p>
           <a:r>
-            <a:rPr lang="en-IN" dirty="0"/>
+            <a:rPr lang="en-IN" sz="1600" dirty="0"/>
             <a:t>The raw dataset contained 2 columns: id and encoded(Base64 format)</a:t>
           </a:r>
-          <a:endParaRPr lang="en-US" dirty="0"/>
+          <a:endParaRPr lang="en-US" sz="1600" dirty="0"/>
         </a:p>
       </dgm:t>
     </dgm:pt>
@@ -5686,14 +5685,14 @@
       </dgm:t>
     </dgm:pt>
     <dgm:pt modelId="{FD212139-6CDB-4367-BB48-7AFD7E5F38E9}">
-      <dgm:prSet/>
+      <dgm:prSet custT="1"/>
       <dgm:spPr/>
       <dgm:t>
         <a:bodyPr/>
         <a:lstStyle/>
         <a:p>
           <a:r>
-            <a:rPr lang="en-US" dirty="0"/>
+            <a:rPr lang="en-US" sz="1600" dirty="0"/>
             <a:t>Encoded columns was decoded from Base64 into structured JSON format and identified invalid/failed decoding row(~1 row).</a:t>
           </a:r>
         </a:p>
@@ -5722,17 +5721,17 @@
       </dgm:t>
     </dgm:pt>
     <dgm:pt modelId="{C8F58CC4-4377-4799-B208-DFE918602685}">
-      <dgm:prSet/>
+      <dgm:prSet custT="1"/>
       <dgm:spPr/>
       <dgm:t>
         <a:bodyPr/>
         <a:lstStyle/>
         <a:p>
           <a:r>
-            <a:rPr lang="en-IN" dirty="0"/>
+            <a:rPr lang="en-IN" sz="1600" dirty="0"/>
             <a:t>Extracted multiple attributes contain id, Asset ID,MAC Address, OS, Function, DHCP Options Fingerprint etc. </a:t>
           </a:r>
-          <a:endParaRPr lang="en-US" dirty="0"/>
+          <a:endParaRPr lang="en-US" sz="1600" dirty="0"/>
         </a:p>
       </dgm:t>
     </dgm:pt>
@@ -5759,17 +5758,17 @@
       </dgm:t>
     </dgm:pt>
     <dgm:pt modelId="{FB5625E1-17C3-4B24-9AC5-ED5C1FADE28B}">
-      <dgm:prSet/>
+      <dgm:prSet custT="1"/>
       <dgm:spPr/>
       <dgm:t>
         <a:bodyPr/>
         <a:lstStyle/>
         <a:p>
           <a:r>
-            <a:rPr lang="en-IN" dirty="0"/>
+            <a:rPr lang="en-IN" sz="1600" dirty="0"/>
             <a:t>There are total 88513 records with 10 columns</a:t>
           </a:r>
-          <a:endParaRPr lang="en-US" dirty="0"/>
+          <a:endParaRPr lang="en-US" sz="1600" dirty="0"/>
         </a:p>
       </dgm:t>
     </dgm:pt>
@@ -6074,17 +6073,17 @@
       </dgm:t>
     </dgm:pt>
     <dgm:pt modelId="{F8918F14-F922-466D-A6EE-412A7DBB1B76}">
-      <dgm:prSet/>
+      <dgm:prSet custT="1"/>
       <dgm:spPr/>
       <dgm:t>
         <a:bodyPr/>
         <a:lstStyle/>
         <a:p>
           <a:r>
-            <a:rPr lang="en-IN" dirty="0"/>
+            <a:rPr lang="en-IN" sz="1600" dirty="0"/>
             <a:t>There are high null percentage for certain columns like DHCP Device Class(55.8 %),DHCP Vendor Class (45.1%), OS (35.3 %), DHCP Options Fingerprint(29.4 %),DHCP Request Fingerprint(29.4%)</a:t>
           </a:r>
-          <a:endParaRPr lang="en-US" dirty="0"/>
+          <a:endParaRPr lang="en-US" sz="1600" dirty="0"/>
         </a:p>
       </dgm:t>
     </dgm:pt>
@@ -6095,7 +6094,7 @@
         <a:bodyPr/>
         <a:lstStyle/>
         <a:p>
-          <a:endParaRPr lang="en-US"/>
+          <a:endParaRPr lang="en-US" sz="1600"/>
         </a:p>
       </dgm:t>
     </dgm:pt>
@@ -6106,42 +6105,42 @@
         <a:bodyPr/>
         <a:lstStyle/>
         <a:p>
-          <a:endParaRPr lang="en-US"/>
+          <a:endParaRPr lang="en-US" sz="1600"/>
         </a:p>
       </dgm:t>
     </dgm:pt>
     <dgm:pt modelId="{8A3AE32C-B2F3-46F3-AB78-C09D22637656}">
-      <dgm:prSet/>
+      <dgm:prSet custT="1"/>
       <dgm:spPr/>
       <dgm:t>
         <a:bodyPr/>
         <a:lstStyle/>
         <a:p>
           <a:r>
-            <a:rPr lang="en-US" dirty="0"/>
+            <a:rPr lang="en-US" sz="1600" dirty="0"/>
             <a:t>Detected unique values for </a:t>
           </a:r>
           <a:r>
-            <a:rPr lang="en-GB" b="0" i="0" dirty="0"/>
+            <a:rPr lang="en-GB" sz="1600" b="0" i="0" dirty="0"/>
             <a:t>Asset ID(</a:t>
           </a:r>
           <a:r>
-            <a:rPr lang="en-NL" b="0" i="0" dirty="0"/>
+            <a:rPr lang="en-NL" sz="1600" b="0" i="0" dirty="0"/>
             <a:t>88513</a:t>
           </a:r>
           <a:r>
-            <a:rPr lang="en-GB" b="0" i="0" dirty="0"/>
+            <a:rPr lang="en-GB" sz="1600" b="0" i="0" dirty="0"/>
             <a:t>),OS(32),Function(83),Vendor and Model(314), </a:t>
           </a:r>
           <a:r>
-            <a:rPr lang="en-IN" dirty="0"/>
+            <a:rPr lang="en-IN" sz="1600" dirty="0"/>
             <a:t>DHCP Options Fingerprint(162), DHCP Request Fingerprint(135),</a:t>
           </a:r>
           <a:r>
-            <a:rPr lang="en-GB" b="0" i="0" dirty="0"/>
+            <a:rPr lang="en-GB" sz="1600" b="0" i="0" dirty="0"/>
             <a:t> DHCP Vendor Class(121), DHCP Device Class(14)</a:t>
           </a:r>
-          <a:endParaRPr lang="en-US" dirty="0"/>
+          <a:endParaRPr lang="en-US" sz="1600" dirty="0"/>
         </a:p>
       </dgm:t>
     </dgm:pt>
@@ -6152,7 +6151,7 @@
         <a:bodyPr/>
         <a:lstStyle/>
         <a:p>
-          <a:endParaRPr lang="en-US"/>
+          <a:endParaRPr lang="en-US" sz="1600"/>
         </a:p>
       </dgm:t>
     </dgm:pt>
@@ -6163,23 +6162,23 @@
         <a:bodyPr/>
         <a:lstStyle/>
         <a:p>
-          <a:endParaRPr lang="en-US"/>
+          <a:endParaRPr lang="en-US" sz="1600"/>
         </a:p>
       </dgm:t>
     </dgm:pt>
     <dgm:pt modelId="{EE172B37-666A-4087-8250-523C190DC69C}">
-      <dgm:prSet/>
+      <dgm:prSet custT="1"/>
       <dgm:spPr/>
       <dgm:t>
         <a:bodyPr/>
         <a:lstStyle/>
         <a:p>
           <a:r>
-            <a:rPr lang="en-US" dirty="0"/>
+            <a:rPr lang="en-US" sz="1600" dirty="0"/>
             <a:t>The majority of the devices run on the Top OS - </a:t>
           </a:r>
           <a:r>
-            <a:rPr lang="en-GB" b="0" i="0" dirty="0"/>
+            <a:rPr lang="en-GB" sz="1600" b="0" i="0" dirty="0"/>
             <a:t>Apple Desktop OS(16.68 %), Linux (16.10%), Embedded Firmware(15.22 %), Chrome OS(11.59%).</a:t>
           </a:r>
         </a:p>
@@ -6192,7 +6191,7 @@
         <a:bodyPr/>
         <a:lstStyle/>
         <a:p>
-          <a:endParaRPr lang="en-US"/>
+          <a:endParaRPr lang="en-US" sz="1600"/>
         </a:p>
       </dgm:t>
     </dgm:pt>
@@ -6203,26 +6202,26 @@
         <a:bodyPr/>
         <a:lstStyle/>
         <a:p>
-          <a:endParaRPr lang="en-US"/>
+          <a:endParaRPr lang="en-US" sz="1600"/>
         </a:p>
       </dgm:t>
     </dgm:pt>
     <dgm:pt modelId="{838E999C-B9E9-43D0-BF0C-639E989F8F29}">
-      <dgm:prSet/>
+      <dgm:prSet custT="1"/>
       <dgm:spPr/>
       <dgm:t>
         <a:bodyPr/>
         <a:lstStyle/>
         <a:p>
           <a:r>
-            <a:rPr lang="en-US" dirty="0"/>
+            <a:rPr lang="en-US" sz="1600" dirty="0"/>
             <a:t>Most</a:t>
           </a:r>
           <a:r>
-            <a:rPr lang="en-US" baseline="0" dirty="0"/>
+            <a:rPr lang="en-US" sz="1600" baseline="0" dirty="0"/>
             <a:t> Devices are classified as Top Function- IP Phone (33.72%), Workstation(20.92 %), Switch(10.49%),Computer(7.30 %) </a:t>
           </a:r>
-          <a:endParaRPr lang="en-US" dirty="0"/>
+          <a:endParaRPr lang="en-US" sz="1600" dirty="0"/>
         </a:p>
       </dgm:t>
     </dgm:pt>
@@ -6233,7 +6232,7 @@
         <a:bodyPr/>
         <a:lstStyle/>
         <a:p>
-          <a:endParaRPr lang="en-US"/>
+          <a:endParaRPr lang="en-US" sz="1600"/>
         </a:p>
       </dgm:t>
     </dgm:pt>
@@ -6244,7 +6243,7 @@
         <a:bodyPr/>
         <a:lstStyle/>
         <a:p>
-          <a:endParaRPr lang="en-US"/>
+          <a:endParaRPr lang="en-US" sz="1600"/>
         </a:p>
       </dgm:t>
     </dgm:pt>
@@ -6382,14 +6381,14 @@
         <a:lstStyle/>
         <a:p>
           <a:r>
-            <a:rPr lang="en-US" sz="2400" dirty="0"/>
+            <a:rPr lang="en-US" sz="1600" dirty="0"/>
             <a:t>Vendors which account for large no of devices are </a:t>
           </a:r>
           <a:r>
-            <a:rPr lang="en-GB" sz="2400" b="0" i="0" dirty="0"/>
+            <a:rPr lang="en-GB" sz="1600" b="0" i="0" dirty="0"/>
             <a:t>Cisco IP Phone 7942(14.71%), Cisco IP Phone 7692(8.41%), Cisco IP Phone(7.67%),HP(7.51 %), Intel(7.22%)</a:t>
           </a:r>
-          <a:endParaRPr lang="en-US" sz="2400" dirty="0"/>
+          <a:endParaRPr lang="en-US" sz="1600" dirty="0"/>
         </a:p>
       </dgm:t>
     </dgm:pt>
@@ -6400,7 +6399,7 @@
         <a:bodyPr/>
         <a:lstStyle/>
         <a:p>
-          <a:endParaRPr lang="en-US"/>
+          <a:endParaRPr lang="en-US" sz="1600"/>
         </a:p>
       </dgm:t>
     </dgm:pt>
@@ -6411,7 +6410,7 @@
         <a:bodyPr/>
         <a:lstStyle/>
         <a:p>
-          <a:endParaRPr lang="en-US"/>
+          <a:endParaRPr lang="en-US" sz="1600"/>
         </a:p>
       </dgm:t>
     </dgm:pt>
@@ -6423,7 +6422,7 @@
         <a:lstStyle/>
         <a:p>
           <a:r>
-            <a:rPr lang="en-US" sz="2400" dirty="0"/>
+            <a:rPr lang="en-US" sz="1600" dirty="0"/>
             <a:t>Valid Mac Address should be 12 hexadecimal characters or 17 characters with separators. We found multiple inconsistent format too short (2,3,4..) , Too long (20-29) and mixed formatting issues.</a:t>
           </a:r>
         </a:p>
@@ -6436,7 +6435,7 @@
         <a:bodyPr/>
         <a:lstStyle/>
         <a:p>
-          <a:endParaRPr lang="en-US"/>
+          <a:endParaRPr lang="en-US" sz="1600"/>
         </a:p>
       </dgm:t>
     </dgm:pt>
@@ -6447,7 +6446,7 @@
         <a:bodyPr/>
         <a:lstStyle/>
         <a:p>
-          <a:endParaRPr lang="en-US"/>
+          <a:endParaRPr lang="en-US" sz="1600"/>
         </a:p>
       </dgm:t>
     </dgm:pt>
@@ -6459,7 +6458,7 @@
         <a:lstStyle/>
         <a:p>
           <a:r>
-            <a:rPr lang="en-US" sz="2400" dirty="0"/>
+            <a:rPr lang="en-US" sz="1600" dirty="0"/>
             <a:t>The data has multiple low frequency OS and vendor categories (&lt;0.1%). Need for category consolidation.</a:t>
           </a:r>
         </a:p>
@@ -6472,7 +6471,7 @@
         <a:bodyPr/>
         <a:lstStyle/>
         <a:p>
-          <a:endParaRPr lang="en-NL"/>
+          <a:endParaRPr lang="en-NL" sz="1600"/>
         </a:p>
       </dgm:t>
     </dgm:pt>
@@ -6483,7 +6482,7 @@
         <a:bodyPr/>
         <a:lstStyle/>
         <a:p>
-          <a:endParaRPr lang="en-NL"/>
+          <a:endParaRPr lang="en-NL" sz="1600"/>
         </a:p>
       </dgm:t>
     </dgm:pt>
@@ -6592,14 +6591,14 @@
       </dgm:t>
     </dgm:pt>
     <dgm:pt modelId="{5A76AAAB-A119-4720-BFBC-6B7CDE7C1E35}">
-      <dgm:prSet/>
+      <dgm:prSet custT="1"/>
       <dgm:spPr/>
       <dgm:t>
         <a:bodyPr/>
         <a:lstStyle/>
         <a:p>
           <a:r>
-            <a:rPr lang="en-US" dirty="0"/>
+            <a:rPr lang="en-US" sz="1600" dirty="0"/>
             <a:t>Optimize Error computation logic. </a:t>
           </a:r>
         </a:p>
@@ -6612,7 +6611,7 @@
         <a:bodyPr/>
         <a:lstStyle/>
         <a:p>
-          <a:endParaRPr lang="en-US"/>
+          <a:endParaRPr lang="en-US" sz="1600"/>
         </a:p>
       </dgm:t>
     </dgm:pt>
@@ -6623,22 +6622,22 @@
         <a:bodyPr/>
         <a:lstStyle/>
         <a:p>
-          <a:endParaRPr lang="en-US"/>
+          <a:endParaRPr lang="en-US" sz="1600"/>
         </a:p>
       </dgm:t>
     </dgm:pt>
     <dgm:pt modelId="{398AB460-EB82-4F00-A66D-777E1D71E3DB}">
-      <dgm:prSet/>
+      <dgm:prSet custT="1"/>
       <dgm:spPr/>
       <dgm:t>
         <a:bodyPr/>
         <a:lstStyle/>
         <a:p>
           <a:r>
-            <a:rPr lang="en-IN" dirty="0"/>
+            <a:rPr lang="en-IN" sz="1600" dirty="0"/>
             <a:t>Scalability of Dashboard filters </a:t>
           </a:r>
-          <a:endParaRPr lang="en-US" dirty="0"/>
+          <a:endParaRPr lang="en-US" sz="1600" dirty="0"/>
         </a:p>
       </dgm:t>
     </dgm:pt>
@@ -6649,7 +6648,7 @@
         <a:bodyPr/>
         <a:lstStyle/>
         <a:p>
-          <a:endParaRPr lang="en-US"/>
+          <a:endParaRPr lang="en-US" sz="1600"/>
         </a:p>
       </dgm:t>
     </dgm:pt>
@@ -6660,19 +6659,19 @@
         <a:bodyPr/>
         <a:lstStyle/>
         <a:p>
-          <a:endParaRPr lang="en-US"/>
+          <a:endParaRPr lang="en-US" sz="1600"/>
         </a:p>
       </dgm:t>
     </dgm:pt>
     <dgm:pt modelId="{E2DC0291-EB28-4531-97F6-17B5F529F6D7}">
-      <dgm:prSet/>
+      <dgm:prSet custT="1"/>
       <dgm:spPr/>
       <dgm:t>
         <a:bodyPr/>
         <a:lstStyle/>
         <a:p>
           <a:r>
-            <a:rPr lang="en-US" dirty="0"/>
+            <a:rPr lang="en-US" sz="1600" dirty="0"/>
             <a:t>Improve the data validation layer at the data ingestion level</a:t>
           </a:r>
         </a:p>
@@ -6685,7 +6684,7 @@
         <a:bodyPr/>
         <a:lstStyle/>
         <a:p>
-          <a:endParaRPr lang="en-US"/>
+          <a:endParaRPr lang="en-US" sz="1600"/>
         </a:p>
       </dgm:t>
     </dgm:pt>
@@ -6696,26 +6695,26 @@
         <a:bodyPr/>
         <a:lstStyle/>
         <a:p>
-          <a:endParaRPr lang="en-US"/>
+          <a:endParaRPr lang="en-US" sz="1600"/>
         </a:p>
       </dgm:t>
     </dgm:pt>
     <dgm:pt modelId="{08C01034-E6A9-4995-AEDF-EDBB44DB745B}">
-      <dgm:prSet/>
+      <dgm:prSet custT="1"/>
       <dgm:spPr/>
       <dgm:t>
         <a:bodyPr/>
         <a:lstStyle/>
         <a:p>
           <a:r>
-            <a:rPr lang="en-US" dirty="0"/>
+            <a:rPr lang="en-US" sz="1600" dirty="0"/>
             <a:t>Continuous monitoring</a:t>
           </a:r>
           <a:r>
-            <a:rPr lang="en-US" baseline="0" dirty="0"/>
+            <a:rPr lang="en-US" sz="1600" baseline="0" dirty="0"/>
             <a:t> and logging </a:t>
           </a:r>
-          <a:endParaRPr lang="en-US" dirty="0"/>
+          <a:endParaRPr lang="en-US" sz="1600" dirty="0"/>
         </a:p>
       </dgm:t>
     </dgm:pt>
@@ -6726,7 +6725,7 @@
         <a:bodyPr/>
         <a:lstStyle/>
         <a:p>
-          <a:endParaRPr lang="en-US"/>
+          <a:endParaRPr lang="en-US" sz="1600"/>
         </a:p>
       </dgm:t>
     </dgm:pt>
@@ -6737,19 +6736,19 @@
         <a:bodyPr/>
         <a:lstStyle/>
         <a:p>
-          <a:endParaRPr lang="en-US"/>
+          <a:endParaRPr lang="en-US" sz="1600"/>
         </a:p>
       </dgm:t>
     </dgm:pt>
     <dgm:pt modelId="{B78FFCA9-7C4C-4F59-A931-A80A05A1C958}">
-      <dgm:prSet/>
+      <dgm:prSet custT="1"/>
       <dgm:spPr/>
       <dgm:t>
         <a:bodyPr/>
         <a:lstStyle/>
         <a:p>
           <a:r>
-            <a:rPr lang="en-US" dirty="0"/>
+            <a:rPr lang="en-US" sz="1600" dirty="0"/>
             <a:t>Enhance data model structure</a:t>
           </a:r>
         </a:p>
@@ -6762,7 +6761,7 @@
         <a:bodyPr/>
         <a:lstStyle/>
         <a:p>
-          <a:endParaRPr lang="en-US"/>
+          <a:endParaRPr lang="en-US" sz="1600"/>
         </a:p>
       </dgm:t>
     </dgm:pt>
@@ -6773,7 +6772,7 @@
         <a:bodyPr/>
         <a:lstStyle/>
         <a:p>
-          <a:endParaRPr lang="en-US"/>
+          <a:endParaRPr lang="en-US" sz="1600"/>
         </a:p>
       </dgm:t>
     </dgm:pt>
@@ -7129,17 +7128,17 @@
       </dgm:t>
     </dgm:pt>
     <dgm:pt modelId="{466CC3D7-DD52-463A-89E6-3AD27EA0A609}">
-      <dgm:prSet/>
+      <dgm:prSet custT="1"/>
       <dgm:spPr/>
       <dgm:t>
         <a:bodyPr/>
         <a:lstStyle/>
         <a:p>
           <a:r>
-            <a:rPr lang="en-IN" dirty="0"/>
+            <a:rPr lang="en-IN" sz="1200" dirty="0"/>
             <a:t>Focus on High-Error Assets </a:t>
           </a:r>
-          <a:endParaRPr lang="en-US" dirty="0"/>
+          <a:endParaRPr lang="en-US" sz="1200" dirty="0"/>
         </a:p>
       </dgm:t>
     </dgm:pt>
@@ -7150,7 +7149,7 @@
         <a:bodyPr/>
         <a:lstStyle/>
         <a:p>
-          <a:endParaRPr lang="en-US"/>
+          <a:endParaRPr lang="en-US" sz="1200"/>
         </a:p>
       </dgm:t>
     </dgm:pt>
@@ -7161,19 +7160,19 @@
         <a:bodyPr/>
         <a:lstStyle/>
         <a:p>
-          <a:endParaRPr lang="en-US"/>
+          <a:endParaRPr lang="en-US" sz="1200"/>
         </a:p>
       </dgm:t>
     </dgm:pt>
     <dgm:pt modelId="{69A668C0-88F2-4064-861A-310050AF1783}">
-      <dgm:prSet/>
+      <dgm:prSet custT="1"/>
       <dgm:spPr/>
       <dgm:t>
         <a:bodyPr/>
         <a:lstStyle/>
         <a:p>
           <a:r>
-            <a:rPr lang="en-US" dirty="0"/>
+            <a:rPr lang="en-US" sz="1200" dirty="0"/>
             <a:t>Fix critical Data Quality Issues like missing fingerprints, duplicate MAC address.  </a:t>
           </a:r>
         </a:p>
@@ -7186,7 +7185,7 @@
         <a:bodyPr/>
         <a:lstStyle/>
         <a:p>
-          <a:endParaRPr lang="en-US"/>
+          <a:endParaRPr lang="en-US" sz="1200"/>
         </a:p>
       </dgm:t>
     </dgm:pt>
@@ -7197,19 +7196,19 @@
         <a:bodyPr/>
         <a:lstStyle/>
         <a:p>
-          <a:endParaRPr lang="en-US"/>
+          <a:endParaRPr lang="en-US" sz="1200"/>
         </a:p>
       </dgm:t>
     </dgm:pt>
     <dgm:pt modelId="{5CC692F5-9C36-40D2-BFB7-B5AAB123F8B2}">
-      <dgm:prSet/>
+      <dgm:prSet custT="1"/>
       <dgm:spPr/>
       <dgm:t>
         <a:bodyPr/>
         <a:lstStyle/>
         <a:p>
           <a:r>
-            <a:rPr lang="en-US" dirty="0"/>
+            <a:rPr lang="en-US" sz="1200" dirty="0"/>
             <a:t>Risk Based Asset Management as it shows higher error.</a:t>
           </a:r>
         </a:p>
@@ -7222,7 +7221,7 @@
         <a:bodyPr/>
         <a:lstStyle/>
         <a:p>
-          <a:endParaRPr lang="en-US"/>
+          <a:endParaRPr lang="en-US" sz="1200"/>
         </a:p>
       </dgm:t>
     </dgm:pt>
@@ -7233,19 +7232,19 @@
         <a:bodyPr/>
         <a:lstStyle/>
         <a:p>
-          <a:endParaRPr lang="en-US"/>
+          <a:endParaRPr lang="en-US" sz="1200"/>
         </a:p>
       </dgm:t>
     </dgm:pt>
     <dgm:pt modelId="{42D7CBE3-7808-4C11-8D74-6BA73FDD61B1}">
-      <dgm:prSet/>
+      <dgm:prSet custT="1"/>
       <dgm:spPr/>
       <dgm:t>
         <a:bodyPr/>
         <a:lstStyle/>
         <a:p>
           <a:r>
-            <a:rPr lang="en-US" dirty="0"/>
+            <a:rPr lang="en-US" sz="1200" dirty="0"/>
             <a:t>OS and Model Type standardization</a:t>
           </a:r>
         </a:p>
@@ -7258,7 +7257,7 @@
         <a:bodyPr/>
         <a:lstStyle/>
         <a:p>
-          <a:endParaRPr lang="en-US"/>
+          <a:endParaRPr lang="en-US" sz="1200"/>
         </a:p>
       </dgm:t>
     </dgm:pt>
@@ -7269,19 +7268,19 @@
         <a:bodyPr/>
         <a:lstStyle/>
         <a:p>
-          <a:endParaRPr lang="en-US"/>
+          <a:endParaRPr lang="en-US" sz="1200"/>
         </a:p>
       </dgm:t>
     </dgm:pt>
     <dgm:pt modelId="{A1548615-C7CC-419B-96B9-150ECAE8B77B}">
-      <dgm:prSet/>
+      <dgm:prSet custT="1"/>
       <dgm:spPr/>
       <dgm:t>
         <a:bodyPr/>
         <a:lstStyle/>
         <a:p>
           <a:r>
-            <a:rPr lang="en-US" dirty="0"/>
+            <a:rPr lang="en-US" sz="1200" dirty="0"/>
             <a:t>Data Quality Score as Governance Metric</a:t>
           </a:r>
         </a:p>
@@ -7294,7 +7293,7 @@
         <a:bodyPr/>
         <a:lstStyle/>
         <a:p>
-          <a:endParaRPr lang="en-NL"/>
+          <a:endParaRPr lang="en-NL" sz="1200"/>
         </a:p>
       </dgm:t>
     </dgm:pt>
@@ -7305,7 +7304,7 @@
         <a:bodyPr/>
         <a:lstStyle/>
         <a:p>
-          <a:endParaRPr lang="en-NL"/>
+          <a:endParaRPr lang="en-NL" sz="1200"/>
         </a:p>
       </dgm:t>
     </dgm:pt>
@@ -8545,7 +8544,7 @@
         </a:bodyPr>
         <a:lstStyle/>
         <a:p>
-          <a:pPr marL="0" lvl="0" indent="0" algn="l" defTabSz="977900">
+          <a:pPr marL="0" lvl="0" indent="0" algn="l" defTabSz="711200">
             <a:lnSpc>
               <a:spcPct val="90000"/>
             </a:lnSpc>
@@ -8558,10 +8557,10 @@
             <a:buNone/>
           </a:pPr>
           <a:r>
-            <a:rPr lang="en-IN" sz="2200" kern="1200" dirty="0"/>
+            <a:rPr lang="en-IN" sz="1600" kern="1200" dirty="0"/>
             <a:t>The raw dataset contained 2 columns: id and encoded(Base64 format)</a:t>
           </a:r>
-          <a:endParaRPr lang="en-US" sz="2200" kern="1200" dirty="0"/>
+          <a:endParaRPr lang="en-US" sz="1600" kern="1200" dirty="0"/>
         </a:p>
       </dsp:txBody>
       <dsp:txXfrm>
@@ -8697,7 +8696,7 @@
         </a:bodyPr>
         <a:lstStyle/>
         <a:p>
-          <a:pPr marL="0" lvl="0" indent="0" algn="l" defTabSz="977900">
+          <a:pPr marL="0" lvl="0" indent="0" algn="l" defTabSz="711200">
             <a:lnSpc>
               <a:spcPct val="90000"/>
             </a:lnSpc>
@@ -8710,7 +8709,7 @@
             <a:buNone/>
           </a:pPr>
           <a:r>
-            <a:rPr lang="en-US" sz="2200" kern="1200" dirty="0"/>
+            <a:rPr lang="en-US" sz="1600" kern="1200" dirty="0"/>
             <a:t>Encoded columns was decoded from Base64 into structured JSON format and identified invalid/failed decoding row(~1 row).</a:t>
           </a:r>
         </a:p>
@@ -8848,7 +8847,7 @@
         </a:bodyPr>
         <a:lstStyle/>
         <a:p>
-          <a:pPr marL="0" lvl="0" indent="0" algn="l" defTabSz="977900">
+          <a:pPr marL="0" lvl="0" indent="0" algn="l" defTabSz="711200">
             <a:lnSpc>
               <a:spcPct val="90000"/>
             </a:lnSpc>
@@ -8861,10 +8860,10 @@
             <a:buNone/>
           </a:pPr>
           <a:r>
-            <a:rPr lang="en-IN" sz="2200" kern="1200" dirty="0"/>
+            <a:rPr lang="en-IN" sz="1600" kern="1200" dirty="0"/>
             <a:t>Extracted multiple attributes contain id, Asset ID,MAC Address, OS, Function, DHCP Options Fingerprint etc. </a:t>
           </a:r>
-          <a:endParaRPr lang="en-US" sz="2200" kern="1200" dirty="0"/>
+          <a:endParaRPr lang="en-US" sz="1600" kern="1200" dirty="0"/>
         </a:p>
       </dsp:txBody>
       <dsp:txXfrm>
@@ -9000,7 +8999,7 @@
         </a:bodyPr>
         <a:lstStyle/>
         <a:p>
-          <a:pPr marL="0" lvl="0" indent="0" algn="l" defTabSz="977900">
+          <a:pPr marL="0" lvl="0" indent="0" algn="l" defTabSz="711200">
             <a:lnSpc>
               <a:spcPct val="90000"/>
             </a:lnSpc>
@@ -9013,10 +9012,10 @@
             <a:buNone/>
           </a:pPr>
           <a:r>
-            <a:rPr lang="en-IN" sz="2200" kern="1200" dirty="0"/>
+            <a:rPr lang="en-IN" sz="1600" kern="1200" dirty="0"/>
             <a:t>There are total 88513 records with 10 columns</a:t>
           </a:r>
-          <a:endParaRPr lang="en-US" sz="2200" kern="1200" dirty="0"/>
+          <a:endParaRPr lang="en-US" sz="1600" kern="1200" dirty="0"/>
         </a:p>
       </dsp:txBody>
       <dsp:txXfrm>
@@ -9117,12 +9116,12 @@
         <a:fontRef idx="minor"/>
       </dsp:style>
       <dsp:txBody>
-        <a:bodyPr spcFirstLastPara="0" vert="horz" wrap="square" lIns="72390" tIns="72390" rIns="72390" bIns="72390" numCol="1" spcCol="1270" anchor="t" anchorCtr="0">
+        <a:bodyPr spcFirstLastPara="0" vert="horz" wrap="square" lIns="60960" tIns="60960" rIns="60960" bIns="60960" numCol="1" spcCol="1270" anchor="t" anchorCtr="0">
           <a:noAutofit/>
         </a:bodyPr>
         <a:lstStyle/>
         <a:p>
-          <a:pPr marL="0" lvl="0" indent="0" algn="l" defTabSz="844550">
+          <a:pPr marL="0" lvl="0" indent="0" algn="l" defTabSz="711200">
             <a:lnSpc>
               <a:spcPct val="90000"/>
             </a:lnSpc>
@@ -9135,10 +9134,10 @@
             <a:buNone/>
           </a:pPr>
           <a:r>
-            <a:rPr lang="en-IN" sz="1900" kern="1200" dirty="0"/>
+            <a:rPr lang="en-IN" sz="1600" kern="1200" dirty="0"/>
             <a:t>There are high null percentage for certain columns like DHCP Device Class(55.8 %),DHCP Vendor Class (45.1%), OS (35.3 %), DHCP Options Fingerprint(29.4 %),DHCP Request Fingerprint(29.4%)</a:t>
           </a:r>
-          <a:endParaRPr lang="en-US" sz="1900" kern="1200" dirty="0"/>
+          <a:endParaRPr lang="en-US" sz="1600" kern="1200" dirty="0"/>
         </a:p>
       </dsp:txBody>
       <dsp:txXfrm>
@@ -9227,12 +9226,12 @@
         <a:fontRef idx="minor"/>
       </dsp:style>
       <dsp:txBody>
-        <a:bodyPr spcFirstLastPara="0" vert="horz" wrap="square" lIns="72390" tIns="72390" rIns="72390" bIns="72390" numCol="1" spcCol="1270" anchor="t" anchorCtr="0">
+        <a:bodyPr spcFirstLastPara="0" vert="horz" wrap="square" lIns="60960" tIns="60960" rIns="60960" bIns="60960" numCol="1" spcCol="1270" anchor="t" anchorCtr="0">
           <a:noAutofit/>
         </a:bodyPr>
         <a:lstStyle/>
         <a:p>
-          <a:pPr marL="0" lvl="0" indent="0" algn="l" defTabSz="844550">
+          <a:pPr marL="0" lvl="0" indent="0" algn="l" defTabSz="711200">
             <a:lnSpc>
               <a:spcPct val="90000"/>
             </a:lnSpc>
@@ -9245,30 +9244,30 @@
             <a:buNone/>
           </a:pPr>
           <a:r>
-            <a:rPr lang="en-US" sz="1900" kern="1200" dirty="0"/>
+            <a:rPr lang="en-US" sz="1600" kern="1200" dirty="0"/>
             <a:t>Detected unique values for </a:t>
           </a:r>
           <a:r>
-            <a:rPr lang="en-GB" sz="1900" b="0" i="0" kern="1200" dirty="0"/>
+            <a:rPr lang="en-GB" sz="1600" b="0" i="0" kern="1200" dirty="0"/>
             <a:t>Asset ID(</a:t>
           </a:r>
           <a:r>
-            <a:rPr lang="en-NL" sz="1900" b="0" i="0" kern="1200" dirty="0"/>
+            <a:rPr lang="en-NL" sz="1600" b="0" i="0" kern="1200" dirty="0"/>
             <a:t>88513</a:t>
           </a:r>
           <a:r>
-            <a:rPr lang="en-GB" sz="1900" b="0" i="0" kern="1200" dirty="0"/>
+            <a:rPr lang="en-GB" sz="1600" b="0" i="0" kern="1200" dirty="0"/>
             <a:t>),OS(32),Function(83),Vendor and Model(314), </a:t>
           </a:r>
           <a:r>
-            <a:rPr lang="en-IN" sz="1900" kern="1200" dirty="0"/>
+            <a:rPr lang="en-IN" sz="1600" kern="1200" dirty="0"/>
             <a:t>DHCP Options Fingerprint(162), DHCP Request Fingerprint(135),</a:t>
           </a:r>
           <a:r>
-            <a:rPr lang="en-GB" sz="1900" b="0" i="0" kern="1200" dirty="0"/>
+            <a:rPr lang="en-GB" sz="1600" b="0" i="0" kern="1200" dirty="0"/>
             <a:t> DHCP Vendor Class(121), DHCP Device Class(14)</a:t>
           </a:r>
-          <a:endParaRPr lang="en-US" sz="1900" kern="1200" dirty="0"/>
+          <a:endParaRPr lang="en-US" sz="1600" kern="1200" dirty="0"/>
         </a:p>
       </dsp:txBody>
       <dsp:txXfrm>
@@ -9357,12 +9356,12 @@
         <a:fontRef idx="minor"/>
       </dsp:style>
       <dsp:txBody>
-        <a:bodyPr spcFirstLastPara="0" vert="horz" wrap="square" lIns="72390" tIns="72390" rIns="72390" bIns="72390" numCol="1" spcCol="1270" anchor="t" anchorCtr="0">
+        <a:bodyPr spcFirstLastPara="0" vert="horz" wrap="square" lIns="60960" tIns="60960" rIns="60960" bIns="60960" numCol="1" spcCol="1270" anchor="t" anchorCtr="0">
           <a:noAutofit/>
         </a:bodyPr>
         <a:lstStyle/>
         <a:p>
-          <a:pPr marL="0" lvl="0" indent="0" algn="l" defTabSz="844550">
+          <a:pPr marL="0" lvl="0" indent="0" algn="l" defTabSz="711200">
             <a:lnSpc>
               <a:spcPct val="90000"/>
             </a:lnSpc>
@@ -9375,11 +9374,11 @@
             <a:buNone/>
           </a:pPr>
           <a:r>
-            <a:rPr lang="en-US" sz="1900" kern="1200" dirty="0"/>
+            <a:rPr lang="en-US" sz="1600" kern="1200" dirty="0"/>
             <a:t>The majority of the devices run on the Top OS - </a:t>
           </a:r>
           <a:r>
-            <a:rPr lang="en-GB" sz="1900" b="0" i="0" kern="1200" dirty="0"/>
+            <a:rPr lang="en-GB" sz="1600" b="0" i="0" kern="1200" dirty="0"/>
             <a:t>Apple Desktop OS(16.68 %), Linux (16.10%), Embedded Firmware(15.22 %), Chrome OS(11.59%).</a:t>
           </a:r>
         </a:p>
@@ -9470,12 +9469,12 @@
         <a:fontRef idx="minor"/>
       </dsp:style>
       <dsp:txBody>
-        <a:bodyPr spcFirstLastPara="0" vert="horz" wrap="square" lIns="72390" tIns="72390" rIns="72390" bIns="72390" numCol="1" spcCol="1270" anchor="t" anchorCtr="0">
+        <a:bodyPr spcFirstLastPara="0" vert="horz" wrap="square" lIns="60960" tIns="60960" rIns="60960" bIns="60960" numCol="1" spcCol="1270" anchor="t" anchorCtr="0">
           <a:noAutofit/>
         </a:bodyPr>
         <a:lstStyle/>
         <a:p>
-          <a:pPr marL="0" lvl="0" indent="0" algn="l" defTabSz="844550">
+          <a:pPr marL="0" lvl="0" indent="0" algn="l" defTabSz="711200">
             <a:lnSpc>
               <a:spcPct val="90000"/>
             </a:lnSpc>
@@ -9488,14 +9487,14 @@
             <a:buNone/>
           </a:pPr>
           <a:r>
-            <a:rPr lang="en-US" sz="1900" kern="1200" dirty="0"/>
+            <a:rPr lang="en-US" sz="1600" kern="1200" dirty="0"/>
             <a:t>Most</a:t>
           </a:r>
           <a:r>
-            <a:rPr lang="en-US" sz="1900" kern="1200" baseline="0" dirty="0"/>
+            <a:rPr lang="en-US" sz="1600" kern="1200" baseline="0" dirty="0"/>
             <a:t> Devices are classified as Top Function- IP Phone (33.72%), Workstation(20.92 %), Switch(10.49%),Computer(7.30 %) </a:t>
           </a:r>
-          <a:endParaRPr lang="en-US" sz="1900" kern="1200" dirty="0"/>
+          <a:endParaRPr lang="en-US" sz="1600" kern="1200" dirty="0"/>
         </a:p>
       </dsp:txBody>
       <dsp:txXfrm>
@@ -9522,7 +9521,7 @@
       </dsp:nvSpPr>
       <dsp:spPr>
         <a:xfrm>
-          <a:off x="0" y="2010"/>
+          <a:off x="0" y="1543"/>
           <a:ext cx="8987404" cy="0"/>
         </a:xfrm>
         <a:prstGeom prst="line">
@@ -9571,8 +9570,8 @@
       </dsp:nvSpPr>
       <dsp:spPr>
         <a:xfrm>
-          <a:off x="0" y="2010"/>
-          <a:ext cx="8987404" cy="1339897"/>
+          <a:off x="0" y="1543"/>
+          <a:ext cx="8987404" cy="1029037"/>
         </a:xfrm>
         <a:prstGeom prst="rect">
           <a:avLst/>
@@ -9596,12 +9595,12 @@
         <a:fontRef idx="minor"/>
       </dsp:style>
       <dsp:txBody>
-        <a:bodyPr spcFirstLastPara="0" vert="horz" wrap="square" lIns="91440" tIns="91440" rIns="91440" bIns="91440" numCol="1" spcCol="1270" anchor="t" anchorCtr="0">
+        <a:bodyPr spcFirstLastPara="0" vert="horz" wrap="square" lIns="60960" tIns="60960" rIns="60960" bIns="60960" numCol="1" spcCol="1270" anchor="t" anchorCtr="0">
           <a:noAutofit/>
         </a:bodyPr>
         <a:lstStyle/>
         <a:p>
-          <a:pPr marL="0" lvl="0" indent="0" algn="l" defTabSz="1066800">
+          <a:pPr marL="0" lvl="0" indent="0" algn="l" defTabSz="711200">
             <a:lnSpc>
               <a:spcPct val="90000"/>
             </a:lnSpc>
@@ -9614,19 +9613,19 @@
             <a:buNone/>
           </a:pPr>
           <a:r>
-            <a:rPr lang="en-US" sz="2400" kern="1200" dirty="0"/>
+            <a:rPr lang="en-US" sz="1600" kern="1200" dirty="0"/>
             <a:t>Vendors which account for large no of devices are </a:t>
           </a:r>
           <a:r>
-            <a:rPr lang="en-GB" sz="2400" b="0" i="0" kern="1200" dirty="0"/>
+            <a:rPr lang="en-GB" sz="1600" b="0" i="0" kern="1200" dirty="0"/>
             <a:t>Cisco IP Phone 7942(14.71%), Cisco IP Phone 7692(8.41%), Cisco IP Phone(7.67%),HP(7.51 %), Intel(7.22%)</a:t>
           </a:r>
-          <a:endParaRPr lang="en-US" sz="2400" kern="1200" dirty="0"/>
+          <a:endParaRPr lang="en-US" sz="1600" kern="1200" dirty="0"/>
         </a:p>
       </dsp:txBody>
       <dsp:txXfrm>
-        <a:off x="0" y="2010"/>
-        <a:ext cx="8987404" cy="1339897"/>
+        <a:off x="0" y="1543"/>
+        <a:ext cx="8987404" cy="1029037"/>
       </dsp:txXfrm>
     </dsp:sp>
     <dsp:sp modelId="{F3BDC96A-0FB4-4878-A7DB-08DF3A643F0E}">
@@ -9636,7 +9635,7 @@
       </dsp:nvSpPr>
       <dsp:spPr>
         <a:xfrm>
-          <a:off x="0" y="1341907"/>
+          <a:off x="0" y="1030581"/>
           <a:ext cx="8987404" cy="0"/>
         </a:xfrm>
         <a:prstGeom prst="line">
@@ -9685,8 +9684,8 @@
       </dsp:nvSpPr>
       <dsp:spPr>
         <a:xfrm>
-          <a:off x="0" y="1341907"/>
-          <a:ext cx="8987404" cy="1339897"/>
+          <a:off x="0" y="1030581"/>
+          <a:ext cx="8987404" cy="1029037"/>
         </a:xfrm>
         <a:prstGeom prst="rect">
           <a:avLst/>
@@ -9710,12 +9709,12 @@
         <a:fontRef idx="minor"/>
       </dsp:style>
       <dsp:txBody>
-        <a:bodyPr spcFirstLastPara="0" vert="horz" wrap="square" lIns="91440" tIns="91440" rIns="91440" bIns="91440" numCol="1" spcCol="1270" anchor="t" anchorCtr="0">
+        <a:bodyPr spcFirstLastPara="0" vert="horz" wrap="square" lIns="60960" tIns="60960" rIns="60960" bIns="60960" numCol="1" spcCol="1270" anchor="t" anchorCtr="0">
           <a:noAutofit/>
         </a:bodyPr>
         <a:lstStyle/>
         <a:p>
-          <a:pPr marL="0" lvl="0" indent="0" algn="l" defTabSz="1066800">
+          <a:pPr marL="0" lvl="0" indent="0" algn="l" defTabSz="711200">
             <a:lnSpc>
               <a:spcPct val="90000"/>
             </a:lnSpc>
@@ -9728,14 +9727,14 @@
             <a:buNone/>
           </a:pPr>
           <a:r>
-            <a:rPr lang="en-US" sz="2400" kern="1200" dirty="0"/>
+            <a:rPr lang="en-US" sz="1600" kern="1200" dirty="0"/>
             <a:t>Valid Mac Address should be 12 hexadecimal characters or 17 characters with separators. We found multiple inconsistent format too short (2,3,4..) , Too long (20-29) and mixed formatting issues.</a:t>
           </a:r>
         </a:p>
       </dsp:txBody>
       <dsp:txXfrm>
-        <a:off x="0" y="1341907"/>
-        <a:ext cx="8987404" cy="1339897"/>
+        <a:off x="0" y="1030581"/>
+        <a:ext cx="8987404" cy="1029037"/>
       </dsp:txXfrm>
     </dsp:sp>
     <dsp:sp modelId="{068325E5-7485-4947-A1CA-A87864398164}">
@@ -9745,7 +9744,7 @@
       </dsp:nvSpPr>
       <dsp:spPr>
         <a:xfrm>
-          <a:off x="0" y="2681804"/>
+          <a:off x="0" y="2059619"/>
           <a:ext cx="8987404" cy="0"/>
         </a:xfrm>
         <a:prstGeom prst="line">
@@ -9794,8 +9793,8 @@
       </dsp:nvSpPr>
       <dsp:spPr>
         <a:xfrm>
-          <a:off x="0" y="2683815"/>
-          <a:ext cx="8987404" cy="970125"/>
+          <a:off x="0" y="2061162"/>
+          <a:ext cx="8987404" cy="745054"/>
         </a:xfrm>
         <a:prstGeom prst="rect">
           <a:avLst/>
@@ -9819,12 +9818,12 @@
         <a:fontRef idx="minor"/>
       </dsp:style>
       <dsp:txBody>
-        <a:bodyPr spcFirstLastPara="0" vert="horz" wrap="square" lIns="91440" tIns="91440" rIns="91440" bIns="91440" numCol="1" spcCol="1270" anchor="t" anchorCtr="0">
+        <a:bodyPr spcFirstLastPara="0" vert="horz" wrap="square" lIns="60960" tIns="60960" rIns="60960" bIns="60960" numCol="1" spcCol="1270" anchor="t" anchorCtr="0">
           <a:noAutofit/>
         </a:bodyPr>
         <a:lstStyle/>
         <a:p>
-          <a:pPr marL="0" lvl="0" indent="0" algn="l" defTabSz="1066800">
+          <a:pPr marL="0" lvl="0" indent="0" algn="l" defTabSz="711200">
             <a:lnSpc>
               <a:spcPct val="90000"/>
             </a:lnSpc>
@@ -9837,14 +9836,14 @@
             <a:buNone/>
           </a:pPr>
           <a:r>
-            <a:rPr lang="en-US" sz="2400" kern="1200" dirty="0"/>
+            <a:rPr lang="en-US" sz="1600" kern="1200" dirty="0"/>
             <a:t>The data has multiple low frequency OS and vendor categories (&lt;0.1%). Need for category consolidation.</a:t>
           </a:r>
         </a:p>
       </dsp:txBody>
       <dsp:txXfrm>
-        <a:off x="0" y="2683815"/>
-        <a:ext cx="8987404" cy="970125"/>
+        <a:off x="0" y="2061162"/>
+        <a:ext cx="8987404" cy="745054"/>
       </dsp:txXfrm>
     </dsp:sp>
   </dsp:spTree>
@@ -9984,7 +9983,7 @@
         </a:bodyPr>
         <a:lstStyle/>
         <a:p>
-          <a:pPr marL="0" lvl="0" indent="0" algn="l" defTabSz="844550">
+          <a:pPr marL="0" lvl="0" indent="0" algn="l" defTabSz="711200">
             <a:lnSpc>
               <a:spcPct val="90000"/>
             </a:lnSpc>
@@ -9997,7 +9996,7 @@
             <a:buNone/>
           </a:pPr>
           <a:r>
-            <a:rPr lang="en-US" sz="1900" kern="1200" dirty="0"/>
+            <a:rPr lang="en-US" sz="1600" kern="1200" dirty="0"/>
             <a:t>Optimize Error computation logic. </a:t>
           </a:r>
         </a:p>
@@ -10132,7 +10131,7 @@
         </a:bodyPr>
         <a:lstStyle/>
         <a:p>
-          <a:pPr marL="0" lvl="0" indent="0" algn="l" defTabSz="844550">
+          <a:pPr marL="0" lvl="0" indent="0" algn="l" defTabSz="711200">
             <a:lnSpc>
               <a:spcPct val="90000"/>
             </a:lnSpc>
@@ -10145,10 +10144,10 @@
             <a:buNone/>
           </a:pPr>
           <a:r>
-            <a:rPr lang="en-IN" sz="1900" kern="1200" dirty="0"/>
+            <a:rPr lang="en-IN" sz="1600" kern="1200" dirty="0"/>
             <a:t>Scalability of Dashboard filters </a:t>
           </a:r>
-          <a:endParaRPr lang="en-US" sz="1900" kern="1200" dirty="0"/>
+          <a:endParaRPr lang="en-US" sz="1600" kern="1200" dirty="0"/>
         </a:p>
       </dsp:txBody>
       <dsp:txXfrm>
@@ -10281,7 +10280,7 @@
         </a:bodyPr>
         <a:lstStyle/>
         <a:p>
-          <a:pPr marL="0" lvl="0" indent="0" algn="l" defTabSz="844550">
+          <a:pPr marL="0" lvl="0" indent="0" algn="l" defTabSz="711200">
             <a:lnSpc>
               <a:spcPct val="90000"/>
             </a:lnSpc>
@@ -10294,7 +10293,7 @@
             <a:buNone/>
           </a:pPr>
           <a:r>
-            <a:rPr lang="en-US" sz="1900" kern="1200" dirty="0"/>
+            <a:rPr lang="en-US" sz="1600" kern="1200" dirty="0"/>
             <a:t>Improve the data validation layer at the data ingestion level</a:t>
           </a:r>
         </a:p>
@@ -10429,7 +10428,7 @@
         </a:bodyPr>
         <a:lstStyle/>
         <a:p>
-          <a:pPr marL="0" lvl="0" indent="0" algn="l" defTabSz="844550">
+          <a:pPr marL="0" lvl="0" indent="0" algn="l" defTabSz="711200">
             <a:lnSpc>
               <a:spcPct val="90000"/>
             </a:lnSpc>
@@ -10442,14 +10441,14 @@
             <a:buNone/>
           </a:pPr>
           <a:r>
-            <a:rPr lang="en-US" sz="1900" kern="1200" dirty="0"/>
+            <a:rPr lang="en-US" sz="1600" kern="1200" dirty="0"/>
             <a:t>Continuous monitoring</a:t>
           </a:r>
           <a:r>
-            <a:rPr lang="en-US" sz="1900" kern="1200" baseline="0" dirty="0"/>
+            <a:rPr lang="en-US" sz="1600" kern="1200" baseline="0" dirty="0"/>
             <a:t> and logging </a:t>
           </a:r>
-          <a:endParaRPr lang="en-US" sz="1900" kern="1200" dirty="0"/>
+          <a:endParaRPr lang="en-US" sz="1600" kern="1200" dirty="0"/>
         </a:p>
       </dsp:txBody>
       <dsp:txXfrm>
@@ -10582,7 +10581,7 @@
         </a:bodyPr>
         <a:lstStyle/>
         <a:p>
-          <a:pPr marL="0" lvl="0" indent="0" algn="l" defTabSz="844550">
+          <a:pPr marL="0" lvl="0" indent="0" algn="l" defTabSz="711200">
             <a:lnSpc>
               <a:spcPct val="90000"/>
             </a:lnSpc>
@@ -10595,7 +10594,7 @@
             <a:buNone/>
           </a:pPr>
           <a:r>
-            <a:rPr lang="en-US" sz="1900" kern="1200" dirty="0"/>
+            <a:rPr lang="en-US" sz="1600" kern="1200" dirty="0"/>
             <a:t>Enhance data model structure</a:t>
           </a:r>
         </a:p>
@@ -10718,12 +10717,12 @@
         <a:fontRef idx="minor"/>
       </dsp:style>
       <dsp:txBody>
-        <a:bodyPr spcFirstLastPara="0" vert="horz" wrap="square" lIns="53340" tIns="53340" rIns="53340" bIns="53340" numCol="1" spcCol="1270" anchor="ctr" anchorCtr="0">
+        <a:bodyPr spcFirstLastPara="0" vert="horz" wrap="square" lIns="45720" tIns="45720" rIns="45720" bIns="45720" numCol="1" spcCol="1270" anchor="ctr" anchorCtr="0">
           <a:noAutofit/>
         </a:bodyPr>
         <a:lstStyle/>
         <a:p>
-          <a:pPr marL="0" lvl="0" indent="0" algn="ctr" defTabSz="622300">
+          <a:pPr marL="0" lvl="0" indent="0" algn="ctr" defTabSz="533400">
             <a:lnSpc>
               <a:spcPct val="90000"/>
             </a:lnSpc>
@@ -10736,10 +10735,10 @@
             <a:buNone/>
           </a:pPr>
           <a:r>
-            <a:rPr lang="en-IN" sz="1400" kern="1200" dirty="0"/>
+            <a:rPr lang="en-IN" sz="1200" kern="1200" dirty="0"/>
             <a:t>Focus on High-Error Assets </a:t>
           </a:r>
-          <a:endParaRPr lang="en-US" sz="1400" kern="1200" dirty="0"/>
+          <a:endParaRPr lang="en-US" sz="1200" kern="1200" dirty="0"/>
         </a:p>
       </dsp:txBody>
       <dsp:txXfrm>
@@ -10848,12 +10847,12 @@
         <a:fontRef idx="minor"/>
       </dsp:style>
       <dsp:txBody>
-        <a:bodyPr spcFirstLastPara="0" vert="horz" wrap="square" lIns="53340" tIns="53340" rIns="53340" bIns="53340" numCol="1" spcCol="1270" anchor="ctr" anchorCtr="0">
+        <a:bodyPr spcFirstLastPara="0" vert="horz" wrap="square" lIns="45720" tIns="45720" rIns="45720" bIns="45720" numCol="1" spcCol="1270" anchor="ctr" anchorCtr="0">
           <a:noAutofit/>
         </a:bodyPr>
         <a:lstStyle/>
         <a:p>
-          <a:pPr marL="0" lvl="0" indent="0" algn="ctr" defTabSz="622300">
+          <a:pPr marL="0" lvl="0" indent="0" algn="ctr" defTabSz="533400">
             <a:lnSpc>
               <a:spcPct val="90000"/>
             </a:lnSpc>
@@ -10866,7 +10865,7 @@
             <a:buNone/>
           </a:pPr>
           <a:r>
-            <a:rPr lang="en-US" sz="1400" kern="1200" dirty="0"/>
+            <a:rPr lang="en-US" sz="1200" kern="1200" dirty="0"/>
             <a:t>Fix critical Data Quality Issues like missing fingerprints, duplicate MAC address.  </a:t>
           </a:r>
         </a:p>
@@ -10977,12 +10976,12 @@
         <a:fontRef idx="minor"/>
       </dsp:style>
       <dsp:txBody>
-        <a:bodyPr spcFirstLastPara="0" vert="horz" wrap="square" lIns="53340" tIns="53340" rIns="53340" bIns="53340" numCol="1" spcCol="1270" anchor="ctr" anchorCtr="0">
+        <a:bodyPr spcFirstLastPara="0" vert="horz" wrap="square" lIns="45720" tIns="45720" rIns="45720" bIns="45720" numCol="1" spcCol="1270" anchor="ctr" anchorCtr="0">
           <a:noAutofit/>
         </a:bodyPr>
         <a:lstStyle/>
         <a:p>
-          <a:pPr marL="0" lvl="0" indent="0" algn="ctr" defTabSz="622300">
+          <a:pPr marL="0" lvl="0" indent="0" algn="ctr" defTabSz="533400">
             <a:lnSpc>
               <a:spcPct val="90000"/>
             </a:lnSpc>
@@ -10995,7 +10994,7 @@
             <a:buNone/>
           </a:pPr>
           <a:r>
-            <a:rPr lang="en-US" sz="1400" kern="1200" dirty="0"/>
+            <a:rPr lang="en-US" sz="1200" kern="1200" dirty="0"/>
             <a:t>Risk Based Asset Management as it shows higher error.</a:t>
           </a:r>
         </a:p>
@@ -11106,12 +11105,12 @@
         <a:fontRef idx="minor"/>
       </dsp:style>
       <dsp:txBody>
-        <a:bodyPr spcFirstLastPara="0" vert="horz" wrap="square" lIns="53340" tIns="53340" rIns="53340" bIns="53340" numCol="1" spcCol="1270" anchor="ctr" anchorCtr="0">
+        <a:bodyPr spcFirstLastPara="0" vert="horz" wrap="square" lIns="45720" tIns="45720" rIns="45720" bIns="45720" numCol="1" spcCol="1270" anchor="ctr" anchorCtr="0">
           <a:noAutofit/>
         </a:bodyPr>
         <a:lstStyle/>
         <a:p>
-          <a:pPr marL="0" lvl="0" indent="0" algn="ctr" defTabSz="622300">
+          <a:pPr marL="0" lvl="0" indent="0" algn="ctr" defTabSz="533400">
             <a:lnSpc>
               <a:spcPct val="90000"/>
             </a:lnSpc>
@@ -11124,7 +11123,7 @@
             <a:buNone/>
           </a:pPr>
           <a:r>
-            <a:rPr lang="en-US" sz="1400" kern="1200" dirty="0"/>
+            <a:rPr lang="en-US" sz="1200" kern="1200" dirty="0"/>
             <a:t>OS and Model Type standardization</a:t>
           </a:r>
         </a:p>
@@ -11235,12 +11234,12 @@
         <a:fontRef idx="minor"/>
       </dsp:style>
       <dsp:txBody>
-        <a:bodyPr spcFirstLastPara="0" vert="horz" wrap="square" lIns="53340" tIns="53340" rIns="53340" bIns="53340" numCol="1" spcCol="1270" anchor="ctr" anchorCtr="0">
+        <a:bodyPr spcFirstLastPara="0" vert="horz" wrap="square" lIns="45720" tIns="45720" rIns="45720" bIns="45720" numCol="1" spcCol="1270" anchor="ctr" anchorCtr="0">
           <a:noAutofit/>
         </a:bodyPr>
         <a:lstStyle/>
         <a:p>
-          <a:pPr marL="0" lvl="0" indent="0" algn="ctr" defTabSz="622300">
+          <a:pPr marL="0" lvl="0" indent="0" algn="ctr" defTabSz="533400">
             <a:lnSpc>
               <a:spcPct val="90000"/>
             </a:lnSpc>
@@ -11253,7 +11252,7 @@
             <a:buNone/>
           </a:pPr>
           <a:r>
-            <a:rPr lang="en-US" sz="1400" kern="1200" dirty="0"/>
+            <a:rPr lang="en-US" sz="1200" kern="1200" dirty="0"/>
             <a:t>Data Quality Score as Governance Metric</a:t>
           </a:r>
         </a:p>
@@ -19848,7 +19847,7 @@
           <a:p>
             <a:fld id="{71193E94-11AD-4616-B635-E0475C2CA088}" type="datetimeFigureOut">
               <a:rPr lang="en-NL" smtClean="0"/>
-              <a:t>27/03/2026</a:t>
+              <a:t>29/03/2026</a:t>
             </a:fld>
             <a:endParaRPr lang="en-NL"/>
           </a:p>
@@ -20388,7 +20387,7 @@
           <a:p>
             <a:fld id="{4361E3FD-FFE9-438C-A495-1667D436A772}" type="datetimeFigureOut">
               <a:rPr lang="en-IN" smtClean="0"/>
-              <a:t>26-03-2026</a:t>
+              <a:t>29-03-2026</a:t>
             </a:fld>
             <a:endParaRPr lang="en-IN"/>
           </a:p>
@@ -20726,7 +20725,7 @@
           <a:p>
             <a:fld id="{4361E3FD-FFE9-438C-A495-1667D436A772}" type="datetimeFigureOut">
               <a:rPr lang="en-IN" smtClean="0"/>
-              <a:t>26-03-2026</a:t>
+              <a:t>29-03-2026</a:t>
             </a:fld>
             <a:endParaRPr lang="en-IN"/>
           </a:p>
@@ -21127,7 +21126,7 @@
           <a:p>
             <a:fld id="{4361E3FD-FFE9-438C-A495-1667D436A772}" type="datetimeFigureOut">
               <a:rPr lang="en-IN" smtClean="0"/>
-              <a:t>26-03-2026</a:t>
+              <a:t>29-03-2026</a:t>
             </a:fld>
             <a:endParaRPr lang="en-IN"/>
           </a:p>
@@ -21462,7 +21461,7 @@
           <a:p>
             <a:fld id="{4361E3FD-FFE9-438C-A495-1667D436A772}" type="datetimeFigureOut">
               <a:rPr lang="en-IN" smtClean="0"/>
-              <a:t>26-03-2026</a:t>
+              <a:t>29-03-2026</a:t>
             </a:fld>
             <a:endParaRPr lang="en-IN"/>
           </a:p>
@@ -21782,7 +21781,7 @@
           <a:p>
             <a:fld id="{4361E3FD-FFE9-438C-A495-1667D436A772}" type="datetimeFigureOut">
               <a:rPr lang="en-IN" smtClean="0"/>
-              <a:t>26-03-2026</a:t>
+              <a:t>29-03-2026</a:t>
             </a:fld>
             <a:endParaRPr lang="en-IN"/>
           </a:p>
@@ -22178,7 +22177,7 @@
           <a:p>
             <a:fld id="{4361E3FD-FFE9-438C-A495-1667D436A772}" type="datetimeFigureOut">
               <a:rPr lang="en-IN" smtClean="0"/>
-              <a:t>26-03-2026</a:t>
+              <a:t>29-03-2026</a:t>
             </a:fld>
             <a:endParaRPr lang="en-IN"/>
           </a:p>
@@ -22435,7 +22434,7 @@
           <a:p>
             <a:fld id="{4361E3FD-FFE9-438C-A495-1667D436A772}" type="datetimeFigureOut">
               <a:rPr lang="en-IN" smtClean="0"/>
-              <a:t>26-03-2026</a:t>
+              <a:t>29-03-2026</a:t>
             </a:fld>
             <a:endParaRPr lang="en-IN"/>
           </a:p>
@@ -22697,7 +22696,7 @@
           <a:p>
             <a:fld id="{4361E3FD-FFE9-438C-A495-1667D436A772}" type="datetimeFigureOut">
               <a:rPr lang="en-IN" smtClean="0"/>
-              <a:t>26-03-2026</a:t>
+              <a:t>29-03-2026</a:t>
             </a:fld>
             <a:endParaRPr lang="en-IN"/>
           </a:p>
@@ -22959,7 +22958,7 @@
           <a:p>
             <a:fld id="{4361E3FD-FFE9-438C-A495-1667D436A772}" type="datetimeFigureOut">
               <a:rPr lang="en-IN" smtClean="0"/>
-              <a:t>26-03-2026</a:t>
+              <a:t>29-03-2026</a:t>
             </a:fld>
             <a:endParaRPr lang="en-IN"/>
           </a:p>
@@ -23288,7 +23287,7 @@
           <a:p>
             <a:fld id="{4361E3FD-FFE9-438C-A495-1667D436A772}" type="datetimeFigureOut">
               <a:rPr lang="en-IN" smtClean="0"/>
-              <a:t>26-03-2026</a:t>
+              <a:t>29-03-2026</a:t>
             </a:fld>
             <a:endParaRPr lang="en-IN"/>
           </a:p>
@@ -23611,7 +23610,7 @@
           <a:p>
             <a:fld id="{4361E3FD-FFE9-438C-A495-1667D436A772}" type="datetimeFigureOut">
               <a:rPr lang="en-IN" smtClean="0"/>
-              <a:t>26-03-2026</a:t>
+              <a:t>29-03-2026</a:t>
             </a:fld>
             <a:endParaRPr lang="en-IN"/>
           </a:p>
@@ -24068,7 +24067,7 @@
           <a:p>
             <a:fld id="{4361E3FD-FFE9-438C-A495-1667D436A772}" type="datetimeFigureOut">
               <a:rPr lang="en-IN" smtClean="0"/>
-              <a:t>26-03-2026</a:t>
+              <a:t>29-03-2026</a:t>
             </a:fld>
             <a:endParaRPr lang="en-IN"/>
           </a:p>
@@ -24273,7 +24272,7 @@
           <a:p>
             <a:fld id="{4361E3FD-FFE9-438C-A495-1667D436A772}" type="datetimeFigureOut">
               <a:rPr lang="en-IN" smtClean="0"/>
-              <a:t>26-03-2026</a:t>
+              <a:t>29-03-2026</a:t>
             </a:fld>
             <a:endParaRPr lang="en-IN"/>
           </a:p>
@@ -24450,7 +24449,7 @@
           <a:p>
             <a:fld id="{4361E3FD-FFE9-438C-A495-1667D436A772}" type="datetimeFigureOut">
               <a:rPr lang="en-IN" smtClean="0"/>
-              <a:t>26-03-2026</a:t>
+              <a:t>29-03-2026</a:t>
             </a:fld>
             <a:endParaRPr lang="en-IN"/>
           </a:p>
@@ -24783,7 +24782,7 @@
           <a:p>
             <a:fld id="{4361E3FD-FFE9-438C-A495-1667D436A772}" type="datetimeFigureOut">
               <a:rPr lang="en-IN" smtClean="0"/>
-              <a:t>26-03-2026</a:t>
+              <a:t>29-03-2026</a:t>
             </a:fld>
             <a:endParaRPr lang="en-IN"/>
           </a:p>
@@ -25128,7 +25127,7 @@
           <a:p>
             <a:fld id="{4361E3FD-FFE9-438C-A495-1667D436A772}" type="datetimeFigureOut">
               <a:rPr lang="en-IN" smtClean="0"/>
-              <a:t>26-03-2026</a:t>
+              <a:t>29-03-2026</a:t>
             </a:fld>
             <a:endParaRPr lang="en-IN"/>
           </a:p>
@@ -27245,7 +27244,7 @@
           <a:p>
             <a:fld id="{4361E3FD-FFE9-438C-A495-1667D436A772}" type="datetimeFigureOut">
               <a:rPr lang="en-IN" smtClean="0"/>
-              <a:t>26-03-2026</a:t>
+              <a:t>29-03-2026</a:t>
             </a:fld>
             <a:endParaRPr lang="en-IN"/>
           </a:p>
@@ -31947,21 +31946,16 @@
         </p:spPr>
         <p:txBody>
           <a:bodyPr>
-            <a:normAutofit fontScale="90000"/>
+            <a:normAutofit/>
           </a:bodyPr>
           <a:lstStyle/>
           <a:p>
             <a:r>
-              <a:rPr lang="en-IN" dirty="0"/>
-              <a:t>Feature Engineering – Device Categorization Vs OS and Vendor(top 10) </a:t>
-            </a:r>
-            <a:r>
-              <a:rPr lang="en-IN" b="1" dirty="0">
+              <a:rPr lang="en-IN" sz="3200" dirty="0">
                 <a:latin typeface="+mn-lt"/>
               </a:rPr>
-              <a:t>(cont..)</a:t>
+              <a:t>Feature Engineering – Device Categorization Vs OS and Vendor(top 10) (cont..)</a:t>
             </a:r>
-            <a:endParaRPr lang="en-IN" dirty="0"/>
           </a:p>
         </p:txBody>
       </p:sp>
@@ -32158,7 +32152,7 @@
                 <a:spcPts val="600"/>
               </a:spcAft>
             </a:pPr>
-            <a:endParaRPr lang="en-IN" dirty="0"/>
+            <a:endParaRPr lang="en-IN" sz="1600" dirty="0"/>
           </a:p>
           <a:p>
             <a:pPr>
@@ -32167,13 +32161,13 @@
               </a:spcAft>
             </a:pPr>
             <a:r>
-              <a:rPr lang="en-IN" dirty="0"/>
+              <a:rPr lang="en-IN" sz="1600" dirty="0"/>
               <a:t>Each category exhibits a distinct OS distribution, with following insights </a:t>
             </a:r>
             <a:br>
-              <a:rPr lang="en-IN" dirty="0"/>
+              <a:rPr lang="en-IN" sz="1600" dirty="0"/>
             </a:br>
-            <a:endParaRPr lang="en-IN" dirty="0"/>
+            <a:endParaRPr lang="en-IN" sz="1600" dirty="0"/>
           </a:p>
           <a:p>
             <a:pPr>
@@ -32181,7 +32175,7 @@
                 <a:spcPts val="600"/>
               </a:spcAft>
             </a:pPr>
-            <a:endParaRPr lang="en-IN" dirty="0"/>
+            <a:endParaRPr lang="en-IN" sz="1600" dirty="0"/>
           </a:p>
           <a:p>
             <a:pPr>
@@ -32189,7 +32183,7 @@
                 <a:spcPts val="600"/>
               </a:spcAft>
             </a:pPr>
-            <a:endParaRPr lang="en-IN" dirty="0"/>
+            <a:endParaRPr lang="en-IN" sz="1600" dirty="0"/>
           </a:p>
           <a:p>
             <a:pPr>
@@ -32197,7 +32191,7 @@
                 <a:spcPts val="600"/>
               </a:spcAft>
             </a:pPr>
-            <a:endParaRPr lang="en-IN" dirty="0"/>
+            <a:endParaRPr lang="en-IN" sz="1600" dirty="0"/>
           </a:p>
         </p:txBody>
       </p:sp>
@@ -32403,7 +32397,9 @@
           <a:lstStyle/>
           <a:p>
             <a:r>
-              <a:rPr lang="en-IN" dirty="0"/>
+              <a:rPr lang="en-IN" sz="3200" dirty="0">
+                <a:latin typeface="+mn-lt"/>
+              </a:rPr>
               <a:t>Feature Engineering – Vendor /OS Normalization</a:t>
             </a:r>
           </a:p>
@@ -32603,11 +32599,11 @@
               </a:spcAft>
             </a:pPr>
             <a:r>
-              <a:rPr lang="en-IN" dirty="0"/>
+              <a:rPr lang="en-IN" sz="1600" dirty="0"/>
               <a:t>Vendor column in the data contains not just “vendor names” – it is </a:t>
             </a:r>
             <a:r>
-              <a:rPr lang="en-GB" dirty="0"/>
+              <a:rPr lang="en-GB" sz="1600" dirty="0"/>
               <a:t>multi-level taxonomy.</a:t>
             </a:r>
           </a:p>
@@ -32618,13 +32614,13 @@
               </a:spcAft>
             </a:pPr>
             <a:r>
-              <a:rPr lang="en-IN" dirty="0"/>
+              <a:rPr lang="en-IN" sz="1600" dirty="0"/>
               <a:t>Each value contains: </a:t>
             </a:r>
             <a:br>
-              <a:rPr lang="en-IN" dirty="0"/>
+              <a:rPr lang="en-IN" sz="1600" dirty="0"/>
             </a:br>
-            <a:endParaRPr lang="en-IN" dirty="0"/>
+            <a:endParaRPr lang="en-IN" sz="1600" dirty="0"/>
           </a:p>
           <a:p>
             <a:pPr marL="285750" indent="-285750">
@@ -32635,11 +32631,11 @@
               <a:buChar char="•"/>
             </a:pPr>
             <a:r>
-              <a:rPr lang="en-IN" dirty="0"/>
+              <a:rPr lang="en-IN" sz="1600" dirty="0"/>
               <a:t>Pure vendors </a:t>
             </a:r>
             <a:r>
-              <a:rPr lang="en-IN" dirty="0">
+              <a:rPr lang="en-IN" sz="1600" dirty="0">
                 <a:sym typeface="Wingdings" panose="05000000000000000000" pitchFamily="2" charset="2"/>
               </a:rPr>
               <a:t> Dell, Apple, Cisco.</a:t>
@@ -32654,7 +32650,7 @@
               <a:buChar char="•"/>
             </a:pPr>
             <a:r>
-              <a:rPr lang="en-IN" dirty="0">
+              <a:rPr lang="en-IN" sz="1600" dirty="0">
                 <a:sym typeface="Wingdings" panose="05000000000000000000" pitchFamily="2" charset="2"/>
               </a:rPr>
               <a:t>Vendor + product  Cisco Router 2900 Series.</a:t>
@@ -32669,7 +32665,7 @@
               <a:buChar char="•"/>
             </a:pPr>
             <a:r>
-              <a:rPr lang="en-IN" dirty="0">
+              <a:rPr lang="en-IN" sz="1600" dirty="0">
                 <a:sym typeface="Wingdings" panose="05000000000000000000" pitchFamily="2" charset="2"/>
               </a:rPr>
               <a:t>Vendor + function  HP Printer, Cisco IP Phone.</a:t>
@@ -32684,7 +32680,7 @@
               <a:buChar char="•"/>
             </a:pPr>
             <a:r>
-              <a:rPr lang="en-IN" dirty="0">
+              <a:rPr lang="en-IN" sz="1600" dirty="0">
                 <a:sym typeface="Wingdings" panose="05000000000000000000" pitchFamily="2" charset="2"/>
               </a:rPr>
               <a:t>Medical Devices  GE MRI Scanner, Siemens SOMATOM CT Scanner</a:t>
@@ -32699,7 +32695,7 @@
               <a:buChar char="•"/>
             </a:pPr>
             <a:r>
-              <a:rPr lang="en-IN" dirty="0">
+              <a:rPr lang="en-IN" sz="1600" dirty="0">
                 <a:sym typeface="Wingdings" panose="05000000000000000000" pitchFamily="2" charset="2"/>
               </a:rPr>
               <a:t>IOT/OT Systems  Johnson Controls, Rockwell Automation</a:t>
@@ -32714,7 +32710,7 @@
               <a:buChar char="•"/>
             </a:pPr>
             <a:r>
-              <a:rPr lang="en-IN" dirty="0">
+              <a:rPr lang="en-IN" sz="1600" dirty="0">
                 <a:sym typeface="Wingdings" panose="05000000000000000000" pitchFamily="2" charset="2"/>
               </a:rPr>
               <a:t>Mixed Naming conventions.</a:t>
@@ -32727,7 +32723,7 @@
               </a:spcAft>
             </a:pPr>
             <a:r>
-              <a:rPr lang="en-IN" dirty="0">
+              <a:rPr lang="en-IN" sz="1600" dirty="0">
                 <a:sym typeface="Wingdings" panose="05000000000000000000" pitchFamily="2" charset="2"/>
               </a:rPr>
               <a:t>After normalization using (entity extraction + fuzzy matching),we get the normalized values : </a:t>
@@ -32739,7 +32735,7 @@
                 <a:spcPts val="600"/>
               </a:spcAft>
             </a:pPr>
-            <a:endParaRPr lang="en-IN" dirty="0">
+            <a:endParaRPr lang="en-IN" sz="1600" dirty="0">
               <a:sym typeface="Wingdings" panose="05000000000000000000" pitchFamily="2" charset="2"/>
             </a:endParaRPr>
           </a:p>
@@ -32750,18 +32746,18 @@
               </a:spcAft>
             </a:pPr>
             <a:r>
-              <a:rPr lang="en-GB" dirty="0"/>
+              <a:rPr lang="en-GB" sz="1600" dirty="0"/>
               <a:t>['Other', 'Apple', 'Dell', 'HP', 'Cisco', 'LG', 'Siemens', 'Samsung', 'GE', 'Sony', 'Unknown', 'Philips', 'IBM', 'Oracle', 'Roche', 'Aruba', 'VMware', 'Microsoft', 'Honeywell', '</a:t>
             </a:r>
             <a:r>
-              <a:rPr lang="en-GB" dirty="0" err="1"/>
+              <a:rPr lang="en-GB" sz="1600" dirty="0" err="1"/>
               <a:t>Netgear</a:t>
             </a:r>
             <a:r>
-              <a:rPr lang="en-GB" dirty="0"/>
+              <a:rPr lang="en-GB" sz="1600" dirty="0"/>
               <a:t>', 'Fortinet', 'Palo Alto Networks', 'Juniper', 'Panasonic', 'Avaya']</a:t>
             </a:r>
-            <a:endParaRPr lang="en-IN" dirty="0"/>
+            <a:endParaRPr lang="en-IN" sz="1600" dirty="0"/>
           </a:p>
           <a:p>
             <a:pPr>
@@ -32769,7 +32765,7 @@
                 <a:spcPts val="600"/>
               </a:spcAft>
             </a:pPr>
-            <a:endParaRPr lang="en-IN" dirty="0"/>
+            <a:endParaRPr lang="en-IN" sz="1600" dirty="0"/>
           </a:p>
           <a:p>
             <a:pPr>
@@ -32777,7 +32773,7 @@
                 <a:spcPts val="600"/>
               </a:spcAft>
             </a:pPr>
-            <a:endParaRPr lang="en-IN" dirty="0"/>
+            <a:endParaRPr lang="en-IN" sz="1600" dirty="0"/>
           </a:p>
         </p:txBody>
       </p:sp>
@@ -32913,7 +32909,7 @@
         <p:spPr>
           <a:xfrm>
             <a:off x="1794897" y="624110"/>
-            <a:ext cx="9712998" cy="1280890"/>
+            <a:ext cx="9525376" cy="1280890"/>
           </a:xfrm>
         </p:spPr>
         <p:txBody>
@@ -32923,16 +32919,11 @@
           <a:lstStyle/>
           <a:p>
             <a:r>
-              <a:rPr lang="en-IN" dirty="0"/>
-              <a:t>Feature Engineering – Vendor /OS Normalization </a:t>
-            </a:r>
-            <a:r>
-              <a:rPr lang="en-IN" b="1" dirty="0">
+              <a:rPr lang="en-IN" sz="3200" dirty="0">
                 <a:latin typeface="+mn-lt"/>
               </a:rPr>
-              <a:t>(cont..)</a:t>
+              <a:t>Feature Engineering – Vendor /OS Normalization (cont..)</a:t>
             </a:r>
-            <a:endParaRPr lang="en-IN" dirty="0"/>
           </a:p>
         </p:txBody>
       </p:sp>
@@ -33130,21 +33121,21 @@
               </a:spcAft>
             </a:pPr>
             <a:r>
-              <a:rPr lang="en-IN" dirty="0"/>
+              <a:rPr lang="en-IN" sz="1600" dirty="0"/>
               <a:t>OS column in the data contains not just “OS names” – it is </a:t>
             </a:r>
             <a:r>
-              <a:rPr lang="en-GB" dirty="0"/>
+              <a:rPr lang="en-GB" sz="1600" dirty="0"/>
               <a:t>mix of multiple OS layers and system types.</a:t>
             </a:r>
             <a:r>
-              <a:rPr lang="en-IN" dirty="0"/>
+              <a:rPr lang="en-IN" sz="1600" dirty="0"/>
               <a:t>Each value contains: </a:t>
             </a:r>
             <a:br>
-              <a:rPr lang="en-IN" dirty="0"/>
+              <a:rPr lang="en-IN" sz="1600" dirty="0"/>
             </a:br>
-            <a:endParaRPr lang="en-IN" dirty="0"/>
+            <a:endParaRPr lang="en-IN" sz="1600" dirty="0"/>
           </a:p>
           <a:p>
             <a:pPr marL="285750" indent="-285750">
@@ -33155,7 +33146,7 @@
               <a:buChar char="•"/>
             </a:pPr>
             <a:r>
-              <a:rPr lang="en-IN" dirty="0"/>
+              <a:rPr lang="en-IN" sz="1600" dirty="0"/>
               <a:t>Version numbers embedded in the OS field (Cisco IOS 15.3,Android 7.0,Windows Kernel 6.0)</a:t>
             </a:r>
           </a:p>
@@ -33168,7 +33159,7 @@
               <a:buChar char="•"/>
             </a:pPr>
             <a:r>
-              <a:rPr lang="en-IN" dirty="0"/>
+              <a:rPr lang="en-IN" sz="1600" dirty="0"/>
               <a:t>Hardware/device context included in OS field</a:t>
             </a:r>
           </a:p>
@@ -33177,25 +33168,25 @@
               <a:spcAft>
                 <a:spcPts val="600"/>
               </a:spcAft>
-              <a:buFont typeface="Arial" panose="020B0604020202020204" pitchFamily="34" charset="0"/>
-              <a:buChar char="•"/>
+              <a:buFont typeface="Wingdings" panose="05000000000000000000" pitchFamily="2" charset="2"/>
+              <a:buChar char="q"/>
             </a:pPr>
             <a:r>
-              <a:rPr lang="en-GB" dirty="0"/>
+              <a:rPr lang="en-GB" sz="1600" dirty="0"/>
               <a:t>Cisco IOS (used in routers/switches, not general OS)</a:t>
             </a:r>
-            <a:endParaRPr lang="en-IN" dirty="0"/>
+            <a:endParaRPr lang="en-IN" sz="1600" dirty="0"/>
           </a:p>
           <a:p>
             <a:pPr marL="742950" lvl="1" indent="-285750">
               <a:spcAft>
                 <a:spcPts val="600"/>
               </a:spcAft>
-              <a:buFont typeface="Arial" panose="020B0604020202020204" pitchFamily="34" charset="0"/>
-              <a:buChar char="•"/>
+              <a:buFont typeface="Wingdings" panose="05000000000000000000" pitchFamily="2" charset="2"/>
+              <a:buChar char="q"/>
             </a:pPr>
             <a:r>
-              <a:rPr lang="en-GB" dirty="0"/>
+              <a:rPr lang="en-GB" sz="1600" dirty="0"/>
               <a:t>APC AOS (UPS power systems OS)</a:t>
             </a:r>
           </a:p>
@@ -33204,11 +33195,11 @@
               <a:spcAft>
                 <a:spcPts val="600"/>
               </a:spcAft>
-              <a:buFont typeface="Arial" panose="020B0604020202020204" pitchFamily="34" charset="0"/>
-              <a:buChar char="•"/>
+              <a:buFont typeface="Wingdings" panose="05000000000000000000" pitchFamily="2" charset="2"/>
+              <a:buChar char="q"/>
             </a:pPr>
             <a:r>
-              <a:rPr lang="en-GB" dirty="0"/>
+              <a:rPr lang="en-GB" sz="1600" dirty="0"/>
               <a:t>VxWorks 6.5 (real-time industrial systems)</a:t>
             </a:r>
           </a:p>
@@ -33221,10 +33212,10 @@
               <a:buChar char="•"/>
             </a:pPr>
             <a:r>
-              <a:rPr lang="en-GB" dirty="0"/>
+              <a:rPr lang="en-GB" sz="1600" dirty="0"/>
               <a:t>Vendor prefix included in OS name (Cisco IOS 15.0, Apple iOS)</a:t>
             </a:r>
-            <a:endParaRPr lang="en-IN" dirty="0">
+            <a:endParaRPr lang="en-IN" sz="1600" dirty="0">
               <a:sym typeface="Wingdings" panose="05000000000000000000" pitchFamily="2" charset="2"/>
             </a:endParaRPr>
           </a:p>
@@ -33234,7 +33225,7 @@
                 <a:spcPts val="600"/>
               </a:spcAft>
             </a:pPr>
-            <a:endParaRPr lang="en-IN" dirty="0">
+            <a:endParaRPr lang="en-IN" sz="1600" dirty="0">
               <a:sym typeface="Wingdings" panose="05000000000000000000" pitchFamily="2" charset="2"/>
             </a:endParaRPr>
           </a:p>
@@ -33245,7 +33236,7 @@
               </a:spcAft>
             </a:pPr>
             <a:r>
-              <a:rPr lang="en-IN" dirty="0">
+              <a:rPr lang="en-IN" sz="1600" dirty="0">
                 <a:sym typeface="Wingdings" panose="05000000000000000000" pitchFamily="2" charset="2"/>
               </a:rPr>
               <a:t>After normalization using (entity extraction + fuzzy matching),we get the normalized values : </a:t>
@@ -33258,10 +33249,10 @@
               </a:spcAft>
             </a:pPr>
             <a:r>
-              <a:rPr lang="en-GB" dirty="0"/>
+              <a:rPr lang="en-GB" sz="1600" dirty="0"/>
               <a:t>['Android', 'macOS', 'Linux', 'Other', 'Embedded/RTOS', 'iOS', 'Chrome OS', 'Windows', 'Network OS']</a:t>
             </a:r>
-            <a:endParaRPr lang="en-IN" dirty="0"/>
+            <a:endParaRPr lang="en-IN" sz="1600" dirty="0"/>
           </a:p>
           <a:p>
             <a:pPr>
@@ -33269,7 +33260,7 @@
                 <a:spcPts val="600"/>
               </a:spcAft>
             </a:pPr>
-            <a:endParaRPr lang="en-IN" dirty="0"/>
+            <a:endParaRPr lang="en-IN" sz="1600" dirty="0"/>
           </a:p>
         </p:txBody>
       </p:sp>
@@ -33415,7 +33406,9 @@
           <a:lstStyle/>
           <a:p>
             <a:r>
-              <a:rPr lang="en-IN" dirty="0"/>
+              <a:rPr lang="en-IN" sz="3200" dirty="0">
+                <a:latin typeface="+mn-lt"/>
+              </a:rPr>
               <a:t>Feature Engineering – Risk Level Classification</a:t>
             </a:r>
           </a:p>
@@ -33598,7 +33591,7 @@
         </p:nvSpPr>
         <p:spPr>
           <a:xfrm>
-            <a:off x="1584337" y="1936047"/>
+            <a:off x="1584338" y="1578859"/>
             <a:ext cx="9923557" cy="4921953"/>
           </a:xfrm>
           <a:prstGeom prst="rect">
@@ -33615,7 +33608,7 @@
               </a:spcAft>
             </a:pPr>
             <a:r>
-              <a:rPr lang="en-GB" dirty="0"/>
+              <a:rPr lang="en-GB" sz="1600" dirty="0"/>
               <a:t>From Security and Data Quality lens , we have created an Risk Level attribute which contain  High, Medium and low value</a:t>
             </a:r>
           </a:p>
@@ -33626,7 +33619,7 @@
               </a:spcAft>
             </a:pPr>
             <a:r>
-              <a:rPr lang="en-GB" b="1" u="sng" dirty="0"/>
+              <a:rPr lang="en-GB" sz="1600" b="1" u="sng" dirty="0"/>
               <a:t>Risk Scoring Logic </a:t>
             </a:r>
           </a:p>
@@ -33639,7 +33632,7 @@
               <a:buChar char="•"/>
             </a:pPr>
             <a:r>
-              <a:rPr lang="en-IN" dirty="0"/>
+              <a:rPr lang="en-IN" sz="1600" dirty="0"/>
               <a:t>High Risk :- </a:t>
             </a:r>
           </a:p>
@@ -33648,11 +33641,11 @@
               <a:spcAft>
                 <a:spcPts val="600"/>
               </a:spcAft>
-              <a:buFont typeface="Arial" panose="020B0604020202020204" pitchFamily="34" charset="0"/>
-              <a:buChar char="•"/>
+              <a:buFont typeface="Wingdings" panose="05000000000000000000" pitchFamily="2" charset="2"/>
+              <a:buChar char="q"/>
             </a:pPr>
             <a:r>
-              <a:rPr lang="en-IN" dirty="0"/>
+              <a:rPr lang="en-IN" sz="1600" dirty="0"/>
               <a:t>Outdated OS: Windows 7, Android 7, Cisco IOS 12.x/15.x</a:t>
             </a:r>
           </a:p>
@@ -33661,11 +33654,11 @@
               <a:spcAft>
                 <a:spcPts val="600"/>
               </a:spcAft>
-              <a:buFont typeface="Arial" panose="020B0604020202020204" pitchFamily="34" charset="0"/>
-              <a:buChar char="•"/>
+              <a:buFont typeface="Wingdings" panose="05000000000000000000" pitchFamily="2" charset="2"/>
+              <a:buChar char="q"/>
             </a:pPr>
             <a:r>
-              <a:rPr lang="en-IN" dirty="0"/>
+              <a:rPr lang="en-IN" sz="1600" dirty="0"/>
               <a:t>Embedded /RTOS system: VxWorks, Embedded Firmware</a:t>
             </a:r>
           </a:p>
@@ -33674,11 +33667,11 @@
               <a:spcAft>
                 <a:spcPts val="600"/>
               </a:spcAft>
-              <a:buFont typeface="Arial" panose="020B0604020202020204" pitchFamily="34" charset="0"/>
-              <a:buChar char="•"/>
+              <a:buFont typeface="Wingdings" panose="05000000000000000000" pitchFamily="2" charset="2"/>
+              <a:buChar char="q"/>
             </a:pPr>
             <a:r>
-              <a:rPr lang="en-IN" dirty="0"/>
+              <a:rPr lang="en-IN" sz="1600" dirty="0"/>
               <a:t>Missing DHCP fingerprints fields</a:t>
             </a:r>
           </a:p>
@@ -33687,12 +33680,12 @@
               <a:spcAft>
                 <a:spcPts val="600"/>
               </a:spcAft>
-              <a:buFont typeface="Arial" panose="020B0604020202020204" pitchFamily="34" charset="0"/>
-              <a:buChar char="•"/>
+              <a:buFont typeface="Wingdings" panose="05000000000000000000" pitchFamily="2" charset="2"/>
+              <a:buChar char="q"/>
             </a:pPr>
             <a:r>
-              <a:rPr lang="en-IN" dirty="0"/>
-              <a:t>Unknown OS values.</a:t>
+              <a:rPr lang="en-IN" sz="1600" dirty="0"/>
+              <a:t>Unknown OS values</a:t>
             </a:r>
           </a:p>
           <a:p>
@@ -33704,7 +33697,7 @@
               <a:buChar char="•"/>
             </a:pPr>
             <a:r>
-              <a:rPr lang="en-IN" dirty="0"/>
+              <a:rPr lang="en-IN" sz="1600" dirty="0"/>
               <a:t>Medium Risk :- </a:t>
             </a:r>
           </a:p>
@@ -33713,11 +33706,11 @@
               <a:spcAft>
                 <a:spcPts val="600"/>
               </a:spcAft>
-              <a:buFont typeface="Arial" panose="020B0604020202020204" pitchFamily="34" charset="0"/>
-              <a:buChar char="•"/>
+              <a:buFont typeface="Wingdings" panose="05000000000000000000" pitchFamily="2" charset="2"/>
+              <a:buChar char="q"/>
             </a:pPr>
             <a:r>
-              <a:rPr lang="en-IN" dirty="0"/>
+              <a:rPr lang="en-IN" sz="1600" dirty="0"/>
               <a:t>Partial metadata missing</a:t>
             </a:r>
           </a:p>
@@ -33726,12 +33719,12 @@
               <a:spcAft>
                 <a:spcPts val="600"/>
               </a:spcAft>
-              <a:buFont typeface="Arial" panose="020B0604020202020204" pitchFamily="34" charset="0"/>
-              <a:buChar char="•"/>
+              <a:buFont typeface="Wingdings" panose="05000000000000000000" pitchFamily="2" charset="2"/>
+              <a:buChar char="q"/>
             </a:pPr>
             <a:r>
-              <a:rPr lang="en-IN" dirty="0"/>
-              <a:t>Unclassified or ambiguous devices.</a:t>
+              <a:rPr lang="en-IN" sz="1600" dirty="0"/>
+              <a:t>Unclassified or ambiguous devices</a:t>
             </a:r>
           </a:p>
           <a:p>
@@ -33743,7 +33736,7 @@
               <a:buChar char="•"/>
             </a:pPr>
             <a:r>
-              <a:rPr lang="en-IN" dirty="0"/>
+              <a:rPr lang="en-IN" sz="1600" dirty="0"/>
               <a:t>Low Risk :-</a:t>
             </a:r>
           </a:p>
@@ -33752,11 +33745,11 @@
               <a:spcAft>
                 <a:spcPts val="600"/>
               </a:spcAft>
-              <a:buFont typeface="Arial" panose="020B0604020202020204" pitchFamily="34" charset="0"/>
-              <a:buChar char="•"/>
+              <a:buFont typeface="Wingdings" panose="05000000000000000000" pitchFamily="2" charset="2"/>
+              <a:buChar char="q"/>
             </a:pPr>
             <a:r>
-              <a:rPr lang="en-IN" dirty="0"/>
+              <a:rPr lang="en-IN" sz="1600" dirty="0"/>
               <a:t>Modern OS : Windows 10,Linux,Android(recent versions)</a:t>
             </a:r>
           </a:p>
@@ -33765,12 +33758,12 @@
               <a:spcAft>
                 <a:spcPts val="600"/>
               </a:spcAft>
-              <a:buFont typeface="Arial" panose="020B0604020202020204" pitchFamily="34" charset="0"/>
-              <a:buChar char="•"/>
+              <a:buFont typeface="Wingdings" panose="05000000000000000000" pitchFamily="2" charset="2"/>
+              <a:buChar char="q"/>
             </a:pPr>
             <a:r>
-              <a:rPr lang="en-IN" dirty="0"/>
-              <a:t>Complete fingerprint visibility.</a:t>
+              <a:rPr lang="en-IN" sz="1600" dirty="0"/>
+              <a:t>Complete fingerprint visibility</a:t>
             </a:r>
           </a:p>
           <a:p>
@@ -33779,7 +33772,7 @@
                 <a:spcPts val="600"/>
               </a:spcAft>
             </a:pPr>
-            <a:endParaRPr lang="en-IN" dirty="0"/>
+            <a:endParaRPr lang="en-IN" sz="1600" dirty="0"/>
           </a:p>
         </p:txBody>
       </p:sp>
@@ -33925,17 +33918,21 @@
           <a:lstStyle/>
           <a:p>
             <a:r>
-              <a:rPr lang="en-IN" dirty="0"/>
+              <a:rPr lang="en-IN" sz="3200" dirty="0">
+                <a:latin typeface="+mn-lt"/>
+              </a:rPr>
               <a:t>Feature Engineering – Risk Level Classification </a:t>
             </a:r>
             <a:r>
-              <a:rPr lang="en-IN" b="1" dirty="0">
+              <a:rPr lang="en-IN" sz="3200" b="1" dirty="0">
                 <a:latin typeface="+mn-lt"/>
               </a:rPr>
               <a:t>(cont..)</a:t>
             </a:r>
             <a:r>
-              <a:rPr lang="en-IN" dirty="0"/>
+              <a:rPr lang="en-IN" sz="3200" dirty="0">
+                <a:latin typeface="+mn-lt"/>
+              </a:rPr>
               <a:t> </a:t>
             </a:r>
           </a:p>
@@ -34135,7 +34132,7 @@
               </a:spcAft>
             </a:pPr>
             <a:r>
-              <a:rPr lang="en-GB" dirty="0"/>
+              <a:rPr lang="en-GB" sz="1600" dirty="0"/>
               <a:t>Risk Level Distribution</a:t>
             </a:r>
           </a:p>
@@ -34145,7 +34142,7 @@
                 <a:spcPts val="600"/>
               </a:spcAft>
             </a:pPr>
-            <a:endParaRPr lang="en-GB" dirty="0"/>
+            <a:endParaRPr lang="en-GB" sz="1600" dirty="0"/>
           </a:p>
           <a:p>
             <a:pPr>
@@ -34153,7 +34150,7 @@
                 <a:spcPts val="600"/>
               </a:spcAft>
             </a:pPr>
-            <a:endParaRPr lang="en-IN" dirty="0"/>
+            <a:endParaRPr lang="en-IN" sz="1600" dirty="0"/>
           </a:p>
         </p:txBody>
       </p:sp>
@@ -34329,16 +34326,11 @@
           <a:lstStyle/>
           <a:p>
             <a:r>
-              <a:rPr lang="en-IN" dirty="0"/>
-              <a:t>Feature Engineering – Risk Level Classification </a:t>
-            </a:r>
-            <a:r>
-              <a:rPr lang="en-IN" b="1" dirty="0">
+              <a:rPr lang="en-IN" sz="3200" dirty="0">
                 <a:latin typeface="+mn-lt"/>
               </a:rPr>
-              <a:t>(cont..)</a:t>
+              <a:t>Feature Engineering – Risk Level Classification (cont..)</a:t>
             </a:r>
-            <a:endParaRPr lang="en-IN" dirty="0"/>
           </a:p>
         </p:txBody>
       </p:sp>
@@ -34536,7 +34528,7 @@
               </a:spcAft>
             </a:pPr>
             <a:r>
-              <a:rPr lang="en-GB" dirty="0"/>
+              <a:rPr lang="en-GB" sz="1600" dirty="0"/>
               <a:t>Risk Level Distribution across top 10 OS and Vendor </a:t>
             </a:r>
           </a:p>
@@ -34546,7 +34538,7 @@
                 <a:spcPts val="600"/>
               </a:spcAft>
             </a:pPr>
-            <a:endParaRPr lang="en-GB" dirty="0"/>
+            <a:endParaRPr lang="en-GB" sz="1600" dirty="0"/>
           </a:p>
           <a:p>
             <a:pPr>
@@ -34554,7 +34546,7 @@
                 <a:spcPts val="600"/>
               </a:spcAft>
             </a:pPr>
-            <a:endParaRPr lang="en-IN" dirty="0"/>
+            <a:endParaRPr lang="en-IN" sz="1600" dirty="0"/>
           </a:p>
         </p:txBody>
       </p:sp>
@@ -34760,7 +34752,9 @@
           <a:lstStyle/>
           <a:p>
             <a:r>
-              <a:rPr lang="en-IN" dirty="0"/>
+              <a:rPr lang="en-IN" sz="3200" dirty="0">
+                <a:latin typeface="+mn-lt"/>
+              </a:rPr>
               <a:t>Feature Engineering – Fingerprint Integrity Score </a:t>
             </a:r>
           </a:p>
@@ -34960,15 +34954,15 @@
               </a:spcAft>
             </a:pPr>
             <a:r>
-              <a:rPr lang="en-GB" dirty="0"/>
+              <a:rPr lang="en-GB" sz="1600" dirty="0"/>
               <a:t>This metric evaluate the completeness and reliability of device fingerprinting data</a:t>
             </a:r>
             <a:r>
-              <a:rPr lang="en-GB" b="1" dirty="0"/>
+              <a:rPr lang="en-GB" sz="1600" b="1" dirty="0"/>
               <a:t>.</a:t>
             </a:r>
             <a:r>
-              <a:rPr lang="en-GB" dirty="0"/>
+              <a:rPr lang="en-GB" sz="1600" dirty="0"/>
               <a:t> There are 4 key fingerprints fields DHCP Options Fingerprint, DHCP Request Fingerprint, DHCP Vendor Class, DHCP Device Class.</a:t>
             </a:r>
           </a:p>
@@ -34978,7 +34972,7 @@
                 <a:spcPts val="600"/>
               </a:spcAft>
             </a:pPr>
-            <a:endParaRPr lang="en-GB" dirty="0"/>
+            <a:endParaRPr lang="en-GB" sz="1600" dirty="0"/>
           </a:p>
           <a:p>
             <a:pPr>
@@ -34987,7 +34981,7 @@
               </a:spcAft>
             </a:pPr>
             <a:r>
-              <a:rPr lang="en-GB" dirty="0"/>
+              <a:rPr lang="en-GB" sz="1600" dirty="0"/>
               <a:t>For each asset:</a:t>
             </a:r>
           </a:p>
@@ -34998,11 +34992,11 @@
               </a:spcAft>
             </a:pPr>
             <a:r>
-              <a:rPr lang="en-GB" dirty="0"/>
+              <a:rPr lang="en-GB" sz="1600" dirty="0"/>
               <a:t>		</a:t>
             </a:r>
             <a:r>
-              <a:rPr lang="en-GB" i="1" dirty="0"/>
+              <a:rPr lang="en-GB" sz="1600" i="1" dirty="0"/>
               <a:t>FP Integrity Score = Number of non-null fingerprint fields (0–4) </a:t>
             </a:r>
           </a:p>
@@ -35013,7 +35007,7 @@
               </a:spcAft>
             </a:pPr>
             <a:r>
-              <a:rPr lang="en-GB" dirty="0"/>
+              <a:rPr lang="en-GB" sz="1600" dirty="0"/>
               <a:t> 					0 → No Visibility (Critical)</a:t>
             </a:r>
           </a:p>
@@ -35024,11 +35018,11 @@
               </a:spcAft>
             </a:pPr>
             <a:r>
-              <a:rPr lang="en-GB" b="1" dirty="0"/>
+              <a:rPr lang="en-GB" sz="1600" b="1" dirty="0"/>
               <a:t> 					</a:t>
             </a:r>
             <a:r>
-              <a:rPr lang="en-GB" dirty="0"/>
+              <a:rPr lang="en-GB" sz="1600" dirty="0"/>
               <a:t>1 → Very Low Visibility</a:t>
             </a:r>
           </a:p>
@@ -35039,11 +35033,11 @@
               </a:spcAft>
             </a:pPr>
             <a:r>
-              <a:rPr lang="en-GB" b="1" dirty="0"/>
+              <a:rPr lang="en-GB" sz="1600" b="1" dirty="0"/>
               <a:t>					</a:t>
             </a:r>
             <a:r>
-              <a:rPr lang="en-GB" dirty="0"/>
+              <a:rPr lang="en-GB" sz="1600" dirty="0"/>
               <a:t>2 → Partial Visibility</a:t>
             </a:r>
           </a:p>
@@ -35054,11 +35048,11 @@
               </a:spcAft>
             </a:pPr>
             <a:r>
-              <a:rPr lang="en-GB" b="1" dirty="0"/>
+              <a:rPr lang="en-GB" sz="1600" b="1" dirty="0"/>
               <a:t>					</a:t>
             </a:r>
             <a:r>
-              <a:rPr lang="en-GB" dirty="0"/>
+              <a:rPr lang="en-GB" sz="1600" dirty="0"/>
               <a:t>3 → Good Visibility</a:t>
             </a:r>
           </a:p>
@@ -35069,14 +35063,14 @@
               </a:spcAft>
             </a:pPr>
             <a:r>
-              <a:rPr lang="en-GB" b="1" dirty="0"/>
+              <a:rPr lang="en-GB" sz="1600" b="1" dirty="0"/>
               <a:t>					</a:t>
             </a:r>
             <a:r>
-              <a:rPr lang="en-GB" dirty="0"/>
+              <a:rPr lang="en-GB" sz="1600" dirty="0"/>
               <a:t>4 → Full Visibility (Best Case)</a:t>
             </a:r>
-            <a:endParaRPr lang="en-GB" b="1" dirty="0"/>
+            <a:endParaRPr lang="en-GB" sz="1600" b="1" dirty="0"/>
           </a:p>
           <a:p>
             <a:pPr>
@@ -35085,7 +35079,7 @@
               </a:spcAft>
             </a:pPr>
             <a:r>
-              <a:rPr lang="en-GB" b="1" dirty="0"/>
+              <a:rPr lang="en-GB" sz="1600" b="1" dirty="0"/>
               <a:t> </a:t>
             </a:r>
           </a:p>
@@ -35096,10 +35090,10 @@
               </a:spcAft>
             </a:pPr>
             <a:r>
-              <a:rPr lang="en-GB" i="1" dirty="0"/>
+              <a:rPr lang="en-GB" sz="1600" i="1" dirty="0"/>
               <a:t>“Fingerprint completeness directly impacts asset classification quality and security visibility. Assets with low scores represent blind spots in the network.”</a:t>
             </a:r>
-            <a:endParaRPr lang="en-IN" i="1" dirty="0"/>
+            <a:endParaRPr lang="en-IN" sz="1600" i="1" dirty="0"/>
           </a:p>
         </p:txBody>
       </p:sp>
@@ -35245,7 +35239,9 @@
           <a:lstStyle/>
           <a:p>
             <a:r>
-              <a:rPr lang="en-IN" dirty="0"/>
+              <a:rPr lang="en-IN" sz="3200" dirty="0">
+                <a:latin typeface="+mn-lt"/>
+              </a:rPr>
               <a:t>Feature Engineering – Fingerprint Integrity Score (cont..)</a:t>
             </a:r>
           </a:p>
@@ -35445,7 +35441,7 @@
               </a:spcAft>
             </a:pPr>
             <a:r>
-              <a:rPr lang="en-GB" dirty="0"/>
+              <a:rPr lang="en-GB" sz="1600" dirty="0"/>
               <a:t>Distribution of FP Integrity Score and Integrity score Vs Risk Level</a:t>
             </a:r>
           </a:p>
@@ -35455,7 +35451,7 @@
                 <a:spcPts val="600"/>
               </a:spcAft>
             </a:pPr>
-            <a:endParaRPr lang="en-IN" i="1" dirty="0"/>
+            <a:endParaRPr lang="en-IN" sz="1600" i="1" dirty="0"/>
           </a:p>
         </p:txBody>
       </p:sp>
@@ -35661,7 +35657,9 @@
           <a:lstStyle/>
           <a:p>
             <a:r>
-              <a:rPr lang="en-IN" dirty="0"/>
+              <a:rPr lang="en-IN" sz="3200" dirty="0">
+                <a:latin typeface="+mn-lt"/>
+              </a:rPr>
               <a:t>Feature Engineering – Model Type classification </a:t>
             </a:r>
           </a:p>
@@ -35861,7 +35859,7 @@
               </a:spcAft>
             </a:pPr>
             <a:r>
-              <a:rPr lang="en-IN" dirty="0"/>
+              <a:rPr lang="en-IN" sz="1600" dirty="0"/>
               <a:t>Classify assets into meaningful categories:</a:t>
             </a:r>
           </a:p>
@@ -35872,30 +35870,30 @@
               </a:spcAft>
             </a:pPr>
             <a:r>
-              <a:rPr lang="en-GB" dirty="0"/>
+              <a:rPr lang="en-GB" sz="1600" dirty="0"/>
               <a:t>		</a:t>
             </a:r>
             <a:r>
-              <a:rPr lang="en-GB" i="1" dirty="0"/>
+              <a:rPr lang="en-GB" sz="1600" i="1" dirty="0"/>
               <a:t>Laptop, Smartphone, Network Device, Medical Device, IoT, etc.</a:t>
             </a:r>
           </a:p>
           <a:p>
             <a:r>
-              <a:rPr lang="en-GB" dirty="0"/>
+              <a:rPr lang="en-GB" sz="1600" dirty="0"/>
               <a:t>We use a </a:t>
             </a:r>
             <a:r>
-              <a:rPr lang="en-GB" b="1" dirty="0"/>
+              <a:rPr lang="en-GB" sz="1600" b="1" dirty="0"/>
               <a:t>multi-signal rule-based model</a:t>
             </a:r>
             <a:r>
-              <a:rPr lang="en-GB" dirty="0"/>
+              <a:rPr lang="en-GB" sz="1600" dirty="0"/>
               <a:t> combining:</a:t>
             </a:r>
           </a:p>
           <a:p>
-            <a:endParaRPr lang="en-GB" dirty="0"/>
+            <a:endParaRPr lang="en-GB" sz="1600" dirty="0"/>
           </a:p>
           <a:p>
             <a:pPr lvl="2">
@@ -35903,7 +35901,7 @@
               <a:buChar char="•"/>
             </a:pPr>
             <a:r>
-              <a:rPr lang="en-GB" dirty="0"/>
+              <a:rPr lang="en-GB" sz="1600" dirty="0"/>
               <a:t> Vendor &amp; Model (device keywords) </a:t>
             </a:r>
           </a:p>
@@ -35913,7 +35911,7 @@
               <a:buChar char="•"/>
             </a:pPr>
             <a:r>
-              <a:rPr lang="en-GB" dirty="0"/>
+              <a:rPr lang="en-GB" sz="1600" dirty="0"/>
               <a:t> Function (device role) </a:t>
             </a:r>
           </a:p>
@@ -35923,43 +35921,59 @@
               <a:buChar char="•"/>
             </a:pPr>
             <a:r>
-              <a:rPr lang="en-GB" dirty="0"/>
+              <a:rPr lang="en-GB" sz="1600" dirty="0"/>
               <a:t> OS (system-level signal)</a:t>
             </a:r>
           </a:p>
           <a:p>
+            <a:pPr lvl="2"/>
+            <a:endParaRPr lang="en-GB" sz="1600" dirty="0"/>
+          </a:p>
+          <a:p>
             <a:r>
-              <a:rPr lang="en-GB" b="1" dirty="0"/>
+              <a:rPr lang="en-GB" sz="1600" dirty="0"/>
               <a:t>Key Enhancements</a:t>
             </a:r>
           </a:p>
           <a:p>
+            <a:pPr marL="742950" lvl="1" indent="-285750">
+              <a:buFont typeface="Wingdings" panose="05000000000000000000" pitchFamily="2" charset="2"/>
+              <a:buChar char="Ø"/>
+            </a:pPr>
             <a:r>
-              <a:rPr lang="en-GB" dirty="0"/>
-              <a:t>✔ OS-aware classification : Cisco IOS → Network Device ,VxWorks → IoT / Embedded </a:t>
+              <a:rPr lang="en-GB" sz="1600" dirty="0"/>
+              <a:t>OS-aware classification : Cisco IOS → Network Device ,VxWorks → IoT / Embedded </a:t>
             </a:r>
           </a:p>
           <a:p>
+            <a:pPr marL="742950" lvl="1" indent="-285750">
+              <a:buFont typeface="Wingdings" panose="05000000000000000000" pitchFamily="2" charset="2"/>
+              <a:buChar char="Ø"/>
+            </a:pPr>
             <a:r>
-              <a:rPr lang="en-GB" dirty="0"/>
-              <a:t>✔ Domain-specific detection: Siemens / GE → Medical Devices ,Cisco / Aruba → Network   							    Devices.</a:t>
+              <a:rPr lang="en-GB" sz="1600" dirty="0"/>
+              <a:t>Domain-specific detection: Siemens / GE → Medical Devices ,Cisco / Aruba → Network Devices</a:t>
             </a:r>
           </a:p>
           <a:p>
+            <a:pPr marL="742950" lvl="1" indent="-285750">
+              <a:buFont typeface="Wingdings" panose="05000000000000000000" pitchFamily="2" charset="2"/>
+              <a:buChar char="Ø"/>
+            </a:pPr>
             <a:r>
-              <a:rPr lang="en-GB" dirty="0"/>
-              <a:t>✔ Reduced ambiguity:- Fallback using OS when vendor unclear</a:t>
+              <a:rPr lang="en-GB" sz="1600" dirty="0"/>
+              <a:t>Reduced ambiguity:- Fallback using OS when vendor unclear</a:t>
             </a:r>
           </a:p>
           <a:p>
             <a:r>
-              <a:rPr lang="en-GB" dirty="0"/>
+              <a:rPr lang="en-GB" sz="1600" dirty="0"/>
               <a:t> </a:t>
             </a:r>
           </a:p>
           <a:p>
             <a:r>
-              <a:rPr lang="en-GB" i="1" dirty="0"/>
+              <a:rPr lang="en-GB" sz="1600" i="1" dirty="0"/>
               <a:t>“Combining Vendor, OS, and Function enables more accurate and context-aware classification, especially in mixed environments containing IT, network, medical, and IoT assets.”</a:t>
             </a:r>
           </a:p>
@@ -35969,7 +35983,7 @@
                 <a:spcPts val="600"/>
               </a:spcAft>
             </a:pPr>
-            <a:endParaRPr lang="en-IN" i="1" dirty="0"/>
+            <a:endParaRPr lang="en-IN" sz="1600" i="1" dirty="0"/>
           </a:p>
         </p:txBody>
       </p:sp>
@@ -36115,7 +36129,9 @@
           <a:lstStyle/>
           <a:p>
             <a:r>
-              <a:rPr lang="en-IN" dirty="0"/>
+              <a:rPr lang="en-IN" sz="3200" dirty="0">
+                <a:latin typeface="+mn-lt"/>
+              </a:rPr>
               <a:t>Feature Engineering – Model Type classification (cont..)</a:t>
             </a:r>
           </a:p>
@@ -36539,7 +36555,9 @@
           <a:lstStyle/>
           <a:p>
             <a:r>
-              <a:rPr lang="en-IN" dirty="0"/>
+              <a:rPr lang="en-IN" sz="3200" dirty="0">
+                <a:latin typeface="+mn-lt"/>
+              </a:rPr>
               <a:t>Business Goals</a:t>
             </a:r>
           </a:p>
@@ -36885,7 +36903,9 @@
           <a:lstStyle/>
           <a:p>
             <a:r>
-              <a:rPr lang="en-IN" dirty="0"/>
+              <a:rPr lang="en-IN" sz="3200" dirty="0">
+                <a:latin typeface="+mn-lt"/>
+              </a:rPr>
               <a:t>Feature Engineering – Mobile Device Identification</a:t>
             </a:r>
           </a:p>
@@ -37087,7 +37107,7 @@
               <a:buChar char="•"/>
             </a:pPr>
             <a:r>
-              <a:rPr lang="en-IN" dirty="0"/>
+              <a:rPr lang="en-IN" sz="1600" dirty="0"/>
               <a:t>Identify mobile devices to enable device-type based risk segmentation.</a:t>
             </a:r>
           </a:p>
@@ -37100,7 +37120,7 @@
               <a:buChar char="•"/>
             </a:pPr>
             <a:r>
-              <a:rPr lang="en-IN" dirty="0"/>
+              <a:rPr lang="en-IN" sz="1600" dirty="0"/>
               <a:t>Used model_type and OS attribute.</a:t>
             </a:r>
           </a:p>
@@ -37113,7 +37133,7 @@
               <a:buChar char="•"/>
             </a:pPr>
             <a:r>
-              <a:rPr lang="en-IN" dirty="0"/>
+              <a:rPr lang="en-IN" sz="1600" dirty="0"/>
               <a:t>Mobile Device distribution and it’s relationship with Risk Level </a:t>
             </a:r>
           </a:p>
@@ -37123,7 +37143,7 @@
                 <a:spcPts val="600"/>
               </a:spcAft>
             </a:pPr>
-            <a:endParaRPr lang="en-IN" dirty="0"/>
+            <a:endParaRPr lang="en-IN" sz="1600" dirty="0"/>
           </a:p>
           <a:p>
             <a:pPr>
@@ -37131,7 +37151,7 @@
                 <a:spcPts val="600"/>
               </a:spcAft>
             </a:pPr>
-            <a:endParaRPr lang="en-IN" dirty="0"/>
+            <a:endParaRPr lang="en-IN" sz="1600" dirty="0"/>
           </a:p>
         </p:txBody>
       </p:sp>
@@ -37326,8 +37346,8 @@
         </p:nvSpPr>
         <p:spPr>
           <a:xfrm>
-            <a:off x="1794897" y="624110"/>
-            <a:ext cx="9712998" cy="1280890"/>
+            <a:off x="1794896" y="624110"/>
+            <a:ext cx="9388217" cy="1280890"/>
           </a:xfrm>
         </p:spPr>
         <p:txBody>
@@ -37337,7 +37357,9 @@
           <a:lstStyle/>
           <a:p>
             <a:r>
-              <a:rPr lang="en-IN" dirty="0"/>
+              <a:rPr lang="en-IN" sz="3200" dirty="0">
+                <a:latin typeface="+mn-lt"/>
+              </a:rPr>
               <a:t>Data Quality Assessment – Cross-field consistency check  </a:t>
             </a:r>
           </a:p>
@@ -37678,17 +37700,17 @@
           </a:p>
           <a:p>
             <a:pPr lvl="1"/>
-            <a:endParaRPr lang="en-GB" sz="1400" dirty="0"/>
+            <a:endParaRPr lang="en-GB" sz="1600" dirty="0"/>
           </a:p>
           <a:p>
             <a:pPr lvl="1"/>
             <a:r>
-              <a:rPr lang="en-GB" sz="1400" dirty="0"/>
+              <a:rPr lang="en-GB" sz="1600" dirty="0"/>
               <a:t>      	</a:t>
             </a:r>
           </a:p>
           <a:p>
-            <a:endParaRPr lang="en-GB" sz="1400" dirty="0"/>
+            <a:endParaRPr lang="en-GB" sz="1600" dirty="0"/>
           </a:p>
           <a:p>
             <a:pPr>
@@ -37696,7 +37718,7 @@
                 <a:spcPts val="600"/>
               </a:spcAft>
             </a:pPr>
-            <a:endParaRPr lang="en-IN" i="1" dirty="0"/>
+            <a:endParaRPr lang="en-IN" sz="1600" i="1" dirty="0"/>
           </a:p>
         </p:txBody>
       </p:sp>
@@ -37872,7 +37894,9 @@
           <a:lstStyle/>
           <a:p>
             <a:r>
-              <a:rPr lang="en-IN" dirty="0"/>
+              <a:rPr lang="en-IN" sz="3200" dirty="0">
+                <a:latin typeface="+mn-lt"/>
+              </a:rPr>
               <a:t>Data Quality Assessment – Cross-field consistency check ( cont..)  </a:t>
             </a:r>
           </a:p>
@@ -38227,17 +38251,17 @@
           </a:p>
           <a:p>
             <a:pPr lvl="1"/>
-            <a:endParaRPr lang="en-GB" sz="1400" dirty="0"/>
+            <a:endParaRPr lang="en-GB" sz="1600" dirty="0"/>
           </a:p>
           <a:p>
             <a:pPr lvl="1"/>
             <a:r>
-              <a:rPr lang="en-GB" sz="1400" dirty="0"/>
+              <a:rPr lang="en-GB" sz="1600" dirty="0"/>
               <a:t>      	</a:t>
             </a:r>
           </a:p>
           <a:p>
-            <a:endParaRPr lang="en-GB" sz="1400" dirty="0"/>
+            <a:endParaRPr lang="en-GB" sz="1600" dirty="0"/>
           </a:p>
           <a:p>
             <a:pPr>
@@ -38245,7 +38269,7 @@
                 <a:spcPts val="600"/>
               </a:spcAft>
             </a:pPr>
-            <a:endParaRPr lang="en-IN" i="1" dirty="0"/>
+            <a:endParaRPr lang="en-IN" sz="1600" i="1" dirty="0"/>
           </a:p>
         </p:txBody>
       </p:sp>
@@ -38421,7 +38445,9 @@
           <a:lstStyle/>
           <a:p>
             <a:r>
-              <a:rPr lang="en-IN" dirty="0"/>
+              <a:rPr lang="en-IN" sz="3200" dirty="0">
+                <a:latin typeface="+mn-lt"/>
+              </a:rPr>
               <a:t>Data Quality Assessment – Cross-field consistency check ( cont..)  </a:t>
             </a:r>
           </a:p>
@@ -38753,17 +38779,17 @@
           </a:p>
           <a:p>
             <a:pPr lvl="1"/>
-            <a:endParaRPr lang="en-GB" sz="1400" dirty="0"/>
+            <a:endParaRPr lang="en-GB" sz="1600" dirty="0"/>
           </a:p>
           <a:p>
             <a:pPr lvl="1"/>
             <a:r>
-              <a:rPr lang="en-GB" sz="1400" dirty="0"/>
+              <a:rPr lang="en-GB" sz="1600" dirty="0"/>
               <a:t>      	</a:t>
             </a:r>
           </a:p>
           <a:p>
-            <a:endParaRPr lang="en-GB" sz="1400" dirty="0"/>
+            <a:endParaRPr lang="en-GB" sz="1600" dirty="0"/>
           </a:p>
           <a:p>
             <a:pPr>
@@ -38771,7 +38797,7 @@
                 <a:spcPts val="600"/>
               </a:spcAft>
             </a:pPr>
-            <a:endParaRPr lang="en-IN" i="1" dirty="0"/>
+            <a:endParaRPr lang="en-IN" sz="1600" i="1" dirty="0"/>
           </a:p>
         </p:txBody>
       </p:sp>
@@ -38947,7 +38973,9 @@
           <a:lstStyle/>
           <a:p>
             <a:r>
-              <a:rPr lang="en-IN" dirty="0"/>
+              <a:rPr lang="en-IN" sz="3200" dirty="0">
+                <a:latin typeface="+mn-lt"/>
+              </a:rPr>
               <a:t>Data Quality Assessment – Cross-field consistency check ( cont..)  </a:t>
             </a:r>
           </a:p>
@@ -39266,17 +39294,17 @@
           </a:p>
           <a:p>
             <a:pPr lvl="1"/>
-            <a:endParaRPr lang="en-GB" sz="1400" dirty="0"/>
+            <a:endParaRPr lang="en-GB" sz="1600" dirty="0"/>
           </a:p>
           <a:p>
             <a:pPr lvl="1"/>
             <a:r>
-              <a:rPr lang="en-GB" sz="1400" dirty="0"/>
+              <a:rPr lang="en-GB" sz="1600" dirty="0"/>
               <a:t>      	</a:t>
             </a:r>
           </a:p>
           <a:p>
-            <a:endParaRPr lang="en-GB" sz="1400" dirty="0"/>
+            <a:endParaRPr lang="en-GB" sz="1600" dirty="0"/>
           </a:p>
           <a:p>
             <a:pPr>
@@ -39284,7 +39312,7 @@
                 <a:spcPts val="600"/>
               </a:spcAft>
             </a:pPr>
-            <a:endParaRPr lang="en-IN" i="1" dirty="0"/>
+            <a:endParaRPr lang="en-IN" sz="1600" i="1" dirty="0"/>
           </a:p>
         </p:txBody>
       </p:sp>
@@ -39460,7 +39488,9 @@
           <a:lstStyle/>
           <a:p>
             <a:r>
-              <a:rPr lang="en-IN" dirty="0"/>
+              <a:rPr lang="en-IN" sz="3200" dirty="0">
+                <a:latin typeface="+mn-lt"/>
+              </a:rPr>
               <a:t>Data Quality Assessment – Cross-field consistency check ( cont..)  </a:t>
             </a:r>
           </a:p>
@@ -39656,7 +39686,7 @@
           <a:p>
             <a:r>
               <a:rPr lang="en-GB" sz="1600" b="1" dirty="0"/>
-              <a:t>MAC OUI – Vendor Mismatch Detection</a:t>
+              <a:t>DHCP Vendor Class vs Vendor Mismatch Detection</a:t>
             </a:r>
           </a:p>
           <a:p>
@@ -39675,11 +39705,11 @@
             </a:pPr>
             <a:r>
               <a:rPr lang="en-GB" sz="1600" b="1" dirty="0"/>
-              <a:t>Apple OUI </a:t>
+              <a:t>Cisco IP Phone / AP strings</a:t>
             </a:r>
             <a:r>
               <a:rPr lang="en-GB" sz="1600" dirty="0"/>
-              <a:t>→ must map to Apple Devices.</a:t>
+              <a:t> → must map to Cisco.</a:t>
             </a:r>
           </a:p>
           <a:p>
@@ -39689,13 +39719,12 @@
             </a:pPr>
             <a:r>
               <a:rPr lang="en-GB" sz="1600" b="1" dirty="0"/>
-              <a:t>Cisco OUI</a:t>
+              <a:t>HP JetDirect / LaserJet</a:t>
             </a:r>
             <a:r>
               <a:rPr lang="en-GB" sz="1600" dirty="0"/>
-              <a:t> → must map to Cisco networking equipment</a:t>
+              <a:t> → must map to HP </a:t>
             </a:r>
-            <a:endParaRPr lang="en-GB" sz="1600" i="1" dirty="0"/>
           </a:p>
           <a:p>
             <a:pPr marL="742950" lvl="1" indent="-285750">
@@ -39704,11 +39733,11 @@
             </a:pPr>
             <a:r>
               <a:rPr lang="en-GB" sz="1600" b="1" dirty="0"/>
-              <a:t>HP/Dell OUI</a:t>
+              <a:t>ArubaAP / Sensor</a:t>
             </a:r>
             <a:r>
               <a:rPr lang="en-GB" sz="1600" dirty="0"/>
-              <a:t> → map to corresponding enterprise hardware. </a:t>
+              <a:t> → must map to Aruba </a:t>
             </a:r>
             <a:endParaRPr lang="en-GB" sz="1600" i="1" dirty="0"/>
           </a:p>
@@ -39719,13 +39748,12 @@
             </a:pPr>
             <a:r>
               <a:rPr lang="en-GB" sz="1600" b="1" dirty="0"/>
-              <a:t>VMware OUI </a:t>
+              <a:t>FortiWiFi / Fortinet strings</a:t>
             </a:r>
             <a:r>
               <a:rPr lang="en-GB" sz="1600" dirty="0"/>
-              <a:t> → map to virtualised infrastructure</a:t>
+              <a:t> → must map to Fortinet </a:t>
             </a:r>
-            <a:endParaRPr lang="en-GB" sz="1600" i="1" dirty="0"/>
           </a:p>
           <a:p>
             <a:pPr marL="742950" lvl="1" indent="-285750">
@@ -39734,15 +39762,40 @@
             </a:pPr>
             <a:r>
               <a:rPr lang="en-GB" sz="1600" b="1" dirty="0"/>
-              <a:t>Network vendors(Aruba, Juniper, Netgear)</a:t>
+              <a:t>Android DHCP</a:t>
             </a:r>
             <a:r>
               <a:rPr lang="en-GB" sz="1600" dirty="0"/>
-              <a:t> → match networking devices.</a:t>
+              <a:t> → typically Samsung / Android ecosystem.</a:t>
             </a:r>
           </a:p>
           <a:p>
-            <a:endParaRPr lang="en-GB" sz="1600" dirty="0"/>
+            <a:pPr marL="742950" lvl="1" indent="-285750">
+              <a:buFont typeface="Arial" panose="020B0604020202020204" pitchFamily="34" charset="0"/>
+              <a:buChar char="•"/>
+            </a:pPr>
+            <a:r>
+              <a:rPr lang="en-GB" sz="1600" b="1" dirty="0"/>
+              <a:t>MSFT 5.0 / PXEClient</a:t>
+            </a:r>
+            <a:r>
+              <a:rPr lang="en-GB" sz="1600" dirty="0"/>
+              <a:t> → Microsoft / OS-level identifiers (not vendor)</a:t>
+            </a:r>
+          </a:p>
+          <a:p>
+            <a:pPr marL="742950" lvl="1" indent="-285750">
+              <a:buFont typeface="Arial" panose="020B0604020202020204" pitchFamily="34" charset="0"/>
+              <a:buChar char="•"/>
+            </a:pPr>
+            <a:r>
+              <a:rPr lang="en-GB" sz="1600" b="1" dirty="0"/>
+              <a:t>DHCPD / UDHCP / Linux strings</a:t>
+            </a:r>
+            <a:r>
+              <a:rPr lang="en-GB" sz="1600" dirty="0"/>
+              <a:t> → treated as non-vendor system identifiers</a:t>
+            </a:r>
           </a:p>
           <a:p>
             <a:r>
@@ -39779,17 +39832,17 @@
           </a:p>
           <a:p>
             <a:pPr lvl="1"/>
-            <a:endParaRPr lang="en-GB" sz="1400" dirty="0"/>
+            <a:endParaRPr lang="en-GB" sz="1600" dirty="0"/>
           </a:p>
           <a:p>
             <a:pPr lvl="1"/>
             <a:r>
-              <a:rPr lang="en-GB" sz="1400" dirty="0"/>
+              <a:rPr lang="en-GB" sz="1600" dirty="0"/>
               <a:t>      	</a:t>
             </a:r>
           </a:p>
           <a:p>
-            <a:endParaRPr lang="en-GB" sz="1400" dirty="0"/>
+            <a:endParaRPr lang="en-GB" sz="1600" dirty="0"/>
           </a:p>
           <a:p>
             <a:pPr>
@@ -39797,16 +39850,16 @@
                 <a:spcPts val="600"/>
               </a:spcAft>
             </a:pPr>
-            <a:endParaRPr lang="en-IN" i="1" dirty="0"/>
+            <a:endParaRPr lang="en-IN" sz="1600" i="1" dirty="0"/>
           </a:p>
         </p:txBody>
       </p:sp>
       <p:pic>
         <p:nvPicPr>
-          <p:cNvPr id="9" name="Picture 8">
+          <p:cNvPr id="6" name="Picture 5">
             <a:extLst>
               <a:ext uri="{FF2B5EF4-FFF2-40B4-BE49-F238E27FC236}">
-                <a16:creationId xmlns:a16="http://schemas.microsoft.com/office/drawing/2014/main" id="{7CF06F73-381A-F5B0-9B8E-1A09EBC1E70F}"/>
+                <a16:creationId xmlns:a16="http://schemas.microsoft.com/office/drawing/2014/main" id="{2FF7C0CD-F3B6-0162-C9D0-D8B85331CD58}"/>
               </a:ext>
             </a:extLst>
           </p:cNvPr>
@@ -39823,8 +39876,8 @@
         </p:blipFill>
         <p:spPr>
           <a:xfrm>
-            <a:off x="1656316" y="5115915"/>
-            <a:ext cx="9354856" cy="1171739"/>
+            <a:off x="1648345" y="5512035"/>
+            <a:ext cx="9607919" cy="1078261"/>
           </a:xfrm>
           <a:prstGeom prst="rect">
             <a:avLst/>
@@ -39834,7 +39887,7 @@
     </p:spTree>
     <p:extLst>
       <p:ext uri="{BB962C8B-B14F-4D97-AF65-F5344CB8AC3E}">
-        <p14:creationId xmlns:p14="http://schemas.microsoft.com/office/powerpoint/2010/main" val="2335245306"/>
+        <p14:creationId xmlns:p14="http://schemas.microsoft.com/office/powerpoint/2010/main" val="1663962106"/>
       </p:ext>
     </p:extLst>
   </p:cSld>
@@ -39968,13 +40021,26 @@
         </p:spPr>
         <p:txBody>
           <a:bodyPr>
-            <a:normAutofit/>
+            <a:noAutofit/>
           </a:bodyPr>
           <a:lstStyle/>
           <a:p>
             <a:r>
-              <a:rPr lang="en-IN" dirty="0"/>
-              <a:t>Data Quality Assessment – Cross-field consistency check ( cont..)  </a:t>
+              <a:rPr lang="en-IN" sz="3200" dirty="0">
+                <a:latin typeface="+mn-lt"/>
+              </a:rPr>
+              <a:t>Data Quality Assessment – Schema &amp; Format Validation </a:t>
+            </a:r>
+            <a:br>
+              <a:rPr lang="en-IN" sz="3200" dirty="0">
+                <a:latin typeface="+mn-lt"/>
+              </a:rPr>
+            </a:br>
+            <a:r>
+              <a:rPr lang="en-IN" sz="3200" dirty="0">
+                <a:latin typeface="+mn-lt"/>
+              </a:rPr>
+              <a:t> </a:t>
             </a:r>
           </a:p>
         </p:txBody>
@@ -40169,7 +40235,7 @@
           <a:p>
             <a:r>
               <a:rPr lang="en-GB" sz="1600" b="1" dirty="0"/>
-              <a:t>DHCP Vendor Class vs Vendor Mismatch Detection</a:t>
+              <a:t>MAC Address Validation</a:t>
             </a:r>
           </a:p>
           <a:p>
@@ -40178,154 +40244,60 @@
           <a:p>
             <a:r>
               <a:rPr lang="en-GB" sz="1600" dirty="0"/>
-              <a:t>Example Rules:</a:t>
+              <a:t>MAC addresses must follow a strict 12-character hexadecimal format representing a unique hardware identifier. It must not be </a:t>
             </a:r>
           </a:p>
           <a:p>
-            <a:pPr marL="742950" lvl="1" indent="-285750">
-              <a:buFont typeface="Arial" panose="020B0604020202020204" pitchFamily="34" charset="0"/>
-              <a:buChar char="•"/>
-            </a:pPr>
-            <a:r>
-              <a:rPr lang="en-GB" sz="1600" b="1" dirty="0"/>
-              <a:t>Cisco IP Phone / AP strings</a:t>
-            </a:r>
-            <a:r>
-              <a:rPr lang="en-GB" sz="1600" dirty="0"/>
-              <a:t> → must map to Cisco.</a:t>
-            </a:r>
-          </a:p>
-          <a:p>
-            <a:pPr marL="742950" lvl="1" indent="-285750">
-              <a:buFont typeface="Arial" panose="020B0604020202020204" pitchFamily="34" charset="0"/>
-              <a:buChar char="•"/>
-            </a:pPr>
-            <a:r>
-              <a:rPr lang="en-GB" sz="1600" b="1" dirty="0"/>
-              <a:t>HP JetDirect / LaserJet</a:t>
-            </a:r>
-            <a:r>
-              <a:rPr lang="en-GB" sz="1600" dirty="0"/>
-              <a:t> → must map to HP </a:t>
-            </a:r>
-          </a:p>
-          <a:p>
-            <a:pPr marL="742950" lvl="1" indent="-285750">
-              <a:buFont typeface="Arial" panose="020B0604020202020204" pitchFamily="34" charset="0"/>
-              <a:buChar char="•"/>
-            </a:pPr>
-            <a:r>
-              <a:rPr lang="en-GB" sz="1600" b="1" dirty="0"/>
-              <a:t>ArubaAP / Sensor</a:t>
-            </a:r>
-            <a:r>
-              <a:rPr lang="en-GB" sz="1600" dirty="0"/>
-              <a:t> → must map to Aruba </a:t>
-            </a:r>
-            <a:endParaRPr lang="en-GB" sz="1600" i="1" dirty="0"/>
-          </a:p>
-          <a:p>
-            <a:pPr marL="742950" lvl="1" indent="-285750">
-              <a:buFont typeface="Arial" panose="020B0604020202020204" pitchFamily="34" charset="0"/>
-              <a:buChar char="•"/>
-            </a:pPr>
-            <a:r>
-              <a:rPr lang="en-GB" sz="1600" b="1" dirty="0"/>
-              <a:t>FortiWiFi / Fortinet strings</a:t>
-            </a:r>
-            <a:r>
-              <a:rPr lang="en-GB" sz="1600" dirty="0"/>
-              <a:t> → must map to Fortinet </a:t>
-            </a:r>
-          </a:p>
-          <a:p>
-            <a:pPr marL="742950" lvl="1" indent="-285750">
-              <a:buFont typeface="Arial" panose="020B0604020202020204" pitchFamily="34" charset="0"/>
-              <a:buChar char="•"/>
-            </a:pPr>
-            <a:r>
-              <a:rPr lang="en-GB" sz="1600" b="1" dirty="0"/>
-              <a:t>Android DHCP</a:t>
-            </a:r>
-            <a:r>
-              <a:rPr lang="en-GB" sz="1600" dirty="0"/>
-              <a:t> → typically Samsung / Android ecosystem.</a:t>
-            </a:r>
-          </a:p>
-          <a:p>
-            <a:pPr marL="742950" lvl="1" indent="-285750">
-              <a:buFont typeface="Arial" panose="020B0604020202020204" pitchFamily="34" charset="0"/>
-              <a:buChar char="•"/>
-            </a:pPr>
-            <a:r>
-              <a:rPr lang="en-GB" sz="1600" b="1" dirty="0"/>
-              <a:t>MSFT 5.0 / PXEClient</a:t>
-            </a:r>
-            <a:r>
-              <a:rPr lang="en-GB" sz="1600" dirty="0"/>
-              <a:t> → Microsoft / OS-level identifiers (not vendor)</a:t>
-            </a:r>
-          </a:p>
-          <a:p>
-            <a:pPr marL="742950" lvl="1" indent="-285750">
-              <a:buFont typeface="Arial" panose="020B0604020202020204" pitchFamily="34" charset="0"/>
-              <a:buChar char="•"/>
-            </a:pPr>
-            <a:r>
-              <a:rPr lang="en-GB" sz="1600" b="1" dirty="0"/>
-              <a:t>DHCPD / UDHCP / Linux strings</a:t>
-            </a:r>
-            <a:r>
-              <a:rPr lang="en-GB" sz="1600" dirty="0"/>
-              <a:t> → treated as non-vendor system identifiers</a:t>
-            </a:r>
-          </a:p>
-          <a:p>
-            <a:r>
-              <a:rPr lang="en-GB" sz="1600" dirty="0"/>
-              <a:t>Output:</a:t>
-            </a:r>
-          </a:p>
-          <a:p>
-            <a:pPr marL="742950" lvl="1" indent="-285750">
+            <a:pPr lvl="1">
               <a:buFont typeface="Arial" panose="020B0604020202020204" pitchFamily="34" charset="0"/>
               <a:buChar char="•"/>
             </a:pPr>
             <a:r>
               <a:rPr lang="en-GB" sz="1600" dirty="0"/>
-              <a:t>Binary Flag :- True(mismatch Detected)/False(Valid Record)</a:t>
+              <a:t> All zeros (000000000000) </a:t>
             </a:r>
           </a:p>
           <a:p>
-            <a:pPr marL="742950" lvl="1" indent="-285750">
+            <a:pPr lvl="1">
               <a:buFont typeface="Arial" panose="020B0604020202020204" pitchFamily="34" charset="0"/>
               <a:buChar char="•"/>
             </a:pPr>
             <a:r>
               <a:rPr lang="en-GB" sz="1600" dirty="0"/>
-              <a:t>Error Reason :- Explains the mismatch</a:t>
+              <a:t> Broadcast-like patterns (ffffffffffff) </a:t>
             </a:r>
           </a:p>
           <a:p>
-            <a:pPr marL="742950" lvl="1" indent="-285750">
+            <a:pPr lvl="1">
               <a:buFont typeface="Arial" panose="020B0604020202020204" pitchFamily="34" charset="0"/>
               <a:buChar char="•"/>
             </a:pPr>
+            <a:r>
+              <a:rPr lang="en-GB" sz="1600" dirty="0"/>
+              <a:t> Synthetic/test identifiers (feedad*, deadbe*)</a:t>
+            </a:r>
+            <a:endParaRPr lang="en-GB" sz="1600" b="1" dirty="0"/>
+          </a:p>
+          <a:p>
+            <a:endParaRPr lang="en-GB" sz="1600" b="1" dirty="0"/>
+          </a:p>
+          <a:p>
+            <a:pPr lvl="1"/>
             <a:endParaRPr lang="en-GB" sz="1600" dirty="0"/>
           </a:p>
           <a:p>
             <a:pPr lvl="1"/>
-            <a:endParaRPr lang="en-GB" sz="1400" dirty="0"/>
+            <a:endParaRPr lang="en-GB" sz="1600" dirty="0"/>
           </a:p>
           <a:p>
             <a:pPr lvl="1"/>
             <a:r>
-              <a:rPr lang="en-GB" sz="1400" dirty="0"/>
+              <a:rPr lang="en-GB" sz="1600" dirty="0"/>
               <a:t>      	</a:t>
             </a:r>
           </a:p>
           <a:p>
-            <a:endParaRPr lang="en-GB" sz="1400" dirty="0"/>
+            <a:endParaRPr lang="en-GB" sz="1600" dirty="0"/>
           </a:p>
           <a:p>
             <a:pPr>
@@ -40333,16 +40305,45 @@
                 <a:spcPts val="600"/>
               </a:spcAft>
             </a:pPr>
-            <a:endParaRPr lang="en-IN" i="1" dirty="0"/>
+            <a:r>
+              <a:rPr lang="en-IN" sz="1600" b="1" dirty="0"/>
+              <a:t>Duplicate MAC Detection</a:t>
+            </a:r>
+          </a:p>
+          <a:p>
+            <a:pPr>
+              <a:spcAft>
+                <a:spcPts val="600"/>
+              </a:spcAft>
+            </a:pPr>
+            <a:r>
+              <a:rPr lang="en-GB" sz="1600" dirty="0"/>
+              <a:t>Each device is expected to have a unique MAC address representing its hardware identity.</a:t>
+            </a:r>
+            <a:br>
+              <a:rPr lang="en-GB" sz="1600" dirty="0"/>
+            </a:br>
+            <a:r>
+              <a:rPr lang="en-GB" sz="1600" dirty="0"/>
+              <a:t>For 14 records , we have detected duplicate MAC.</a:t>
+            </a:r>
+          </a:p>
+          <a:p>
+            <a:pPr>
+              <a:spcAft>
+                <a:spcPts val="600"/>
+              </a:spcAft>
+            </a:pPr>
+            <a:endParaRPr lang="en-IN" sz="1600" b="1" dirty="0"/>
           </a:p>
         </p:txBody>
       </p:sp>
       <p:pic>
         <p:nvPicPr>
-          <p:cNvPr id="6" name="Picture 5">
+          <p:cNvPr id="5" name="Picture 4">
             <a:extLst>
               <a:ext uri="{FF2B5EF4-FFF2-40B4-BE49-F238E27FC236}">
-                <a16:creationId xmlns:a16="http://schemas.microsoft.com/office/drawing/2014/main" id="{2FF7C0CD-F3B6-0162-C9D0-D8B85331CD58}"/>
+                <a16:creationId xmlns:a16="http://schemas.microsoft.com/office/drawing/2014/main" id="{FF969841-A322-BB47-268E-B40671577080}"/>
               </a:ext>
             </a:extLst>
           </p:cNvPr>
@@ -40359,8 +40360,38 @@
         </p:blipFill>
         <p:spPr>
           <a:xfrm>
-            <a:off x="1648345" y="5512035"/>
-            <a:ext cx="9607919" cy="1078261"/>
+            <a:off x="1684921" y="3841047"/>
+            <a:ext cx="5538839" cy="874900"/>
+          </a:xfrm>
+          <a:prstGeom prst="rect">
+            <a:avLst/>
+          </a:prstGeom>
+        </p:spPr>
+      </p:pic>
+      <p:pic>
+        <p:nvPicPr>
+          <p:cNvPr id="8" name="Picture 7">
+            <a:extLst>
+              <a:ext uri="{FF2B5EF4-FFF2-40B4-BE49-F238E27FC236}">
+                <a16:creationId xmlns:a16="http://schemas.microsoft.com/office/drawing/2014/main" id="{A10AAD2C-7EFB-BB39-AB04-9CEB002AD80E}"/>
+              </a:ext>
+            </a:extLst>
+          </p:cNvPr>
+          <p:cNvPicPr>
+            <a:picLocks noChangeAspect="1"/>
+          </p:cNvPicPr>
+          <p:nvPr/>
+        </p:nvPicPr>
+        <p:blipFill>
+          <a:blip r:embed="rId3"/>
+          <a:stretch>
+            <a:fillRect/>
+          </a:stretch>
+        </p:blipFill>
+        <p:spPr>
+          <a:xfrm>
+            <a:off x="1684921" y="5734663"/>
+            <a:ext cx="5538839" cy="793120"/>
           </a:xfrm>
           <a:prstGeom prst="rect">
             <a:avLst/>
@@ -40370,7 +40401,7 @@
     </p:spTree>
     <p:extLst>
       <p:ext uri="{BB962C8B-B14F-4D97-AF65-F5344CB8AC3E}">
-        <p14:creationId xmlns:p14="http://schemas.microsoft.com/office/powerpoint/2010/main" val="1663962106"/>
+        <p14:creationId xmlns:p14="http://schemas.microsoft.com/office/powerpoint/2010/main" val="1454757484"/>
       </p:ext>
     </p:extLst>
   </p:cSld>
@@ -40509,8 +40540,10 @@
           <a:lstStyle/>
           <a:p>
             <a:r>
-              <a:rPr lang="en-IN" dirty="0"/>
-              <a:t>Data Quality Assessment – Schema &amp; Format Validation </a:t>
+              <a:rPr lang="en-IN" dirty="0">
+                <a:latin typeface="+mn-lt"/>
+              </a:rPr>
+              <a:t>Data Quality Assessment – Schema &amp; Format Validation ( cont..)</a:t>
             </a:r>
             <a:br>
               <a:rPr lang="en-IN" dirty="0"/>
@@ -40712,7 +40745,7 @@
           <a:p>
             <a:r>
               <a:rPr lang="en-GB" sz="1600" b="1" dirty="0"/>
-              <a:t>MAC Address Validation</a:t>
+              <a:t>OS Format Validation</a:t>
             </a:r>
           </a:p>
           <a:p>
@@ -40721,106 +40754,100 @@
           <a:p>
             <a:r>
               <a:rPr lang="en-GB" sz="1600" dirty="0"/>
-              <a:t>MAC addresses must follow a strict 12-character hexadecimal format representing a unique hardware identifier. It must not be </a:t>
+              <a:t>The following rule-based checks were applied:	</a:t>
             </a:r>
           </a:p>
           <a:p>
-            <a:pPr lvl="1">
+            <a:pPr marL="742950" lvl="1" indent="-285750">
               <a:buFont typeface="Arial" panose="020B0604020202020204" pitchFamily="34" charset="0"/>
               <a:buChar char="•"/>
             </a:pPr>
             <a:r>
               <a:rPr lang="en-GB" sz="1600" dirty="0"/>
-              <a:t> All zeros (000000000000) </a:t>
+              <a:t>Missing or null OS values.</a:t>
             </a:r>
           </a:p>
           <a:p>
-            <a:pPr lvl="1">
+            <a:pPr marL="742950" lvl="1" indent="-285750">
               <a:buFont typeface="Arial" panose="020B0604020202020204" pitchFamily="34" charset="0"/>
               <a:buChar char="•"/>
             </a:pPr>
             <a:r>
               <a:rPr lang="en-GB" sz="1600" dirty="0"/>
-              <a:t> Broadcast-like patterns (ffffffffffff) </a:t>
+              <a:t>Generic placeholders (unknown, </a:t>
             </a:r>
-          </a:p>
-          <a:p>
-            <a:pPr lvl="1">
+            <a:r>
+              <a:rPr lang="en-GB" sz="1600" dirty="0" err="1"/>
+              <a:t>na</a:t>
+            </a:r>
+            <a:r>
+              <a:rPr lang="en-GB" sz="1600" dirty="0"/>
+              <a:t>, none)</a:t>
+            </a:r>
+          </a:p>
+          <a:p>
+            <a:pPr marL="742950" lvl="1" indent="-285750">
               <a:buFont typeface="Arial" panose="020B0604020202020204" pitchFamily="34" charset="0"/>
               <a:buChar char="•"/>
             </a:pPr>
             <a:r>
               <a:rPr lang="en-GB" sz="1600" dirty="0"/>
-              <a:t> Synthetic/test identifiers (feedad*, deadbe*)</a:t>
+              <a:t>Network artifacts (PXE, DHCP, boot clients)</a:t>
             </a:r>
-            <a:endParaRPr lang="en-GB" sz="1600" b="1" dirty="0"/>
-          </a:p>
-          <a:p>
-            <a:endParaRPr lang="en-GB" sz="1600" b="1" dirty="0"/>
-          </a:p>
-          <a:p>
-            <a:pPr lvl="1"/>
-            <a:endParaRPr lang="en-GB" sz="1600" dirty="0"/>
-          </a:p>
-          <a:p>
-            <a:pPr lvl="1"/>
-            <a:endParaRPr lang="en-GB" sz="1400" dirty="0"/>
-          </a:p>
-          <a:p>
-            <a:pPr lvl="1"/>
-            <a:r>
-              <a:rPr lang="en-GB" sz="1400" dirty="0"/>
-              <a:t>      	</a:t>
-            </a:r>
-          </a:p>
-          <a:p>
-            <a:endParaRPr lang="en-GB" sz="1400" dirty="0"/>
-          </a:p>
-          <a:p>
-            <a:pPr>
-              <a:spcAft>
-                <a:spcPts val="600"/>
-              </a:spcAft>
-            </a:pPr>
-            <a:r>
-              <a:rPr lang="en-IN" sz="1600" b="1" dirty="0"/>
-              <a:t>Duplicate MAC Detection</a:t>
-            </a:r>
-          </a:p>
-          <a:p>
-            <a:pPr>
-              <a:spcAft>
-                <a:spcPts val="600"/>
-              </a:spcAft>
+          </a:p>
+          <a:p>
+            <a:pPr marL="742950" lvl="1" indent="-285750">
+              <a:buFont typeface="Arial" panose="020B0604020202020204" pitchFamily="34" charset="0"/>
+              <a:buChar char="•"/>
             </a:pPr>
             <a:r>
               <a:rPr lang="en-GB" sz="1600" dirty="0"/>
-              <a:t>Each device is expected to have a unique MAC address representing its hardware identity.</a:t>
+              <a:t>Corrupted or noisy strings</a:t>
             </a:r>
-            <a:br>
-              <a:rPr lang="en-GB" sz="1600" dirty="0"/>
-            </a:br>
+          </a:p>
+          <a:p>
+            <a:pPr marL="742950" lvl="1" indent="-285750">
+              <a:buFont typeface="Arial" panose="020B0604020202020204" pitchFamily="34" charset="0"/>
+              <a:buChar char="•"/>
+            </a:pPr>
             <a:r>
               <a:rPr lang="en-GB" sz="1600" dirty="0"/>
-              <a:t>For 14 records , we have detected duplicate MAC.</a:t>
+              <a:t>Misclassified vendor or DHCP values </a:t>
             </a:r>
           </a:p>
           <a:p>
-            <a:pPr>
-              <a:spcAft>
-                <a:spcPts val="600"/>
-              </a:spcAft>
-            </a:pPr>
-            <a:endParaRPr lang="en-IN" sz="1600" b="1" dirty="0"/>
+            <a:pPr lvl="1"/>
+            <a:endParaRPr lang="en-GB" sz="1600" dirty="0"/>
+          </a:p>
+          <a:p>
+            <a:endParaRPr lang="en-GB" sz="1600" b="1" dirty="0"/>
+          </a:p>
+          <a:p>
+            <a:endParaRPr lang="en-GB" sz="1600" b="1" dirty="0"/>
+          </a:p>
+          <a:p>
+            <a:endParaRPr lang="en-GB" sz="1600" b="1" dirty="0"/>
+          </a:p>
+          <a:p>
+            <a:endParaRPr lang="en-GB" sz="1600" b="1" dirty="0"/>
+          </a:p>
+          <a:p>
+            <a:r>
+              <a:rPr lang="en-GB" sz="1600" b="1" dirty="0"/>
+              <a:t>Missing Value Detection</a:t>
+            </a:r>
+          </a:p>
+          <a:p>
+            <a:endParaRPr lang="en-GB" sz="1600" b="1" dirty="0"/>
           </a:p>
         </p:txBody>
       </p:sp>
       <p:pic>
         <p:nvPicPr>
-          <p:cNvPr id="5" name="Picture 4">
+          <p:cNvPr id="7" name="Picture 6">
             <a:extLst>
               <a:ext uri="{FF2B5EF4-FFF2-40B4-BE49-F238E27FC236}">
-                <a16:creationId xmlns:a16="http://schemas.microsoft.com/office/drawing/2014/main" id="{FF969841-A322-BB47-268E-B40671577080}"/>
+                <a16:creationId xmlns:a16="http://schemas.microsoft.com/office/drawing/2014/main" id="{67E4AF89-3F70-7C63-4F03-990E6D6172A2}"/>
               </a:ext>
             </a:extLst>
           </p:cNvPr>
@@ -40837,8 +40864,8 @@
         </p:blipFill>
         <p:spPr>
           <a:xfrm>
-            <a:off x="1684921" y="3841047"/>
-            <a:ext cx="5538839" cy="874900"/>
+            <a:off x="1584337" y="3963560"/>
+            <a:ext cx="4511663" cy="998084"/>
           </a:xfrm>
           <a:prstGeom prst="rect">
             <a:avLst/>
@@ -40847,10 +40874,10 @@
       </p:pic>
       <p:pic>
         <p:nvPicPr>
-          <p:cNvPr id="8" name="Picture 7">
+          <p:cNvPr id="15" name="Picture 14">
             <a:extLst>
               <a:ext uri="{FF2B5EF4-FFF2-40B4-BE49-F238E27FC236}">
-                <a16:creationId xmlns:a16="http://schemas.microsoft.com/office/drawing/2014/main" id="{A10AAD2C-7EFB-BB39-AB04-9CEB002AD80E}"/>
+                <a16:creationId xmlns:a16="http://schemas.microsoft.com/office/drawing/2014/main" id="{A660E852-B0ED-3A28-404C-F222E2A128A9}"/>
               </a:ext>
             </a:extLst>
           </p:cNvPr>
@@ -40867,8 +40894,8 @@
         </p:blipFill>
         <p:spPr>
           <a:xfrm>
-            <a:off x="1684921" y="5734663"/>
-            <a:ext cx="5538839" cy="793120"/>
+            <a:off x="1672051" y="5404434"/>
+            <a:ext cx="2085821" cy="1385736"/>
           </a:xfrm>
           <a:prstGeom prst="rect">
             <a:avLst/>
@@ -40878,7 +40905,7 @@
     </p:spTree>
     <p:extLst>
       <p:ext uri="{BB962C8B-B14F-4D97-AF65-F5344CB8AC3E}">
-        <p14:creationId xmlns:p14="http://schemas.microsoft.com/office/powerpoint/2010/main" val="1454757484"/>
+        <p14:creationId xmlns:p14="http://schemas.microsoft.com/office/powerpoint/2010/main" val="2783511346"/>
       </p:ext>
     </p:extLst>
   </p:cSld>
@@ -41017,14 +41044,20 @@
           <a:lstStyle/>
           <a:p>
             <a:r>
-              <a:rPr lang="en-IN" dirty="0"/>
-              <a:t>Data Quality Assessment – Schema &amp; Format Validation ( cont..)</a:t>
+              <a:rPr lang="en-IN" dirty="0">
+                <a:latin typeface="+mn-lt"/>
+              </a:rPr>
+              <a:t>Data Quality Assessment - Device Identity &amp; Uniqueness Checks</a:t>
             </a:r>
             <a:br>
-              <a:rPr lang="en-IN" dirty="0"/>
+              <a:rPr lang="en-IN" dirty="0">
+                <a:latin typeface="+mn-lt"/>
+              </a:rPr>
             </a:br>
             <a:r>
-              <a:rPr lang="en-IN" dirty="0"/>
+              <a:rPr lang="en-IN" dirty="0">
+                <a:latin typeface="+mn-lt"/>
+              </a:rPr>
               <a:t> </a:t>
             </a:r>
           </a:p>
@@ -41220,7 +41253,7 @@
           <a:p>
             <a:r>
               <a:rPr lang="en-GB" sz="1600" b="1" dirty="0"/>
-              <a:t>OS Format Validation</a:t>
+              <a:t>Same MAC with conflicting identity</a:t>
             </a:r>
           </a:p>
           <a:p>
@@ -41229,66 +41262,91 @@
           <a:p>
             <a:r>
               <a:rPr lang="en-GB" sz="1600" dirty="0"/>
-              <a:t>The following rule-based checks were applied:	</a:t>
+              <a:t>The system groups records by MAC Address and checks variability in:</a:t>
             </a:r>
           </a:p>
           <a:p>
-            <a:pPr marL="742950" lvl="1" indent="-285750">
+            <a:pPr lvl="1">
               <a:buFont typeface="Arial" panose="020B0604020202020204" pitchFamily="34" charset="0"/>
               <a:buChar char="•"/>
             </a:pPr>
             <a:r>
               <a:rPr lang="en-GB" sz="1600" dirty="0"/>
-              <a:t>Missing or null OS values.</a:t>
+              <a:t> Operating System (OS) </a:t>
             </a:r>
           </a:p>
           <a:p>
-            <a:pPr marL="742950" lvl="1" indent="-285750">
+            <a:pPr lvl="1">
               <a:buFont typeface="Arial" panose="020B0604020202020204" pitchFamily="34" charset="0"/>
               <a:buChar char="•"/>
             </a:pPr>
             <a:r>
               <a:rPr lang="en-GB" sz="1600" dirty="0"/>
-              <a:t>Generic placeholders (unknown, </a:t>
+              <a:t> Vendor and Model </a:t>
             </a:r>
-            <a:r>
-              <a:rPr lang="en-GB" sz="1600" dirty="0" err="1"/>
-              <a:t>na</a:t>
-            </a:r>
-            <a:r>
-              <a:rPr lang="en-GB" sz="1600" dirty="0"/>
-              <a:t>, none)</a:t>
-            </a:r>
-          </a:p>
-          <a:p>
-            <a:pPr marL="742950" lvl="1" indent="-285750">
+          </a:p>
+          <a:p>
+            <a:pPr lvl="1">
               <a:buFont typeface="Arial" panose="020B0604020202020204" pitchFamily="34" charset="0"/>
               <a:buChar char="•"/>
             </a:pPr>
             <a:r>
               <a:rPr lang="en-GB" sz="1600" dirty="0"/>
-              <a:t>Network artifacts (PXE, DHCP, boot clients)</a:t>
+              <a:t> Device Function </a:t>
             </a:r>
           </a:p>
           <a:p>
-            <a:pPr marL="742950" lvl="1" indent="-285750">
+            <a:pPr lvl="1">
               <a:buFont typeface="Arial" panose="020B0604020202020204" pitchFamily="34" charset="0"/>
               <a:buChar char="•"/>
             </a:pPr>
             <a:r>
               <a:rPr lang="en-GB" sz="1600" dirty="0"/>
-              <a:t>Corrupted or noisy strings</a:t>
+              <a:t> Category </a:t>
             </a:r>
           </a:p>
           <a:p>
-            <a:pPr marL="742950" lvl="1" indent="-285750">
-              <a:buFont typeface="Arial" panose="020B0604020202020204" pitchFamily="34" charset="0"/>
-              <a:buChar char="•"/>
-            </a:pPr>
             <a:r>
               <a:rPr lang="en-GB" sz="1600" dirty="0"/>
-              <a:t>Misclassified vendor or DHCP values </a:t>
+              <a:t>If more than one unique value exists in any attribute, it is flagged as a conflict.</a:t>
             </a:r>
+            <a:br>
+              <a:rPr lang="en-GB" sz="1600" dirty="0"/>
+            </a:br>
+            <a:r>
+              <a:rPr lang="en-GB" sz="1600" dirty="0"/>
+              <a:t>There are only 4 assets where Identity conflict detected.</a:t>
+            </a:r>
+          </a:p>
+          <a:p>
+            <a:endParaRPr lang="en-GB" sz="1600" dirty="0"/>
+          </a:p>
+          <a:p>
+            <a:r>
+              <a:rPr lang="en-GB" sz="1600" b="1" dirty="0"/>
+              <a:t>Duplicate Fingerprint Analysis</a:t>
+            </a:r>
+          </a:p>
+          <a:p>
+            <a:endParaRPr lang="en-GB" sz="1600" dirty="0"/>
+          </a:p>
+          <a:p>
+            <a:r>
+              <a:rPr lang="en-GB" sz="1600" dirty="0"/>
+              <a:t>The fingerprint is based on DHCP Options Fingerprint, DHCP Request Fingerprint, DHCP Vendor Class and DHCP Device Class. This is not unique per device it is based on OS-level patterns, Device-type templates, Vendor DHCP profiles</a:t>
+            </a:r>
+          </a:p>
+          <a:p>
+            <a:endParaRPr lang="en-GB" sz="1600" dirty="0"/>
+          </a:p>
+          <a:p>
+            <a:r>
+              <a:rPr lang="en-GB" sz="1600" dirty="0"/>
+              <a:t>88,195 devices share common DHCP behaviour patterns.</a:t>
+            </a:r>
+          </a:p>
+          <a:p>
+            <a:endParaRPr lang="en-GB" sz="1600" b="1" dirty="0"/>
           </a:p>
           <a:p>
             <a:pPr lvl="1"/>
@@ -41307,80 +41365,14 @@
             <a:endParaRPr lang="en-GB" sz="1600" b="1" dirty="0"/>
           </a:p>
           <a:p>
-            <a:r>
-              <a:rPr lang="en-GB" sz="1600" b="1" dirty="0"/>
-              <a:t>Missing Value Detection</a:t>
-            </a:r>
-          </a:p>
-          <a:p>
             <a:endParaRPr lang="en-GB" sz="1600" b="1" dirty="0"/>
           </a:p>
         </p:txBody>
       </p:sp>
-      <p:pic>
-        <p:nvPicPr>
-          <p:cNvPr id="7" name="Picture 6">
-            <a:extLst>
-              <a:ext uri="{FF2B5EF4-FFF2-40B4-BE49-F238E27FC236}">
-                <a16:creationId xmlns:a16="http://schemas.microsoft.com/office/drawing/2014/main" id="{67E4AF89-3F70-7C63-4F03-990E6D6172A2}"/>
-              </a:ext>
-            </a:extLst>
-          </p:cNvPr>
-          <p:cNvPicPr>
-            <a:picLocks noChangeAspect="1"/>
-          </p:cNvPicPr>
-          <p:nvPr/>
-        </p:nvPicPr>
-        <p:blipFill>
-          <a:blip r:embed="rId2"/>
-          <a:stretch>
-            <a:fillRect/>
-          </a:stretch>
-        </p:blipFill>
-        <p:spPr>
-          <a:xfrm>
-            <a:off x="1584337" y="3963560"/>
-            <a:ext cx="4511663" cy="998084"/>
-          </a:xfrm>
-          <a:prstGeom prst="rect">
-            <a:avLst/>
-          </a:prstGeom>
-        </p:spPr>
-      </p:pic>
-      <p:pic>
-        <p:nvPicPr>
-          <p:cNvPr id="15" name="Picture 14">
-            <a:extLst>
-              <a:ext uri="{FF2B5EF4-FFF2-40B4-BE49-F238E27FC236}">
-                <a16:creationId xmlns:a16="http://schemas.microsoft.com/office/drawing/2014/main" id="{A660E852-B0ED-3A28-404C-F222E2A128A9}"/>
-              </a:ext>
-            </a:extLst>
-          </p:cNvPr>
-          <p:cNvPicPr>
-            <a:picLocks noChangeAspect="1"/>
-          </p:cNvPicPr>
-          <p:nvPr/>
-        </p:nvPicPr>
-        <p:blipFill>
-          <a:blip r:embed="rId3"/>
-          <a:stretch>
-            <a:fillRect/>
-          </a:stretch>
-        </p:blipFill>
-        <p:spPr>
-          <a:xfrm>
-            <a:off x="1672051" y="5404434"/>
-            <a:ext cx="2085821" cy="1385736"/>
-          </a:xfrm>
-          <a:prstGeom prst="rect">
-            <a:avLst/>
-          </a:prstGeom>
-        </p:spPr>
-      </p:pic>
     </p:spTree>
     <p:extLst>
       <p:ext uri="{BB962C8B-B14F-4D97-AF65-F5344CB8AC3E}">
-        <p14:creationId xmlns:p14="http://schemas.microsoft.com/office/powerpoint/2010/main" val="2783511346"/>
+        <p14:creationId xmlns:p14="http://schemas.microsoft.com/office/powerpoint/2010/main" val="782172114"/>
       </p:ext>
     </p:extLst>
   </p:cSld>
@@ -41519,14 +41511,20 @@
           <a:lstStyle/>
           <a:p>
             <a:r>
-              <a:rPr lang="en-IN" dirty="0"/>
-              <a:t>Data Quality Assessment - Device Identity &amp; Uniqueness Checks</a:t>
+              <a:rPr lang="en-IN" dirty="0">
+                <a:latin typeface="+mn-lt"/>
+              </a:rPr>
+              <a:t>Data Quality Assessment Device Identity &amp; Uniqueness Checks (cont..)</a:t>
             </a:r>
             <a:br>
-              <a:rPr lang="en-IN" dirty="0"/>
+              <a:rPr lang="en-IN" dirty="0">
+                <a:latin typeface="+mn-lt"/>
+              </a:rPr>
             </a:br>
             <a:r>
-              <a:rPr lang="en-IN" dirty="0"/>
+              <a:rPr lang="en-IN" dirty="0">
+                <a:latin typeface="+mn-lt"/>
+              </a:rPr>
               <a:t> </a:t>
             </a:r>
           </a:p>
@@ -41841,7 +41839,7 @@
     </p:spTree>
     <p:extLst>
       <p:ext uri="{BB962C8B-B14F-4D97-AF65-F5344CB8AC3E}">
-        <p14:creationId xmlns:p14="http://schemas.microsoft.com/office/powerpoint/2010/main" val="782172114"/>
+        <p14:creationId xmlns:p14="http://schemas.microsoft.com/office/powerpoint/2010/main" val="3009073778"/>
       </p:ext>
     </p:extLst>
   </p:cSld>
@@ -41977,7 +41975,9 @@
           <a:lstStyle/>
           <a:p>
             <a:r>
-              <a:rPr lang="en-IN" dirty="0"/>
+              <a:rPr lang="en-IN" sz="3200" dirty="0">
+                <a:latin typeface="+mn-lt"/>
+              </a:rPr>
               <a:t>Dataset</a:t>
             </a:r>
           </a:p>
@@ -42166,7 +42166,7 @@
             <p:ph idx="1"/>
             <p:extLst>
               <p:ext uri="{D42A27DB-BD31-4B8C-83A1-F6EECF244321}">
-                <p14:modId xmlns:p14="http://schemas.microsoft.com/office/powerpoint/2010/main" val="1410553056"/>
+                <p14:modId xmlns:p14="http://schemas.microsoft.com/office/powerpoint/2010/main" val="206452045"/>
               </p:ext>
             </p:extLst>
           </p:nvPr>
@@ -42323,14 +42323,20 @@
           <a:lstStyle/>
           <a:p>
             <a:r>
-              <a:rPr lang="en-IN" dirty="0"/>
-              <a:t>Data Quality Assessment Device Identity &amp; Uniqueness Checks (cont..)</a:t>
+              <a:rPr lang="en-IN" dirty="0">
+                <a:latin typeface="+mn-lt"/>
+              </a:rPr>
+              <a:t>Data Quality Assessment- DHCP Fingerprint Analysis</a:t>
             </a:r>
             <a:br>
-              <a:rPr lang="en-IN" dirty="0"/>
+              <a:rPr lang="en-IN" dirty="0">
+                <a:latin typeface="+mn-lt"/>
+              </a:rPr>
             </a:br>
             <a:r>
-              <a:rPr lang="en-IN" dirty="0"/>
+              <a:rPr lang="en-IN" dirty="0">
+                <a:latin typeface="+mn-lt"/>
+              </a:rPr>
               <a:t> </a:t>
             </a:r>
           </a:p>
@@ -42526,7 +42532,7 @@
           <a:p>
             <a:r>
               <a:rPr lang="en-GB" sz="1600" b="1" dirty="0"/>
-              <a:t>Same MAC with conflicting identity</a:t>
+              <a:t>Top Fingerprint Clusters (DHCP Options Fingerprint, DHCP Request Fingerprint, DHCP Vendor Class, DHCP Device Class)</a:t>
             </a:r>
           </a:p>
           <a:p>
@@ -42535,98 +42541,72 @@
           <a:p>
             <a:r>
               <a:rPr lang="en-GB" sz="1600" dirty="0"/>
-              <a:t>The system groups records by MAC Address and checks variability in:</a:t>
+              <a:t>Devices were </a:t>
             </a:r>
-          </a:p>
-          <a:p>
-            <a:pPr lvl="1">
-              <a:buFont typeface="Arial" panose="020B0604020202020204" pitchFamily="34" charset="0"/>
-              <a:buChar char="•"/>
+            <a:r>
+              <a:rPr lang="en-GB" sz="1600" dirty="0" err="1"/>
+              <a:t>analyzed</a:t>
+            </a:r>
+            <a:r>
+              <a:rPr lang="en-GB" sz="1600" dirty="0"/>
+              <a:t> using DHCP-based fingerprints to identify patterns, detect anomalies, and assess data completeness.</a:t>
+            </a:r>
+            <a:endParaRPr lang="en-GB" sz="1600" b="1" dirty="0"/>
+          </a:p>
+          <a:p>
+            <a:endParaRPr lang="en-GB" sz="1600" b="1" dirty="0"/>
+          </a:p>
+          <a:p>
+            <a:endParaRPr lang="en-GB" sz="1600" b="1" dirty="0"/>
+          </a:p>
+          <a:p>
+            <a:pPr lvl="1"/>
+            <a:endParaRPr lang="en-GB" sz="1600" dirty="0"/>
+          </a:p>
+          <a:p>
+            <a:endParaRPr lang="en-GB" sz="1600" b="1" dirty="0"/>
+          </a:p>
+          <a:p>
+            <a:r>
+              <a:rPr lang="en-GB" sz="1600" dirty="0"/>
+              <a:t>There are 26030 records where the fingerprints are completely missing.</a:t>
+            </a:r>
+          </a:p>
+          <a:p>
+            <a:endParaRPr lang="en-GB" sz="1600" b="1" dirty="0"/>
+          </a:p>
+          <a:p>
+            <a:endParaRPr lang="en-GB" sz="1600" b="1" dirty="0"/>
+          </a:p>
+          <a:p>
+            <a:r>
+              <a:rPr lang="en-GB" sz="1600" b="1" dirty="0"/>
+              <a:t>DHCP Request Fingerprint Inconsistency</a:t>
+            </a:r>
+          </a:p>
+          <a:p>
+            <a:endParaRPr lang="en-GB" sz="1600" dirty="0"/>
+          </a:p>
+          <a:p>
+            <a:pPr marL="285750" indent="-285750">
+              <a:buFontTx/>
+              <a:buChar char="-"/>
             </a:pPr>
             <a:r>
               <a:rPr lang="en-GB" sz="1600" dirty="0"/>
-              <a:t> Operating System (OS) </a:t>
+              <a:t>Same device (MAC) should have </a:t>
             </a:r>
-          </a:p>
-          <a:p>
-            <a:pPr lvl="1">
-              <a:buFont typeface="Arial" panose="020B0604020202020204" pitchFamily="34" charset="0"/>
-              <a:buChar char="•"/>
-            </a:pPr>
+            <a:r>
+              <a:rPr lang="en-GB" sz="1600" b="1" dirty="0"/>
+              <a:t>consistent DHCP Request Fingerprint. </a:t>
+            </a:r>
             <a:r>
               <a:rPr lang="en-GB" sz="1600" dirty="0"/>
-              <a:t> Vendor and Model </a:t>
+              <a:t>There are only 2 records with inconsistency.</a:t>
             </a:r>
           </a:p>
           <a:p>
-            <a:pPr lvl="1">
-              <a:buFont typeface="Arial" panose="020B0604020202020204" pitchFamily="34" charset="0"/>
-              <a:buChar char="•"/>
-            </a:pPr>
-            <a:r>
-              <a:rPr lang="en-GB" sz="1600" dirty="0"/>
-              <a:t> Device Function </a:t>
-            </a:r>
-          </a:p>
-          <a:p>
-            <a:pPr lvl="1">
-              <a:buFont typeface="Arial" panose="020B0604020202020204" pitchFamily="34" charset="0"/>
-              <a:buChar char="•"/>
-            </a:pPr>
-            <a:r>
-              <a:rPr lang="en-GB" sz="1600" dirty="0"/>
-              <a:t> Category </a:t>
-            </a:r>
-          </a:p>
-          <a:p>
-            <a:r>
-              <a:rPr lang="en-GB" sz="1600" dirty="0"/>
-              <a:t>If more than one unique value exists in any attribute, it is flagged as a conflict.</a:t>
-            </a:r>
-            <a:br>
-              <a:rPr lang="en-GB" sz="1600" dirty="0"/>
-            </a:br>
-            <a:r>
-              <a:rPr lang="en-GB" sz="1600" dirty="0"/>
-              <a:t>There are only 4 assets where Identity conflict detected.</a:t>
-            </a:r>
-          </a:p>
-          <a:p>
             <a:endParaRPr lang="en-GB" sz="1600" dirty="0"/>
-          </a:p>
-          <a:p>
-            <a:r>
-              <a:rPr lang="en-GB" sz="1600" b="1" dirty="0"/>
-              <a:t>Duplicate Fingerprint Analysis</a:t>
-            </a:r>
-          </a:p>
-          <a:p>
-            <a:endParaRPr lang="en-GB" sz="1600" dirty="0"/>
-          </a:p>
-          <a:p>
-            <a:r>
-              <a:rPr lang="en-GB" sz="1600" dirty="0"/>
-              <a:t>The fingerprint is based on DHCP Options Fingerprint, DHCP Request Fingerprint, DHCP Vendor Class and DHCP Device Class. This is not unique per device it is based on OS-level patterns, Device-type templates, Vendor DHCP profiles</a:t>
-            </a:r>
-          </a:p>
-          <a:p>
-            <a:endParaRPr lang="en-GB" sz="1600" dirty="0"/>
-          </a:p>
-          <a:p>
-            <a:r>
-              <a:rPr lang="en-GB" sz="1600" dirty="0"/>
-              <a:t>88,195 devices share common DHCP behaviour patterns.</a:t>
-            </a:r>
-          </a:p>
-          <a:p>
-            <a:endParaRPr lang="en-GB" sz="1600" b="1" dirty="0"/>
-          </a:p>
-          <a:p>
-            <a:pPr lvl="1"/>
-            <a:endParaRPr lang="en-GB" sz="1600" dirty="0"/>
-          </a:p>
-          <a:p>
-            <a:endParaRPr lang="en-GB" sz="1600" b="1" dirty="0"/>
           </a:p>
           <a:p>
             <a:endParaRPr lang="en-GB" sz="1600" b="1" dirty="0"/>
@@ -42642,10 +42622,40 @@
           </a:p>
         </p:txBody>
       </p:sp>
+      <p:pic>
+        <p:nvPicPr>
+          <p:cNvPr id="5" name="Picture 4">
+            <a:extLst>
+              <a:ext uri="{FF2B5EF4-FFF2-40B4-BE49-F238E27FC236}">
+                <a16:creationId xmlns:a16="http://schemas.microsoft.com/office/drawing/2014/main" id="{B4273609-8069-7BA2-AD57-A06D4FDAD4B2}"/>
+              </a:ext>
+            </a:extLst>
+          </p:cNvPr>
+          <p:cNvPicPr>
+            <a:picLocks noChangeAspect="1"/>
+          </p:cNvPicPr>
+          <p:nvPr/>
+        </p:nvPicPr>
+        <p:blipFill>
+          <a:blip r:embed="rId2"/>
+          <a:stretch>
+            <a:fillRect/>
+          </a:stretch>
+        </p:blipFill>
+        <p:spPr>
+          <a:xfrm>
+            <a:off x="1675036" y="3359076"/>
+            <a:ext cx="4788783" cy="681616"/>
+          </a:xfrm>
+          <a:prstGeom prst="rect">
+            <a:avLst/>
+          </a:prstGeom>
+        </p:spPr>
+      </p:pic>
     </p:spTree>
     <p:extLst>
       <p:ext uri="{BB962C8B-B14F-4D97-AF65-F5344CB8AC3E}">
-        <p14:creationId xmlns:p14="http://schemas.microsoft.com/office/powerpoint/2010/main" val="3009073778"/>
+        <p14:creationId xmlns:p14="http://schemas.microsoft.com/office/powerpoint/2010/main" val="2206686529"/>
       </p:ext>
     </p:extLst>
   </p:cSld>
@@ -42784,14 +42794,20 @@
           <a:lstStyle/>
           <a:p>
             <a:r>
-              <a:rPr lang="en-IN" dirty="0"/>
-              <a:t>Data Quality Assessment- DHCP Fingerprint Analysis</a:t>
+              <a:rPr lang="en-IN" dirty="0">
+                <a:latin typeface="+mn-lt"/>
+              </a:rPr>
+              <a:t>Data Quality Assessment- DHCP Fingerprint Analysis ( cont..)</a:t>
             </a:r>
             <a:br>
-              <a:rPr lang="en-IN" dirty="0"/>
+              <a:rPr lang="en-IN" dirty="0">
+                <a:latin typeface="+mn-lt"/>
+              </a:rPr>
             </a:br>
             <a:r>
-              <a:rPr lang="en-IN" dirty="0"/>
+              <a:rPr lang="en-IN" dirty="0">
+                <a:latin typeface="+mn-lt"/>
+              </a:rPr>
               <a:t> </a:t>
             </a:r>
           </a:p>
@@ -42987,87 +43003,84 @@
           <a:p>
             <a:r>
               <a:rPr lang="en-GB" sz="1600" b="1" dirty="0"/>
-              <a:t>Top Fingerprint Clusters (DHCP Options Fingerprint, DHCP Request Fingerprint, DHCP Vendor Class, DHCP Device Class)</a:t>
+              <a:t>DHCP Vendor Class vs Device Class Mismatch</a:t>
             </a:r>
           </a:p>
           <a:p>
-            <a:endParaRPr lang="en-GB" sz="1600" b="1" dirty="0"/>
+            <a:endParaRPr lang="en-GB" sz="1600" dirty="0"/>
           </a:p>
           <a:p>
             <a:r>
               <a:rPr lang="en-GB" sz="1600" dirty="0"/>
-              <a:t>Devices were </a:t>
+              <a:t>Vendor Class and Device Class should be </a:t>
             </a:r>
             <a:r>
-              <a:rPr lang="en-GB" sz="1600" dirty="0" err="1"/>
-              <a:t>analyzed</a:t>
+              <a:rPr lang="en-GB" sz="1600" b="1" dirty="0"/>
+              <a:t>aligned.</a:t>
             </a:r>
+          </a:p>
+          <a:p>
             <a:r>
               <a:rPr lang="en-GB" sz="1600" dirty="0"/>
-              <a:t> using DHCP-based fingerprints to identify patterns, detect anomalies, and assess data completeness.</a:t>
+              <a:t>Example:</a:t>
             </a:r>
-            <a:endParaRPr lang="en-GB" sz="1600" b="1" dirty="0"/>
-          </a:p>
-          <a:p>
-            <a:endParaRPr lang="en-GB" sz="1600" b="1" dirty="0"/>
-          </a:p>
-          <a:p>
-            <a:endParaRPr lang="en-GB" sz="1600" b="1" dirty="0"/>
-          </a:p>
-          <a:p>
-            <a:pPr lvl="1"/>
-            <a:endParaRPr lang="en-GB" sz="1600" dirty="0"/>
-          </a:p>
-          <a:p>
-            <a:endParaRPr lang="en-GB" sz="1600" b="1" dirty="0"/>
-          </a:p>
-          <a:p>
-            <a:r>
-              <a:rPr lang="en-GB" sz="1600" dirty="0"/>
-              <a:t>There are 26030 records where the fingerprints are completely missing.</a:t>
-            </a:r>
-          </a:p>
-          <a:p>
-            <a:endParaRPr lang="en-GB" sz="1600" b="1" dirty="0"/>
-          </a:p>
-          <a:p>
-            <a:endParaRPr lang="en-GB" sz="1600" b="1" dirty="0"/>
-          </a:p>
-          <a:p>
-            <a:r>
-              <a:rPr lang="en-GB" sz="1600" b="1" dirty="0"/>
-              <a:t>DHCP Request Fingerprint Inconsistency</a:t>
-            </a:r>
-          </a:p>
-          <a:p>
-            <a:endParaRPr lang="en-GB" sz="1600" dirty="0"/>
-          </a:p>
-          <a:p>
-            <a:pPr marL="285750" indent="-285750">
-              <a:buFontTx/>
-              <a:buChar char="-"/>
+          </a:p>
+          <a:p>
+            <a:pPr lvl="1">
+              <a:buFont typeface="Arial" panose="020B0604020202020204" pitchFamily="34" charset="0"/>
+              <a:buChar char="•"/>
             </a:pPr>
             <a:r>
               <a:rPr lang="en-GB" sz="1600" dirty="0"/>
-              <a:t>Same device (MAC) should have </a:t>
+              <a:t> Cisco → Cisco / IP Phone / AP </a:t>
             </a:r>
+          </a:p>
+          <a:p>
+            <a:pPr lvl="1">
+              <a:buFont typeface="Arial" panose="020B0604020202020204" pitchFamily="34" charset="0"/>
+              <a:buChar char="•"/>
+            </a:pPr>
+            <a:r>
+              <a:rPr lang="en-GB" sz="1600" dirty="0"/>
+              <a:t> Android → mobile / handset </a:t>
+            </a:r>
+          </a:p>
+          <a:p>
+            <a:pPr lvl="1">
+              <a:buFont typeface="Arial" panose="020B0604020202020204" pitchFamily="34" charset="0"/>
+              <a:buChar char="•"/>
+            </a:pPr>
+            <a:r>
+              <a:rPr lang="en-GB" sz="1600" dirty="0"/>
+              <a:t> Printer → HP / Lexmark etc.</a:t>
+            </a:r>
+          </a:p>
+          <a:p>
+            <a:endParaRPr lang="en-GB" sz="1600" b="1" dirty="0"/>
+          </a:p>
+          <a:p>
+            <a:endParaRPr lang="en-GB" sz="1600" b="1" dirty="0"/>
+          </a:p>
+          <a:p>
+            <a:endParaRPr lang="en-GB" sz="1600" b="1" dirty="0"/>
+          </a:p>
+          <a:p>
+            <a:endParaRPr lang="en-GB" sz="1600" b="1" dirty="0"/>
+          </a:p>
+          <a:p>
+            <a:endParaRPr lang="en-GB" sz="1600" b="1" dirty="0"/>
+          </a:p>
+          <a:p>
             <a:r>
               <a:rPr lang="en-GB" sz="1600" b="1" dirty="0"/>
-              <a:t>consistent DHCP Request Fingerprint. </a:t>
+              <a:t>Temporal Fingerprint Changes</a:t>
             </a:r>
+          </a:p>
+          <a:p>
             <a:r>
               <a:rPr lang="en-GB" sz="1600" dirty="0"/>
-              <a:t>There are only 2 records with inconsistency.</a:t>
+              <a:t>Same MAC should not frequently change fingerprints over time. We detect Frequent changes → device swap / spoofing / data issue . But this for only 4 assets only.</a:t>
             </a:r>
-          </a:p>
-          <a:p>
-            <a:endParaRPr lang="en-GB" sz="1600" dirty="0"/>
-          </a:p>
-          <a:p>
-            <a:endParaRPr lang="en-GB" sz="1600" b="1" dirty="0"/>
-          </a:p>
-          <a:p>
-            <a:endParaRPr lang="en-GB" sz="1600" b="1" dirty="0"/>
           </a:p>
           <a:p>
             <a:endParaRPr lang="en-GB" sz="1600" b="1" dirty="0"/>
@@ -43079,10 +43092,10 @@
       </p:sp>
       <p:pic>
         <p:nvPicPr>
-          <p:cNvPr id="5" name="Picture 4">
+          <p:cNvPr id="7" name="Picture 6">
             <a:extLst>
               <a:ext uri="{FF2B5EF4-FFF2-40B4-BE49-F238E27FC236}">
-                <a16:creationId xmlns:a16="http://schemas.microsoft.com/office/drawing/2014/main" id="{B4273609-8069-7BA2-AD57-A06D4FDAD4B2}"/>
+                <a16:creationId xmlns:a16="http://schemas.microsoft.com/office/drawing/2014/main" id="{16A60DE9-DEB3-6081-6B9C-4CDFDF9BA33E}"/>
               </a:ext>
             </a:extLst>
           </p:cNvPr>
@@ -43099,8 +43112,38 @@
         </p:blipFill>
         <p:spPr>
           <a:xfrm>
-            <a:off x="1675036" y="3359076"/>
-            <a:ext cx="4788783" cy="681616"/>
+            <a:off x="1676025" y="3678052"/>
+            <a:ext cx="5753903" cy="1114581"/>
+          </a:xfrm>
+          <a:prstGeom prst="rect">
+            <a:avLst/>
+          </a:prstGeom>
+        </p:spPr>
+      </p:pic>
+      <p:pic>
+        <p:nvPicPr>
+          <p:cNvPr id="8" name="Picture 7">
+            <a:extLst>
+              <a:ext uri="{FF2B5EF4-FFF2-40B4-BE49-F238E27FC236}">
+                <a16:creationId xmlns:a16="http://schemas.microsoft.com/office/drawing/2014/main" id="{202A0B32-36EA-F697-BEF4-A721930A6D74}"/>
+              </a:ext>
+            </a:extLst>
+          </p:cNvPr>
+          <p:cNvPicPr>
+            <a:picLocks noChangeAspect="1"/>
+          </p:cNvPicPr>
+          <p:nvPr/>
+        </p:nvPicPr>
+        <p:blipFill>
+          <a:blip r:embed="rId3"/>
+          <a:stretch>
+            <a:fillRect/>
+          </a:stretch>
+        </p:blipFill>
+        <p:spPr>
+          <a:xfrm>
+            <a:off x="1676025" y="5857539"/>
+            <a:ext cx="6068943" cy="871141"/>
           </a:xfrm>
           <a:prstGeom prst="rect">
             <a:avLst/>
@@ -43110,7 +43153,7 @@
     </p:spTree>
     <p:extLst>
       <p:ext uri="{BB962C8B-B14F-4D97-AF65-F5344CB8AC3E}">
-        <p14:creationId xmlns:p14="http://schemas.microsoft.com/office/powerpoint/2010/main" val="2206686529"/>
+        <p14:creationId xmlns:p14="http://schemas.microsoft.com/office/powerpoint/2010/main" val="3183352521"/>
       </p:ext>
     </p:extLst>
   </p:cSld>
@@ -43244,13 +43287,15 @@
         </p:spPr>
         <p:txBody>
           <a:bodyPr>
-            <a:normAutofit fontScale="90000"/>
+            <a:normAutofit/>
           </a:bodyPr>
           <a:lstStyle/>
           <a:p>
             <a:r>
-              <a:rPr lang="en-IN" dirty="0"/>
-              <a:t>Data Quality Assessment- DHCP Fingerprint Analysis ( cont..)</a:t>
+              <a:rPr lang="en-IN" sz="3200" dirty="0">
+                <a:latin typeface="+mn-lt"/>
+              </a:rPr>
+              <a:t>Data Quality Assessment- Summary</a:t>
             </a:r>
             <a:br>
               <a:rPr lang="en-IN" dirty="0"/>
@@ -43452,84 +43497,38 @@
           <a:p>
             <a:r>
               <a:rPr lang="en-GB" sz="1600" b="1" dirty="0"/>
-              <a:t>DHCP Vendor Class vs Device Class Mismatch</a:t>
+              <a:t>Top 10 Assets with most errors                                                     Error Distribution</a:t>
             </a:r>
           </a:p>
           <a:p>
+            <a:endParaRPr lang="en-GB" sz="1600" b="1" dirty="0"/>
+          </a:p>
+          <a:p>
+            <a:endParaRPr lang="en-GB" sz="1600" b="1" dirty="0"/>
+          </a:p>
+          <a:p>
             <a:endParaRPr lang="en-GB" sz="1600" dirty="0"/>
           </a:p>
           <a:p>
-            <a:r>
-              <a:rPr lang="en-GB" sz="1600" dirty="0"/>
-              <a:t>Vendor Class and Device Class should be </a:t>
-            </a:r>
-            <a:r>
-              <a:rPr lang="en-GB" sz="1600" b="1" dirty="0"/>
-              <a:t>aligned.</a:t>
-            </a:r>
-          </a:p>
-          <a:p>
-            <a:r>
-              <a:rPr lang="en-GB" sz="1600" dirty="0"/>
-              <a:t>Example:</a:t>
-            </a:r>
-          </a:p>
-          <a:p>
-            <a:pPr lvl="1">
-              <a:buFont typeface="Arial" panose="020B0604020202020204" pitchFamily="34" charset="0"/>
-              <a:buChar char="•"/>
-            </a:pPr>
-            <a:r>
-              <a:rPr lang="en-GB" sz="1600" dirty="0"/>
-              <a:t> Cisco → Cisco / IP Phone / AP </a:t>
-            </a:r>
-          </a:p>
-          <a:p>
-            <a:pPr lvl="1">
-              <a:buFont typeface="Arial" panose="020B0604020202020204" pitchFamily="34" charset="0"/>
-              <a:buChar char="•"/>
-            </a:pPr>
-            <a:r>
-              <a:rPr lang="en-GB" sz="1600" dirty="0"/>
-              <a:t> Android → mobile / handset </a:t>
-            </a:r>
-          </a:p>
-          <a:p>
-            <a:pPr lvl="1">
-              <a:buFont typeface="Arial" panose="020B0604020202020204" pitchFamily="34" charset="0"/>
-              <a:buChar char="•"/>
-            </a:pPr>
-            <a:r>
-              <a:rPr lang="en-GB" sz="1600" dirty="0"/>
-              <a:t> Printer → HP / Lexmark etc.</a:t>
-            </a:r>
+            <a:endParaRPr lang="en-GB" sz="1600" dirty="0"/>
+          </a:p>
+          <a:p>
+            <a:endParaRPr lang="en-GB" sz="1600" dirty="0"/>
+          </a:p>
+          <a:p>
+            <a:endParaRPr lang="en-GB" sz="1600" dirty="0"/>
+          </a:p>
+          <a:p>
+            <a:endParaRPr lang="en-GB" sz="1600" dirty="0"/>
+          </a:p>
+          <a:p>
+            <a:endParaRPr lang="en-GB" sz="1600" dirty="0"/>
+          </a:p>
+          <a:p>
+            <a:endParaRPr lang="en-GB" sz="1600" dirty="0"/>
           </a:p>
           <a:p>
             <a:endParaRPr lang="en-GB" sz="1600" b="1" dirty="0"/>
-          </a:p>
-          <a:p>
-            <a:endParaRPr lang="en-GB" sz="1600" b="1" dirty="0"/>
-          </a:p>
-          <a:p>
-            <a:endParaRPr lang="en-GB" sz="1600" b="1" dirty="0"/>
-          </a:p>
-          <a:p>
-            <a:endParaRPr lang="en-GB" sz="1600" b="1" dirty="0"/>
-          </a:p>
-          <a:p>
-            <a:endParaRPr lang="en-GB" sz="1600" b="1" dirty="0"/>
-          </a:p>
-          <a:p>
-            <a:r>
-              <a:rPr lang="en-GB" sz="1600" b="1" dirty="0"/>
-              <a:t>Temporal Fingerprint Changes</a:t>
-            </a:r>
-          </a:p>
-          <a:p>
-            <a:r>
-              <a:rPr lang="en-GB" sz="1600" dirty="0"/>
-              <a:t>Same MAC should not frequently change fingerprints over time. We detect Frequent changes → device swap / spoofing / data issue . But this for only 4 assets only.</a:t>
-            </a:r>
           </a:p>
           <a:p>
             <a:endParaRPr lang="en-GB" sz="1600" b="1" dirty="0"/>
@@ -43541,10 +43540,10 @@
       </p:sp>
       <p:pic>
         <p:nvPicPr>
-          <p:cNvPr id="7" name="Picture 6">
+          <p:cNvPr id="9" name="Picture 8">
             <a:extLst>
               <a:ext uri="{FF2B5EF4-FFF2-40B4-BE49-F238E27FC236}">
-                <a16:creationId xmlns:a16="http://schemas.microsoft.com/office/drawing/2014/main" id="{16A60DE9-DEB3-6081-6B9C-4CDFDF9BA33E}"/>
+                <a16:creationId xmlns:a16="http://schemas.microsoft.com/office/drawing/2014/main" id="{6B529222-493C-1BD9-4A3A-FCE9B4173363}"/>
               </a:ext>
             </a:extLst>
           </p:cNvPr>
@@ -43561,8 +43560,8 @@
         </p:blipFill>
         <p:spPr>
           <a:xfrm>
-            <a:off x="1676025" y="3678052"/>
-            <a:ext cx="5753903" cy="1114581"/>
+            <a:off x="1699105" y="2361139"/>
+            <a:ext cx="2936203" cy="3872751"/>
           </a:xfrm>
           <a:prstGeom prst="rect">
             <a:avLst/>
@@ -43571,10 +43570,10 @@
       </p:pic>
       <p:pic>
         <p:nvPicPr>
-          <p:cNvPr id="8" name="Picture 7">
+          <p:cNvPr id="13" name="Picture 12">
             <a:extLst>
               <a:ext uri="{FF2B5EF4-FFF2-40B4-BE49-F238E27FC236}">
-                <a16:creationId xmlns:a16="http://schemas.microsoft.com/office/drawing/2014/main" id="{202A0B32-36EA-F697-BEF4-A721930A6D74}"/>
+                <a16:creationId xmlns:a16="http://schemas.microsoft.com/office/drawing/2014/main" id="{80D7B60B-F649-B21E-F5DB-45FE4B13B067}"/>
               </a:ext>
             </a:extLst>
           </p:cNvPr>
@@ -43591,8 +43590,8 @@
         </p:blipFill>
         <p:spPr>
           <a:xfrm>
-            <a:off x="1676025" y="5857539"/>
-            <a:ext cx="6068943" cy="871141"/>
+            <a:off x="6983661" y="2361139"/>
+            <a:ext cx="4750039" cy="3543681"/>
           </a:xfrm>
           <a:prstGeom prst="rect">
             <a:avLst/>
@@ -43602,7 +43601,7 @@
     </p:spTree>
     <p:extLst>
       <p:ext uri="{BB962C8B-B14F-4D97-AF65-F5344CB8AC3E}">
-        <p14:creationId xmlns:p14="http://schemas.microsoft.com/office/powerpoint/2010/main" val="3183352521"/>
+        <p14:creationId xmlns:p14="http://schemas.microsoft.com/office/powerpoint/2010/main" val="2792878232"/>
       </p:ext>
     </p:extLst>
   </p:cSld>
@@ -43741,14 +43740,20 @@
           <a:lstStyle/>
           <a:p>
             <a:r>
-              <a:rPr lang="en-IN" dirty="0"/>
+              <a:rPr lang="en-IN" sz="3200" dirty="0">
+                <a:latin typeface="+mn-lt"/>
+              </a:rPr>
               <a:t>Data Quality Assessment- Summary</a:t>
             </a:r>
             <a:br>
-              <a:rPr lang="en-IN" dirty="0"/>
+              <a:rPr lang="en-IN" sz="3200" dirty="0">
+                <a:latin typeface="+mn-lt"/>
+              </a:rPr>
             </a:br>
             <a:r>
-              <a:rPr lang="en-IN" dirty="0"/>
+              <a:rPr lang="en-IN" sz="3200" dirty="0">
+                <a:latin typeface="+mn-lt"/>
+              </a:rPr>
               <a:t> </a:t>
             </a:r>
           </a:p>
@@ -43944,13 +43949,45 @@
           <a:p>
             <a:r>
               <a:rPr lang="en-GB" sz="1600" b="1" dirty="0"/>
-              <a:t>Top 10 Assets with most errors                                                     Error Distribution</a:t>
+              <a:t>Error Summary                                                                          Data Quality Score</a:t>
             </a:r>
           </a:p>
           <a:p>
+            <a:r>
+              <a:rPr lang="en-GB" sz="1600" b="1" dirty="0"/>
+              <a:t>                                                                                                     </a:t>
+            </a:r>
+          </a:p>
+          <a:p>
+            <a:r>
+              <a:rPr lang="en-GB" sz="1600" b="1" dirty="0"/>
+              <a:t>                                                                                                    The </a:t>
+            </a:r>
+            <a:r>
+              <a:rPr lang="en-GB" sz="1600" b="1" dirty="0" err="1"/>
+              <a:t>Avg</a:t>
+            </a:r>
+            <a:r>
+              <a:rPr lang="en-GB" sz="1600" b="1" dirty="0"/>
+              <a:t> Data Quality Score is 78.6 %</a:t>
+            </a:r>
+          </a:p>
+          <a:p>
             <a:endParaRPr lang="en-GB" sz="1600" b="1" dirty="0"/>
           </a:p>
           <a:p>
+            <a:r>
+              <a:rPr lang="en-GB" sz="1600" b="1" dirty="0"/>
+              <a:t>                                                                                                     Descriptive statistics </a:t>
+            </a:r>
+          </a:p>
+          <a:p>
+            <a:r>
+              <a:rPr lang="en-GB" sz="1600" b="1" dirty="0"/>
+              <a:t>                                                                                                      </a:t>
+            </a:r>
+          </a:p>
+          <a:p>
             <a:endParaRPr lang="en-GB" sz="1600" b="1" dirty="0"/>
           </a:p>
           <a:p>
@@ -43969,10 +44006,22 @@
             <a:endParaRPr lang="en-GB" sz="1600" dirty="0"/>
           </a:p>
           <a:p>
-            <a:endParaRPr lang="en-GB" sz="1600" dirty="0"/>
-          </a:p>
-          <a:p>
-            <a:endParaRPr lang="en-GB" sz="1600" dirty="0"/>
+            <a:r>
+              <a:rPr lang="en-GB" sz="1600" b="1" dirty="0"/>
+              <a:t>                                                                                                     Data Quality Level</a:t>
+            </a:r>
+          </a:p>
+          <a:p>
+            <a:r>
+              <a:rPr lang="en-GB" sz="1600" dirty="0"/>
+              <a:t>                                                                                                      </a:t>
+            </a:r>
+          </a:p>
+          <a:p>
+            <a:r>
+              <a:rPr lang="en-GB" sz="1600" dirty="0"/>
+              <a:t>                                                                                                      </a:t>
+            </a:r>
           </a:p>
           <a:p>
             <a:endParaRPr lang="en-GB" sz="1600" b="1" dirty="0"/>
@@ -43987,10 +44036,10 @@
       </p:sp>
       <p:pic>
         <p:nvPicPr>
-          <p:cNvPr id="9" name="Picture 8">
+          <p:cNvPr id="5" name="Picture 4">
             <a:extLst>
               <a:ext uri="{FF2B5EF4-FFF2-40B4-BE49-F238E27FC236}">
-                <a16:creationId xmlns:a16="http://schemas.microsoft.com/office/drawing/2014/main" id="{6B529222-493C-1BD9-4A3A-FCE9B4173363}"/>
+                <a16:creationId xmlns:a16="http://schemas.microsoft.com/office/drawing/2014/main" id="{FDF44647-2693-A0BA-5DB5-120E3B188B7F}"/>
               </a:ext>
             </a:extLst>
           </p:cNvPr>
@@ -44007,8 +44056,8 @@
         </p:blipFill>
         <p:spPr>
           <a:xfrm>
-            <a:off x="1699105" y="2361139"/>
-            <a:ext cx="2936203" cy="3872751"/>
+            <a:off x="1672693" y="2395260"/>
+            <a:ext cx="3847836" cy="3838630"/>
           </a:xfrm>
           <a:prstGeom prst="rect">
             <a:avLst/>
@@ -44017,10 +44066,10 @@
       </p:pic>
       <p:pic>
         <p:nvPicPr>
-          <p:cNvPr id="13" name="Picture 12">
+          <p:cNvPr id="7" name="Picture 6">
             <a:extLst>
               <a:ext uri="{FF2B5EF4-FFF2-40B4-BE49-F238E27FC236}">
-                <a16:creationId xmlns:a16="http://schemas.microsoft.com/office/drawing/2014/main" id="{80D7B60B-F649-B21E-F5DB-45FE4B13B067}"/>
+                <a16:creationId xmlns:a16="http://schemas.microsoft.com/office/drawing/2014/main" id="{7F412AF5-75DE-9C8B-C8F1-99ACC0F3D9D8}"/>
               </a:ext>
             </a:extLst>
           </p:cNvPr>
@@ -44037,8 +44086,38 @@
         </p:blipFill>
         <p:spPr>
           <a:xfrm>
-            <a:off x="6983661" y="2361139"/>
-            <a:ext cx="4750039" cy="3543681"/>
+            <a:off x="7489759" y="3286019"/>
+            <a:ext cx="1857634" cy="1457528"/>
+          </a:xfrm>
+          <a:prstGeom prst="rect">
+            <a:avLst/>
+          </a:prstGeom>
+        </p:spPr>
+      </p:pic>
+      <p:pic>
+        <p:nvPicPr>
+          <p:cNvPr id="11" name="Picture 10">
+            <a:extLst>
+              <a:ext uri="{FF2B5EF4-FFF2-40B4-BE49-F238E27FC236}">
+                <a16:creationId xmlns:a16="http://schemas.microsoft.com/office/drawing/2014/main" id="{025EC71E-4983-81A0-8E3A-4F2F7F729E2F}"/>
+              </a:ext>
+            </a:extLst>
+          </p:cNvPr>
+          <p:cNvPicPr>
+            <a:picLocks noChangeAspect="1"/>
+          </p:cNvPicPr>
+          <p:nvPr/>
+        </p:nvPicPr>
+        <p:blipFill>
+          <a:blip r:embed="rId4"/>
+          <a:stretch>
+            <a:fillRect/>
+          </a:stretch>
+        </p:blipFill>
+        <p:spPr>
+          <a:xfrm>
+            <a:off x="7489759" y="5286075"/>
+            <a:ext cx="1619476" cy="752580"/>
           </a:xfrm>
           <a:prstGeom prst="rect">
             <a:avLst/>
@@ -44048,7 +44127,7 @@
     </p:spTree>
     <p:extLst>
       <p:ext uri="{BB962C8B-B14F-4D97-AF65-F5344CB8AC3E}">
-        <p14:creationId xmlns:p14="http://schemas.microsoft.com/office/powerpoint/2010/main" val="2792878232"/>
+        <p14:creationId xmlns:p14="http://schemas.microsoft.com/office/powerpoint/2010/main" val="2729243570"/>
       </p:ext>
     </p:extLst>
   </p:cSld>
@@ -44187,15 +44266,10 @@
           <a:lstStyle/>
           <a:p>
             <a:r>
-              <a:rPr lang="en-IN" dirty="0"/>
-              <a:t>Data Quality Assessment- Summary</a:t>
-            </a:r>
-            <a:br>
-              <a:rPr lang="en-IN" dirty="0"/>
-            </a:br>
-            <a:r>
-              <a:rPr lang="en-IN" dirty="0"/>
-              <a:t> </a:t>
+              <a:rPr lang="en-IN" sz="3200" dirty="0">
+                <a:latin typeface="+mn-lt"/>
+              </a:rPr>
+              <a:t>Dashboard</a:t>
             </a:r>
           </a:p>
         </p:txBody>
@@ -44390,519 +44464,6 @@
           <a:p>
             <a:r>
               <a:rPr lang="en-GB" sz="1600" b="1" dirty="0"/>
-              <a:t>Error Summary                                                                          Data Quality Score</a:t>
-            </a:r>
-          </a:p>
-          <a:p>
-            <a:r>
-              <a:rPr lang="en-GB" sz="1600" b="1" dirty="0"/>
-              <a:t>                                                                                                     </a:t>
-            </a:r>
-          </a:p>
-          <a:p>
-            <a:r>
-              <a:rPr lang="en-GB" sz="1600" b="1" dirty="0"/>
-              <a:t>                                                                                                    The </a:t>
-            </a:r>
-            <a:r>
-              <a:rPr lang="en-GB" sz="1600" b="1" dirty="0" err="1"/>
-              <a:t>Avg</a:t>
-            </a:r>
-            <a:r>
-              <a:rPr lang="en-GB" sz="1600" b="1" dirty="0"/>
-              <a:t> Data Quality Score is 78.6 %</a:t>
-            </a:r>
-          </a:p>
-          <a:p>
-            <a:endParaRPr lang="en-GB" sz="1600" b="1" dirty="0"/>
-          </a:p>
-          <a:p>
-            <a:r>
-              <a:rPr lang="en-GB" sz="1600" b="1" dirty="0"/>
-              <a:t>                                                                                                     Descriptive statistics </a:t>
-            </a:r>
-          </a:p>
-          <a:p>
-            <a:r>
-              <a:rPr lang="en-GB" sz="1600" b="1" dirty="0"/>
-              <a:t>                                                                                                      </a:t>
-            </a:r>
-          </a:p>
-          <a:p>
-            <a:endParaRPr lang="en-GB" sz="1600" b="1" dirty="0"/>
-          </a:p>
-          <a:p>
-            <a:endParaRPr lang="en-GB" sz="1600" dirty="0"/>
-          </a:p>
-          <a:p>
-            <a:endParaRPr lang="en-GB" sz="1600" dirty="0"/>
-          </a:p>
-          <a:p>
-            <a:endParaRPr lang="en-GB" sz="1600" dirty="0"/>
-          </a:p>
-          <a:p>
-            <a:endParaRPr lang="en-GB" sz="1600" dirty="0"/>
-          </a:p>
-          <a:p>
-            <a:endParaRPr lang="en-GB" sz="1600" dirty="0"/>
-          </a:p>
-          <a:p>
-            <a:r>
-              <a:rPr lang="en-GB" sz="1600" b="1" dirty="0"/>
-              <a:t>                                                                                                     Data Quality Level</a:t>
-            </a:r>
-          </a:p>
-          <a:p>
-            <a:r>
-              <a:rPr lang="en-GB" sz="1600" dirty="0"/>
-              <a:t>                                                                                                      </a:t>
-            </a:r>
-          </a:p>
-          <a:p>
-            <a:r>
-              <a:rPr lang="en-GB" sz="1600" dirty="0"/>
-              <a:t>                                                                                                      </a:t>
-            </a:r>
-          </a:p>
-          <a:p>
-            <a:endParaRPr lang="en-GB" sz="1600" b="1" dirty="0"/>
-          </a:p>
-          <a:p>
-            <a:endParaRPr lang="en-GB" sz="1600" b="1" dirty="0"/>
-          </a:p>
-          <a:p>
-            <a:endParaRPr lang="en-GB" sz="1600" b="1" dirty="0"/>
-          </a:p>
-        </p:txBody>
-      </p:sp>
-      <p:pic>
-        <p:nvPicPr>
-          <p:cNvPr id="5" name="Picture 4">
-            <a:extLst>
-              <a:ext uri="{FF2B5EF4-FFF2-40B4-BE49-F238E27FC236}">
-                <a16:creationId xmlns:a16="http://schemas.microsoft.com/office/drawing/2014/main" id="{FDF44647-2693-A0BA-5DB5-120E3B188B7F}"/>
-              </a:ext>
-            </a:extLst>
-          </p:cNvPr>
-          <p:cNvPicPr>
-            <a:picLocks noChangeAspect="1"/>
-          </p:cNvPicPr>
-          <p:nvPr/>
-        </p:nvPicPr>
-        <p:blipFill>
-          <a:blip r:embed="rId2"/>
-          <a:stretch>
-            <a:fillRect/>
-          </a:stretch>
-        </p:blipFill>
-        <p:spPr>
-          <a:xfrm>
-            <a:off x="1672693" y="2395260"/>
-            <a:ext cx="3847836" cy="3838630"/>
-          </a:xfrm>
-          <a:prstGeom prst="rect">
-            <a:avLst/>
-          </a:prstGeom>
-        </p:spPr>
-      </p:pic>
-      <p:pic>
-        <p:nvPicPr>
-          <p:cNvPr id="7" name="Picture 6">
-            <a:extLst>
-              <a:ext uri="{FF2B5EF4-FFF2-40B4-BE49-F238E27FC236}">
-                <a16:creationId xmlns:a16="http://schemas.microsoft.com/office/drawing/2014/main" id="{7F412AF5-75DE-9C8B-C8F1-99ACC0F3D9D8}"/>
-              </a:ext>
-            </a:extLst>
-          </p:cNvPr>
-          <p:cNvPicPr>
-            <a:picLocks noChangeAspect="1"/>
-          </p:cNvPicPr>
-          <p:nvPr/>
-        </p:nvPicPr>
-        <p:blipFill>
-          <a:blip r:embed="rId3"/>
-          <a:stretch>
-            <a:fillRect/>
-          </a:stretch>
-        </p:blipFill>
-        <p:spPr>
-          <a:xfrm>
-            <a:off x="7489759" y="3286019"/>
-            <a:ext cx="1857634" cy="1457528"/>
-          </a:xfrm>
-          <a:prstGeom prst="rect">
-            <a:avLst/>
-          </a:prstGeom>
-        </p:spPr>
-      </p:pic>
-      <p:pic>
-        <p:nvPicPr>
-          <p:cNvPr id="11" name="Picture 10">
-            <a:extLst>
-              <a:ext uri="{FF2B5EF4-FFF2-40B4-BE49-F238E27FC236}">
-                <a16:creationId xmlns:a16="http://schemas.microsoft.com/office/drawing/2014/main" id="{025EC71E-4983-81A0-8E3A-4F2F7F729E2F}"/>
-              </a:ext>
-            </a:extLst>
-          </p:cNvPr>
-          <p:cNvPicPr>
-            <a:picLocks noChangeAspect="1"/>
-          </p:cNvPicPr>
-          <p:nvPr/>
-        </p:nvPicPr>
-        <p:blipFill>
-          <a:blip r:embed="rId4"/>
-          <a:stretch>
-            <a:fillRect/>
-          </a:stretch>
-        </p:blipFill>
-        <p:spPr>
-          <a:xfrm>
-            <a:off x="7489759" y="5286075"/>
-            <a:ext cx="1619476" cy="752580"/>
-          </a:xfrm>
-          <a:prstGeom prst="rect">
-            <a:avLst/>
-          </a:prstGeom>
-        </p:spPr>
-      </p:pic>
-    </p:spTree>
-    <p:extLst>
-      <p:ext uri="{BB962C8B-B14F-4D97-AF65-F5344CB8AC3E}">
-        <p14:creationId xmlns:p14="http://schemas.microsoft.com/office/powerpoint/2010/main" val="2729243570"/>
-      </p:ext>
-    </p:extLst>
-  </p:cSld>
-  <p:clrMapOvr>
-    <a:masterClrMapping/>
-  </p:clrMapOvr>
-</p:sld>
-</file>
-
-<file path=ppt/slides/slide35.xml><?xml version="1.0" encoding="utf-8"?>
-<p:sld xmlns:a="http://schemas.openxmlformats.org/drawingml/2006/main" xmlns:r="http://schemas.openxmlformats.org/officeDocument/2006/relationships" xmlns:p="http://schemas.openxmlformats.org/presentationml/2006/main">
-  <p:cSld>
-    <p:bg>
-      <p:bgPr>
-        <a:gradFill rotWithShape="1">
-          <a:gsLst>
-            <a:gs pos="0">
-              <a:schemeClr val="bg2">
-                <a:tint val="90000"/>
-                <a:satMod val="92000"/>
-                <a:lumMod val="120000"/>
-              </a:schemeClr>
-            </a:gs>
-            <a:gs pos="100000">
-              <a:schemeClr val="bg2">
-                <a:shade val="98000"/>
-                <a:satMod val="120000"/>
-                <a:lumMod val="98000"/>
-              </a:schemeClr>
-            </a:gs>
-          </a:gsLst>
-          <a:path path="circle">
-            <a:fillToRect l="50000" t="50000" r="100000" b="100000"/>
-          </a:path>
-        </a:gradFill>
-        <a:effectLst/>
-      </p:bgPr>
-    </p:bg>
-    <p:spTree>
-      <p:nvGrpSpPr>
-        <p:cNvPr id="1" name=""/>
-        <p:cNvGrpSpPr/>
-        <p:nvPr/>
-      </p:nvGrpSpPr>
-      <p:grpSpPr>
-        <a:xfrm>
-          <a:off x="0" y="0"/>
-          <a:ext cx="0" cy="0"/>
-          <a:chOff x="0" y="0"/>
-          <a:chExt cx="0" cy="0"/>
-        </a:xfrm>
-      </p:grpSpPr>
-      <p:sp>
-        <p:nvSpPr>
-          <p:cNvPr id="10" name="Rectangle 9">
-            <a:extLst>
-              <a:ext uri="{FF2B5EF4-FFF2-40B4-BE49-F238E27FC236}">
-                <a16:creationId xmlns:a16="http://schemas.microsoft.com/office/drawing/2014/main" id="{C2ED0803-0133-49C2-9858-E132FF173AAD}"/>
-              </a:ext>
-              <a:ext uri="{C183D7F6-B498-43B3-948B-1728B52AA6E4}">
-                <adec:decorative xmlns:adec="http://schemas.microsoft.com/office/drawing/2017/decorative" val="1"/>
-              </a:ext>
-            </a:extLst>
-          </p:cNvPr>
-          <p:cNvSpPr>
-            <a:spLocks noGrp="1" noRot="1" noChangeAspect="1" noMove="1" noResize="1" noEditPoints="1" noAdjustHandles="1" noChangeArrowheads="1" noChangeShapeType="1" noTextEdit="1"/>
-          </p:cNvSpPr>
-          <p:nvPr>
-            <p:extLst>
-              <p:ext uri="{386F3935-93C4-4BCD-93E2-E3B085C9AB24}">
-                <p16:designElem xmlns:p16="http://schemas.microsoft.com/office/powerpoint/2015/main" val="1"/>
-              </p:ext>
-            </p:extLst>
-          </p:nvPr>
-        </p:nvSpPr>
-        <p:spPr>
-          <a:xfrm>
-            <a:off x="1" y="0"/>
-            <a:ext cx="12192000" cy="6858000"/>
-          </a:xfrm>
-          <a:prstGeom prst="rect">
-            <a:avLst/>
-          </a:prstGeom>
-          <a:solidFill>
-            <a:schemeClr val="bg2"/>
-          </a:solidFill>
-          <a:ln>
-            <a:noFill/>
-          </a:ln>
-        </p:spPr>
-        <p:style>
-          <a:lnRef idx="2">
-            <a:schemeClr val="accent1">
-              <a:shade val="50000"/>
-            </a:schemeClr>
-          </a:lnRef>
-          <a:fillRef idx="1">
-            <a:schemeClr val="accent1"/>
-          </a:fillRef>
-          <a:effectRef idx="0">
-            <a:schemeClr val="accent1"/>
-          </a:effectRef>
-          <a:fontRef idx="minor">
-            <a:schemeClr val="lt1"/>
-          </a:fontRef>
-        </p:style>
-        <p:txBody>
-          <a:bodyPr rtlCol="0" anchor="ctr"/>
-          <a:lstStyle/>
-          <a:p>
-            <a:pPr algn="ctr"/>
-            <a:endParaRPr lang="en-US" dirty="0"/>
-          </a:p>
-        </p:txBody>
-      </p:sp>
-      <p:sp>
-        <p:nvSpPr>
-          <p:cNvPr id="2" name="Title 1"/>
-          <p:cNvSpPr>
-            <a:spLocks noGrp="1"/>
-          </p:cNvSpPr>
-          <p:nvPr>
-            <p:ph type="title"/>
-          </p:nvPr>
-        </p:nvSpPr>
-        <p:spPr>
-          <a:xfrm>
-            <a:off x="1794897" y="624110"/>
-            <a:ext cx="9712998" cy="1280890"/>
-          </a:xfrm>
-        </p:spPr>
-        <p:txBody>
-          <a:bodyPr>
-            <a:normAutofit/>
-          </a:bodyPr>
-          <a:lstStyle/>
-          <a:p>
-            <a:r>
-              <a:rPr lang="en-IN" dirty="0"/>
-              <a:t>Dashboard</a:t>
-            </a:r>
-          </a:p>
-        </p:txBody>
-      </p:sp>
-      <p:sp>
-        <p:nvSpPr>
-          <p:cNvPr id="12" name="Rectangle 11">
-            <a:extLst>
-              <a:ext uri="{FF2B5EF4-FFF2-40B4-BE49-F238E27FC236}">
-                <a16:creationId xmlns:a16="http://schemas.microsoft.com/office/drawing/2014/main" id="{C379F6D6-AB42-424F-9B81-E57F502B6AA6}"/>
-              </a:ext>
-              <a:ext uri="{C183D7F6-B498-43B3-948B-1728B52AA6E4}">
-                <adec:decorative xmlns:adec="http://schemas.microsoft.com/office/drawing/2017/decorative" val="1"/>
-              </a:ext>
-            </a:extLst>
-          </p:cNvPr>
-          <p:cNvSpPr>
-            <a:spLocks noGrp="1" noRot="1" noChangeAspect="1" noMove="1" noResize="1" noEditPoints="1" noAdjustHandles="1" noChangeArrowheads="1" noChangeShapeType="1" noTextEdit="1"/>
-          </p:cNvSpPr>
-          <p:nvPr>
-            <p:extLst>
-              <p:ext uri="{386F3935-93C4-4BCD-93E2-E3B085C9AB24}">
-                <p16:designElem xmlns:p16="http://schemas.microsoft.com/office/powerpoint/2015/main" val="1"/>
-              </p:ext>
-            </p:extLst>
-          </p:nvPr>
-        </p:nvSpPr>
-        <p:spPr>
-          <a:xfrm>
-            <a:off x="0" y="0"/>
-            <a:ext cx="182880" cy="6858000"/>
-          </a:xfrm>
-          <a:prstGeom prst="rect">
-            <a:avLst/>
-          </a:prstGeom>
-          <a:solidFill>
-            <a:schemeClr val="tx2"/>
-          </a:solidFill>
-          <a:ln>
-            <a:noFill/>
-          </a:ln>
-          <a:effectLst/>
-        </p:spPr>
-        <p:style>
-          <a:lnRef idx="1">
-            <a:schemeClr val="accent1"/>
-          </a:lnRef>
-          <a:fillRef idx="3">
-            <a:schemeClr val="accent1"/>
-          </a:fillRef>
-          <a:effectRef idx="2">
-            <a:schemeClr val="accent1"/>
-          </a:effectRef>
-          <a:fontRef idx="minor">
-            <a:schemeClr val="lt1"/>
-          </a:fontRef>
-        </p:style>
-        <p:txBody>
-          <a:bodyPr/>
-          <a:lstStyle/>
-          <a:p>
-            <a:endParaRPr lang="nl-NL"/>
-          </a:p>
-        </p:txBody>
-      </p:sp>
-      <p:sp>
-        <p:nvSpPr>
-          <p:cNvPr id="14" name="Freeform 11">
-            <a:extLst>
-              <a:ext uri="{FF2B5EF4-FFF2-40B4-BE49-F238E27FC236}">
-                <a16:creationId xmlns:a16="http://schemas.microsoft.com/office/drawing/2014/main" id="{5BAFE5D0-C0A7-4C07-B852-6F0A7CF2ADBB}"/>
-              </a:ext>
-              <a:ext uri="{C183D7F6-B498-43B3-948B-1728B52AA6E4}">
-                <adec:decorative xmlns:adec="http://schemas.microsoft.com/office/drawing/2017/decorative" val="1"/>
-              </a:ext>
-            </a:extLst>
-          </p:cNvPr>
-          <p:cNvSpPr>
-            <a:spLocks noGrp="1" noRot="1" noChangeAspect="1" noMove="1" noResize="1" noEditPoints="1" noAdjustHandles="1" noChangeArrowheads="1" noChangeShapeType="1" noTextEdit="1"/>
-          </p:cNvSpPr>
-          <p:nvPr>
-            <p:extLst>
-              <p:ext uri="{386F3935-93C4-4BCD-93E2-E3B085C9AB24}">
-                <p16:designElem xmlns:p16="http://schemas.microsoft.com/office/powerpoint/2015/main" val="1"/>
-              </p:ext>
-            </p:extLst>
-          </p:nvPr>
-        </p:nvSpPr>
-        <p:spPr bwMode="auto">
-          <a:xfrm flipV="1">
-            <a:off x="-4189" y="714375"/>
-            <a:ext cx="1588527" cy="507297"/>
-          </a:xfrm>
-          <a:custGeom>
-            <a:avLst/>
-            <a:gdLst/>
-            <a:ahLst/>
-            <a:cxnLst/>
-            <a:rect l="l" t="t" r="r" b="b"/>
-            <a:pathLst>
-              <a:path w="9248" h="10000">
-                <a:moveTo>
-                  <a:pt x="9248" y="4701"/>
-                </a:moveTo>
-                <a:lnTo>
-                  <a:pt x="7915" y="188"/>
-                </a:lnTo>
-                <a:cubicBezTo>
-                  <a:pt x="7906" y="156"/>
-                  <a:pt x="7895" y="126"/>
-                  <a:pt x="7886" y="94"/>
-                </a:cubicBezTo>
-                <a:cubicBezTo>
-                  <a:pt x="7859" y="0"/>
-                  <a:pt x="7831" y="0"/>
-                  <a:pt x="7803" y="0"/>
-                </a:cubicBezTo>
-                <a:lnTo>
-                  <a:pt x="7275" y="0"/>
-                </a:lnTo>
-                <a:lnTo>
-                  <a:pt x="0" y="70"/>
-                </a:lnTo>
-                <a:cubicBezTo>
-                  <a:pt x="8" y="3380"/>
-                  <a:pt x="17" y="6690"/>
-                  <a:pt x="25" y="10000"/>
-                </a:cubicBezTo>
-                <a:lnTo>
-                  <a:pt x="7275" y="9966"/>
-                </a:lnTo>
-                <a:lnTo>
-                  <a:pt x="7803" y="9966"/>
-                </a:lnTo>
-                <a:cubicBezTo>
-                  <a:pt x="7831" y="9966"/>
-                  <a:pt x="7859" y="9872"/>
-                  <a:pt x="7886" y="9872"/>
-                </a:cubicBezTo>
-                <a:cubicBezTo>
-                  <a:pt x="7886" y="9778"/>
-                  <a:pt x="7915" y="9778"/>
-                  <a:pt x="7915" y="9778"/>
-                </a:cubicBezTo>
-                <a:lnTo>
-                  <a:pt x="9248" y="5265"/>
-                </a:lnTo>
-                <a:cubicBezTo>
-                  <a:pt x="9303" y="5077"/>
-                  <a:pt x="9303" y="4889"/>
-                  <a:pt x="9248" y="4701"/>
-                </a:cubicBezTo>
-                <a:close/>
-              </a:path>
-            </a:pathLst>
-          </a:custGeom>
-          <a:solidFill>
-            <a:schemeClr val="accent1"/>
-          </a:solidFill>
-          <a:ln>
-            <a:noFill/>
-          </a:ln>
-        </p:spPr>
-        <p:txBody>
-          <a:bodyPr/>
-          <a:lstStyle/>
-          <a:p>
-            <a:endParaRPr lang="nl-NL"/>
-          </a:p>
-        </p:txBody>
-      </p:sp>
-      <p:sp>
-        <p:nvSpPr>
-          <p:cNvPr id="3" name="Content Placeholder 2"/>
-          <p:cNvSpPr>
-            <a:spLocks/>
-          </p:cNvSpPr>
-          <p:nvPr/>
-        </p:nvSpPr>
-        <p:spPr>
-          <a:xfrm>
-            <a:off x="1584337" y="1936047"/>
-            <a:ext cx="9923557" cy="4921953"/>
-          </a:xfrm>
-          <a:prstGeom prst="rect">
-            <a:avLst/>
-          </a:prstGeom>
-        </p:spPr>
-        <p:txBody>
-          <a:bodyPr/>
-          <a:lstStyle/>
-          <a:p>
-            <a:r>
-              <a:rPr lang="en-GB" sz="1600" b="1" dirty="0"/>
               <a:t>                                                                                                      </a:t>
             </a:r>
           </a:p>
@@ -44996,7 +44557,7 @@
 </p:sld>
 </file>
 
-<file path=ppt/slides/slide36.xml><?xml version="1.0" encoding="utf-8"?>
+<file path=ppt/slides/slide35.xml><?xml version="1.0" encoding="utf-8"?>
 <p:sld xmlns:a="http://schemas.openxmlformats.org/drawingml/2006/main" xmlns:r="http://schemas.openxmlformats.org/officeDocument/2006/relationships" xmlns:p="http://schemas.openxmlformats.org/presentationml/2006/main">
   <p:cSld>
     <p:bg>
@@ -45122,7 +44683,9 @@
           <a:lstStyle/>
           <a:p>
             <a:r>
-              <a:rPr lang="en-IN" dirty="0"/>
+              <a:rPr lang="en-IN" sz="3200" dirty="0">
+                <a:latin typeface="+mn-lt"/>
+              </a:rPr>
               <a:t>Technical Improvements</a:t>
             </a:r>
           </a:p>
@@ -45311,7 +44874,7 @@
             <p:ph idx="1"/>
             <p:extLst>
               <p:ext uri="{D42A27DB-BD31-4B8C-83A1-F6EECF244321}">
-                <p14:modId xmlns:p14="http://schemas.microsoft.com/office/powerpoint/2010/main" val="394826706"/>
+                <p14:modId xmlns:p14="http://schemas.microsoft.com/office/powerpoint/2010/main" val="1457443164"/>
               </p:ext>
             </p:extLst>
           </p:nvPr>
@@ -45339,7 +44902,7 @@
 </p:sld>
 </file>
 
-<file path=ppt/slides/slide37.xml><?xml version="1.0" encoding="utf-8"?>
+<file path=ppt/slides/slide36.xml><?xml version="1.0" encoding="utf-8"?>
 <p:sld xmlns:a="http://schemas.openxmlformats.org/drawingml/2006/main" xmlns:r="http://schemas.openxmlformats.org/officeDocument/2006/relationships" xmlns:p="http://schemas.openxmlformats.org/presentationml/2006/main">
   <p:cSld>
     <p:bg>
@@ -45654,7 +45217,7 @@
             <p:ph idx="1"/>
             <p:extLst>
               <p:ext uri="{D42A27DB-BD31-4B8C-83A1-F6EECF244321}">
-                <p14:modId xmlns:p14="http://schemas.microsoft.com/office/powerpoint/2010/main" val="1660855595"/>
+                <p14:modId xmlns:p14="http://schemas.microsoft.com/office/powerpoint/2010/main" val="1087585257"/>
               </p:ext>
             </p:extLst>
           </p:nvPr>
@@ -45682,7 +45245,7 @@
 </p:sld>
 </file>
 
-<file path=ppt/slides/slide38.xml><?xml version="1.0" encoding="utf-8"?>
+<file path=ppt/slides/slide37.xml><?xml version="1.0" encoding="utf-8"?>
 <p:sld xmlns:a="http://schemas.openxmlformats.org/drawingml/2006/main" xmlns:r="http://schemas.openxmlformats.org/officeDocument/2006/relationships" xmlns:p="http://schemas.openxmlformats.org/presentationml/2006/main">
   <p:cSld>
     <p:bg>
@@ -49253,7 +48816,7 @@
           </a:lstStyle>
           <a:p>
             <a:r>
-              <a:rPr lang="en-IN" b="1" dirty="0">
+              <a:rPr lang="en-IN" sz="3200" dirty="0">
                 <a:latin typeface="+mn-lt"/>
               </a:rPr>
               <a:t>Data Dictionary </a:t>
@@ -49297,7 +48860,7 @@
               <a:buChar char="Ø"/>
             </a:pPr>
             <a:r>
-              <a:rPr lang="en-US" dirty="0"/>
+              <a:rPr lang="en-US" sz="1600" dirty="0"/>
               <a:t>id = unique record identifier from raw dataset</a:t>
             </a:r>
           </a:p>
@@ -49310,7 +48873,7 @@
               <a:buChar char="Ø"/>
             </a:pPr>
             <a:r>
-              <a:rPr lang="en-IN" dirty="0"/>
+              <a:rPr lang="en-IN" sz="1600" dirty="0"/>
               <a:t>Asset ID = unique identifier assigned to each network asset</a:t>
             </a:r>
           </a:p>
@@ -49323,7 +48886,7 @@
               <a:buChar char="Ø"/>
             </a:pPr>
             <a:r>
-              <a:rPr lang="en-US" dirty="0"/>
+              <a:rPr lang="en-US" sz="1600" dirty="0"/>
               <a:t>MAC Address = hardware address used to identify devices on the network.</a:t>
             </a:r>
           </a:p>
@@ -49336,7 +48899,7 @@
               <a:buChar char="Ø"/>
             </a:pPr>
             <a:r>
-              <a:rPr lang="en-US" dirty="0"/>
+              <a:rPr lang="en-US" sz="1600" dirty="0"/>
               <a:t>OS = Operating system of the device(e.g. Windows,Android,iOS)</a:t>
             </a:r>
           </a:p>
@@ -49349,7 +48912,7 @@
               <a:buChar char="Ø"/>
             </a:pPr>
             <a:r>
-              <a:rPr lang="en-IN" dirty="0"/>
+              <a:rPr lang="en-IN" sz="1600" dirty="0"/>
               <a:t>Function = Role of the device(e.g.  Workstation, Switch, IP Phone)</a:t>
             </a:r>
           </a:p>
@@ -49362,7 +48925,7 @@
               <a:buChar char="Ø"/>
             </a:pPr>
             <a:r>
-              <a:rPr lang="en-IN" dirty="0"/>
+              <a:rPr lang="en-IN" sz="1600" dirty="0"/>
               <a:t>Vendor and Model = Manufacturer and model information of the device </a:t>
             </a:r>
           </a:p>
@@ -49375,7 +48938,7 @@
               <a:buChar char="Ø"/>
             </a:pPr>
             <a:r>
-              <a:rPr lang="en-IN" dirty="0"/>
+              <a:rPr lang="en-IN" sz="1600" dirty="0"/>
               <a:t>DHCP Options Fingerprints = DHCP options used for device fingerprinting</a:t>
             </a:r>
           </a:p>
@@ -49387,33 +48950,33 @@
               <a:buNone/>
             </a:pPr>
             <a:br>
-              <a:rPr lang="en-US" dirty="0"/>
+              <a:rPr lang="en-US" sz="1600" dirty="0"/>
             </a:br>
             <a:br>
-              <a:rPr lang="en-US" dirty="0"/>
+              <a:rPr lang="en-US" sz="1600" dirty="0"/>
             </a:br>
             <a:br>
-              <a:rPr lang="en-IN" dirty="0"/>
+              <a:rPr lang="en-IN" sz="1600" dirty="0"/>
             </a:br>
             <a:br>
-              <a:rPr lang="en-IN" dirty="0"/>
+              <a:rPr lang="en-IN" sz="1600" dirty="0"/>
             </a:br>
             <a:br>
-              <a:rPr lang="en-IN" dirty="0"/>
+              <a:rPr lang="en-IN" sz="1600" dirty="0"/>
             </a:br>
             <a:br>
-              <a:rPr lang="en-IN" dirty="0"/>
+              <a:rPr lang="en-IN" sz="1600" dirty="0"/>
             </a:br>
             <a:br>
-              <a:rPr lang="en-US" dirty="0"/>
+              <a:rPr lang="en-US" sz="1600" dirty="0"/>
             </a:br>
             <a:br>
-              <a:rPr lang="en-US" dirty="0"/>
+              <a:rPr lang="en-US" sz="1600" dirty="0"/>
             </a:br>
             <a:br>
-              <a:rPr lang="en-IN" dirty="0"/>
+              <a:rPr lang="en-IN" sz="1600" dirty="0"/>
             </a:br>
-            <a:endParaRPr lang="en-IN" dirty="0"/>
+            <a:endParaRPr lang="en-IN" sz="1600" dirty="0"/>
           </a:p>
         </p:txBody>
       </p:sp>
@@ -49671,7 +49234,7 @@
               <a:buChar char="Ø"/>
             </a:pPr>
             <a:r>
-              <a:rPr lang="en-US" dirty="0"/>
+              <a:rPr lang="en-US" sz="1600" dirty="0"/>
               <a:t>DHCP Request Fingerprint = DHCP request pattern used to identify device behavior</a:t>
             </a:r>
           </a:p>
@@ -49684,7 +49247,7 @@
               <a:buChar char="Ø"/>
             </a:pPr>
             <a:r>
-              <a:rPr lang="en-US" dirty="0"/>
+              <a:rPr lang="en-US" sz="1600" dirty="0"/>
               <a:t>DHCP Vendor Class = Vendor specific DHCP classification string</a:t>
             </a:r>
           </a:p>
@@ -49697,7 +49260,7 @@
               <a:buChar char="Ø"/>
             </a:pPr>
             <a:r>
-              <a:rPr lang="en-IN" dirty="0"/>
+              <a:rPr lang="en-IN" sz="1600" dirty="0"/>
               <a:t>DHCP Device Class = Device type classification based on DHCP data</a:t>
             </a:r>
           </a:p>
@@ -49842,7 +49405,7 @@
           <a:lstStyle/>
           <a:p>
             <a:r>
-              <a:rPr lang="en-IN" b="1" dirty="0">
+              <a:rPr lang="en-IN" sz="3200" dirty="0">
                 <a:latin typeface="+mn-lt"/>
               </a:rPr>
               <a:t>Data Exploration</a:t>
@@ -50033,7 +49596,7 @@
             <p:ph idx="1"/>
             <p:extLst>
               <p:ext uri="{D42A27DB-BD31-4B8C-83A1-F6EECF244321}">
-                <p14:modId xmlns:p14="http://schemas.microsoft.com/office/powerpoint/2010/main" val="302480983"/>
+                <p14:modId xmlns:p14="http://schemas.microsoft.com/office/powerpoint/2010/main" val="1531172692"/>
               </p:ext>
             </p:extLst>
           </p:nvPr>
@@ -50187,20 +49750,10 @@
           <a:lstStyle/>
           <a:p>
             <a:r>
-              <a:rPr lang="en-IN" b="1" dirty="0">
+              <a:rPr lang="en-IN" sz="3200" dirty="0">
                 <a:latin typeface="+mn-lt"/>
               </a:rPr>
-              <a:t>Data Exploration</a:t>
-            </a:r>
-            <a:r>
-              <a:rPr lang="en-IN" dirty="0"/>
-              <a:t> </a:t>
-            </a:r>
-            <a:r>
-              <a:rPr lang="en-IN" b="1" dirty="0">
-                <a:latin typeface="+mn-lt"/>
-              </a:rPr>
-              <a:t>(cont..)</a:t>
+              <a:t>Data Exploration (cont..)</a:t>
             </a:r>
           </a:p>
         </p:txBody>
@@ -50388,14 +49941,14 @@
             <p:ph idx="1"/>
             <p:extLst>
               <p:ext uri="{D42A27DB-BD31-4B8C-83A1-F6EECF244321}">
-                <p14:modId xmlns:p14="http://schemas.microsoft.com/office/powerpoint/2010/main" val="3966086003"/>
+                <p14:modId xmlns:p14="http://schemas.microsoft.com/office/powerpoint/2010/main" val="3620154615"/>
               </p:ext>
             </p:extLst>
           </p:nvPr>
         </p:nvGraphicFramePr>
         <p:xfrm>
           <a:off x="1693738" y="1820647"/>
-          <a:ext cx="8987404" cy="3653941"/>
+          <a:ext cx="8987404" cy="2806217"/>
         </p:xfrm>
         <a:graphic>
           <a:graphicData uri="http://schemas.openxmlformats.org/drawingml/2006/diagram">
@@ -50545,16 +50098,11 @@
           <a:lstStyle/>
           <a:p>
             <a:r>
-              <a:rPr lang="en-IN" dirty="0"/>
-              <a:t>Data Exploration </a:t>
-            </a:r>
-            <a:r>
-              <a:rPr lang="en-IN" b="1" dirty="0">
+              <a:rPr lang="en-IN" sz="3200" dirty="0">
                 <a:latin typeface="+mn-lt"/>
               </a:rPr>
-              <a:t>(cont..)</a:t>
+              <a:t>Data Exploration (cont..)</a:t>
             </a:r>
-            <a:endParaRPr lang="en-IN" dirty="0"/>
           </a:p>
         </p:txBody>
       </p:sp>
@@ -50753,7 +50301,6 @@
             </a:pPr>
             <a:r>
               <a:rPr lang="en-GB" sz="1600" dirty="0">
-                <a:latin typeface="Times New Roman" panose="02020603050405020304" pitchFamily="18" charset="0"/>
                 <a:cs typeface="Times New Roman" panose="02020603050405020304" pitchFamily="18" charset="0"/>
               </a:rPr>
               <a:t>This cross-tab shows how different device types (Functions) are distributed across various Operating Systems.</a:t>
@@ -50766,7 +50313,6 @@
               </a:spcAft>
             </a:pPr>
             <a:endParaRPr lang="en-GB" sz="1600" dirty="0">
-              <a:latin typeface="Times New Roman" panose="02020603050405020304" pitchFamily="18" charset="0"/>
               <a:cs typeface="Times New Roman" panose="02020603050405020304" pitchFamily="18" charset="0"/>
             </a:endParaRPr>
           </a:p>
@@ -50777,7 +50323,6 @@
               </a:spcAft>
             </a:pPr>
             <a:endParaRPr lang="en-GB" sz="1600" dirty="0">
-              <a:latin typeface="Times New Roman" panose="02020603050405020304" pitchFamily="18" charset="0"/>
               <a:cs typeface="Times New Roman" panose="02020603050405020304" pitchFamily="18" charset="0"/>
             </a:endParaRPr>
           </a:p>
@@ -50788,7 +50333,6 @@
               </a:spcAft>
             </a:pPr>
             <a:endParaRPr lang="en-GB" sz="1600" dirty="0">
-              <a:latin typeface="Times New Roman" panose="02020603050405020304" pitchFamily="18" charset="0"/>
               <a:cs typeface="Times New Roman" panose="02020603050405020304" pitchFamily="18" charset="0"/>
             </a:endParaRPr>
           </a:p>
@@ -50799,7 +50343,6 @@
               </a:spcAft>
             </a:pPr>
             <a:endParaRPr lang="en-GB" sz="1600" dirty="0">
-              <a:latin typeface="Times New Roman" panose="02020603050405020304" pitchFamily="18" charset="0"/>
               <a:cs typeface="Times New Roman" panose="02020603050405020304" pitchFamily="18" charset="0"/>
             </a:endParaRPr>
           </a:p>
@@ -50810,7 +50353,6 @@
               </a:spcAft>
             </a:pPr>
             <a:endParaRPr lang="en-GB" sz="1600" dirty="0">
-              <a:latin typeface="Times New Roman" panose="02020603050405020304" pitchFamily="18" charset="0"/>
               <a:cs typeface="Times New Roman" panose="02020603050405020304" pitchFamily="18" charset="0"/>
             </a:endParaRPr>
           </a:p>
@@ -50824,7 +50366,6 @@
             </a:pPr>
             <a:r>
               <a:rPr lang="en-GB" sz="1600" dirty="0">
-                <a:latin typeface="Times New Roman" panose="02020603050405020304" pitchFamily="18" charset="0"/>
                 <a:cs typeface="Times New Roman" panose="02020603050405020304" pitchFamily="18" charset="0"/>
               </a:rPr>
               <a:t>Strong OS-Device Alignment :- Routers/Switches 100 % on the Cisco IOS variants.</a:t>
@@ -50840,7 +50381,6 @@
             </a:pPr>
             <a:r>
               <a:rPr lang="en-GB" sz="1600" dirty="0">
-                <a:latin typeface="Times New Roman" panose="02020603050405020304" pitchFamily="18" charset="0"/>
                 <a:cs typeface="Times New Roman" panose="02020603050405020304" pitchFamily="18" charset="0"/>
               </a:rPr>
               <a:t>Smartphones are highly concentrated :- ~99% on Apple Desktop OS(mislabelling for iOS).</a:t>
@@ -50856,7 +50396,6 @@
             </a:pPr>
             <a:r>
               <a:rPr lang="en-GB" sz="1600" dirty="0">
-                <a:latin typeface="Times New Roman" panose="02020603050405020304" pitchFamily="18" charset="0"/>
                 <a:cs typeface="Times New Roman" panose="02020603050405020304" pitchFamily="18" charset="0"/>
               </a:rPr>
               <a:t>Data Quality :- Apple Desktop OS showing for Smartphones.</a:t>
@@ -50872,7 +50411,6 @@
             </a:pPr>
             <a:r>
               <a:rPr lang="en-GB" sz="1600" dirty="0">
-                <a:latin typeface="Times New Roman" panose="02020603050405020304" pitchFamily="18" charset="0"/>
                 <a:cs typeface="Times New Roman" panose="02020603050405020304" pitchFamily="18" charset="0"/>
               </a:rPr>
               <a:t>Computers Have Mixed OS Distribution :- a diverse OS distribution, indicating multiple device types grouped together.</a:t>
@@ -50888,7 +50426,6 @@
             </a:pPr>
             <a:r>
               <a:rPr lang="en-GB" sz="1600" dirty="0">
-                <a:latin typeface="Times New Roman" panose="02020603050405020304" pitchFamily="18" charset="0"/>
                 <a:cs typeface="Times New Roman" panose="02020603050405020304" pitchFamily="18" charset="0"/>
               </a:rPr>
               <a:t>Printers Mostly Linux-Based :- ~92% Linux</a:t>
@@ -50904,7 +50441,6 @@
             </a:pPr>
             <a:r>
               <a:rPr lang="en-GB" sz="1600" dirty="0">
-                <a:latin typeface="Times New Roman" panose="02020603050405020304" pitchFamily="18" charset="0"/>
                 <a:cs typeface="Times New Roman" panose="02020603050405020304" pitchFamily="18" charset="0"/>
               </a:rPr>
               <a:t>Networking Devices Pattern :- Mostly Android (72%),</a:t>
@@ -50915,7 +50451,6 @@
             </a:r>
             <a:r>
               <a:rPr lang="en-GB" sz="1600" dirty="0">
-                <a:latin typeface="Times New Roman" panose="02020603050405020304" pitchFamily="18" charset="0"/>
                 <a:cs typeface="Times New Roman" panose="02020603050405020304" pitchFamily="18" charset="0"/>
               </a:rPr>
               <a:t>Some Linux (18%).</a:t>
@@ -50931,7 +50466,6 @@
             </a:pPr>
             <a:r>
               <a:rPr lang="en-GB" sz="1600" dirty="0">
-                <a:latin typeface="Times New Roman" panose="02020603050405020304" pitchFamily="18" charset="0"/>
                 <a:cs typeface="Times New Roman" panose="02020603050405020304" pitchFamily="18" charset="0"/>
               </a:rPr>
               <a:t>Embedded Devices Are Specialized :- IP Phone has 100% Embedded Firmware.</a:t>
@@ -50947,7 +50481,6 @@
             </a:pPr>
             <a:r>
               <a:rPr lang="en-GB" sz="1600" dirty="0">
-                <a:latin typeface="Times New Roman" panose="02020603050405020304" pitchFamily="18" charset="0"/>
                 <a:cs typeface="Times New Roman" panose="02020603050405020304" pitchFamily="18" charset="0"/>
               </a:rPr>
               <a:t>Wireless Access Points :- 100 % Linux</a:t>
@@ -50961,8 +50494,7 @@
               <a:buFont typeface="Arial" panose="020B0604020202020204" pitchFamily="34" charset="0"/>
               <a:buChar char="•"/>
             </a:pPr>
-            <a:endParaRPr lang="en-GB" dirty="0">
-              <a:latin typeface="Times New Roman" panose="02020603050405020304" pitchFamily="18" charset="0"/>
+            <a:endParaRPr lang="en-GB" sz="1600" dirty="0">
               <a:cs typeface="Times New Roman" panose="02020603050405020304" pitchFamily="18" charset="0"/>
             </a:endParaRPr>
           </a:p>
@@ -50974,8 +50506,7 @@
               <a:buFont typeface="Arial" panose="020B0604020202020204" pitchFamily="34" charset="0"/>
               <a:buChar char="•"/>
             </a:pPr>
-            <a:endParaRPr lang="en-GB" dirty="0">
-              <a:latin typeface="Times New Roman" panose="02020603050405020304" pitchFamily="18" charset="0"/>
+            <a:endParaRPr lang="en-GB" sz="1600" dirty="0">
               <a:cs typeface="Times New Roman" panose="02020603050405020304" pitchFamily="18" charset="0"/>
             </a:endParaRPr>
           </a:p>
@@ -50985,11 +50516,10 @@
                 <a:spcPts val="600"/>
               </a:spcAft>
             </a:pPr>
-            <a:endParaRPr lang="en-IN" kern="1200" dirty="0">
+            <a:endParaRPr lang="en-IN" sz="1600" kern="1200" dirty="0">
               <a:solidFill>
                 <a:schemeClr val="tx1"/>
               </a:solidFill>
-              <a:latin typeface="Times New Roman" panose="02020603050405020304" pitchFamily="18" charset="0"/>
               <a:cs typeface="Times New Roman" panose="02020603050405020304" pitchFamily="18" charset="0"/>
             </a:endParaRPr>
           </a:p>
@@ -50999,7 +50529,7 @@
                 <a:spcPts val="600"/>
               </a:spcAft>
             </a:pPr>
-            <a:endParaRPr lang="en-IN" dirty="0"/>
+            <a:endParaRPr lang="en-IN" sz="1600" dirty="0"/>
           </a:p>
           <a:p>
             <a:pPr>
@@ -51007,7 +50537,7 @@
                 <a:spcPts val="600"/>
               </a:spcAft>
             </a:pPr>
-            <a:endParaRPr lang="en-IN" dirty="0"/>
+            <a:endParaRPr lang="en-IN" sz="1600" dirty="0"/>
           </a:p>
         </p:txBody>
       </p:sp>
@@ -51183,16 +50713,11 @@
           <a:lstStyle/>
           <a:p>
             <a:r>
-              <a:rPr lang="en-IN" dirty="0"/>
-              <a:t>Data Exploration </a:t>
-            </a:r>
-            <a:r>
-              <a:rPr lang="en-IN" b="1" dirty="0">
+              <a:rPr lang="en-IN" sz="3200" dirty="0">
                 <a:latin typeface="+mn-lt"/>
               </a:rPr>
-              <a:t>(cont..)</a:t>
+              <a:t>Data Exploration (cont..)</a:t>
             </a:r>
-            <a:endParaRPr lang="en-IN" dirty="0"/>
           </a:p>
         </p:txBody>
       </p:sp>
@@ -51391,7 +50916,6 @@
             </a:pPr>
             <a:r>
               <a:rPr lang="en-GB" sz="1600" dirty="0">
-                <a:latin typeface="Times New Roman" panose="02020603050405020304" pitchFamily="18" charset="0"/>
                 <a:cs typeface="Times New Roman" panose="02020603050405020304" pitchFamily="18" charset="0"/>
               </a:rPr>
               <a:t>Certain fields exhibit correlated missing patterns, indicating that data is often missing together, likely due to shared data collection limitations</a:t>
@@ -51404,7 +50928,6 @@
               </a:spcAft>
             </a:pPr>
             <a:endParaRPr lang="en-GB" sz="1600" dirty="0">
-              <a:latin typeface="Times New Roman" panose="02020603050405020304" pitchFamily="18" charset="0"/>
               <a:cs typeface="Times New Roman" panose="02020603050405020304" pitchFamily="18" charset="0"/>
             </a:endParaRPr>
           </a:p>
@@ -51415,7 +50938,6 @@
               </a:spcAft>
             </a:pPr>
             <a:endParaRPr lang="en-GB" sz="1600" dirty="0">
-              <a:latin typeface="Times New Roman" panose="02020603050405020304" pitchFamily="18" charset="0"/>
               <a:cs typeface="Times New Roman" panose="02020603050405020304" pitchFamily="18" charset="0"/>
             </a:endParaRPr>
           </a:p>
@@ -51426,7 +50948,6 @@
               </a:spcAft>
             </a:pPr>
             <a:endParaRPr lang="en-GB" sz="1600" dirty="0">
-              <a:latin typeface="Times New Roman" panose="02020603050405020304" pitchFamily="18" charset="0"/>
               <a:cs typeface="Times New Roman" panose="02020603050405020304" pitchFamily="18" charset="0"/>
             </a:endParaRPr>
           </a:p>
@@ -51437,7 +50958,6 @@
               </a:spcAft>
             </a:pPr>
             <a:endParaRPr lang="en-GB" sz="1600" dirty="0">
-              <a:latin typeface="Times New Roman" panose="02020603050405020304" pitchFamily="18" charset="0"/>
               <a:cs typeface="Times New Roman" panose="02020603050405020304" pitchFamily="18" charset="0"/>
             </a:endParaRPr>
           </a:p>
@@ -51448,7 +50968,6 @@
               </a:spcAft>
             </a:pPr>
             <a:endParaRPr lang="en-GB" sz="1600" dirty="0">
-              <a:latin typeface="Times New Roman" panose="02020603050405020304" pitchFamily="18" charset="0"/>
               <a:cs typeface="Times New Roman" panose="02020603050405020304" pitchFamily="18" charset="0"/>
             </a:endParaRPr>
           </a:p>
@@ -51459,7 +50978,6 @@
               </a:spcAft>
             </a:pPr>
             <a:endParaRPr lang="en-GB" sz="1600" dirty="0">
-              <a:latin typeface="Times New Roman" panose="02020603050405020304" pitchFamily="18" charset="0"/>
               <a:cs typeface="Times New Roman" panose="02020603050405020304" pitchFamily="18" charset="0"/>
             </a:endParaRPr>
           </a:p>
@@ -51470,7 +50988,6 @@
               </a:spcAft>
             </a:pPr>
             <a:endParaRPr lang="en-GB" sz="1600" dirty="0">
-              <a:latin typeface="Times New Roman" panose="02020603050405020304" pitchFamily="18" charset="0"/>
               <a:cs typeface="Times New Roman" panose="02020603050405020304" pitchFamily="18" charset="0"/>
             </a:endParaRPr>
           </a:p>
@@ -51482,8 +50999,7 @@
               <a:buFont typeface="Arial" panose="020B0604020202020204" pitchFamily="34" charset="0"/>
               <a:buChar char="•"/>
             </a:pPr>
-            <a:endParaRPr lang="en-GB" dirty="0">
-              <a:latin typeface="Times New Roman" panose="02020603050405020304" pitchFamily="18" charset="0"/>
+            <a:endParaRPr lang="en-GB" sz="1600" dirty="0">
               <a:cs typeface="Times New Roman" panose="02020603050405020304" pitchFamily="18" charset="0"/>
             </a:endParaRPr>
           </a:p>
@@ -51495,8 +51011,7 @@
               <a:buFont typeface="Arial" panose="020B0604020202020204" pitchFamily="34" charset="0"/>
               <a:buChar char="•"/>
             </a:pPr>
-            <a:endParaRPr lang="en-GB" dirty="0">
-              <a:latin typeface="Times New Roman" panose="02020603050405020304" pitchFamily="18" charset="0"/>
+            <a:endParaRPr lang="en-GB" sz="1600" dirty="0">
               <a:cs typeface="Times New Roman" panose="02020603050405020304" pitchFamily="18" charset="0"/>
             </a:endParaRPr>
           </a:p>
@@ -51510,7 +51025,6 @@
             </a:pPr>
             <a:r>
               <a:rPr lang="en-GB" sz="1600" dirty="0">
-                <a:latin typeface="Times New Roman" panose="02020603050405020304" pitchFamily="18" charset="0"/>
                 <a:cs typeface="Times New Roman" panose="02020603050405020304" pitchFamily="18" charset="0"/>
               </a:rPr>
               <a:t>Strong correlation observed among DHCP-related fields (up to 1.0), indicating shared data availability patterns.</a:t>
@@ -51526,13 +51040,11 @@
             </a:pPr>
             <a:r>
               <a:rPr lang="en-GB" sz="1600" dirty="0">
-                <a:latin typeface="Times New Roman" panose="02020603050405020304" pitchFamily="18" charset="0"/>
                 <a:cs typeface="Times New Roman" panose="02020603050405020304" pitchFamily="18" charset="0"/>
               </a:rPr>
               <a:t>Highly correlated missing patterns suggest upstream data ingestion dependencies, where DHCP-related attributes are either fully captured or entirely absent. So the missing data is not random but occurs in groups, especially for DHCP-related features. </a:t>
             </a:r>
             <a:endParaRPr lang="en-IN" sz="1600" dirty="0">
-              <a:latin typeface="Times New Roman" panose="02020603050405020304" pitchFamily="18" charset="0"/>
               <a:cs typeface="Times New Roman" panose="02020603050405020304" pitchFamily="18" charset="0"/>
             </a:endParaRPr>
           </a:p>
@@ -51710,7 +51222,9 @@
           <a:lstStyle/>
           <a:p>
             <a:r>
-              <a:rPr lang="en-IN" dirty="0"/>
+              <a:rPr lang="en-IN" sz="3200" dirty="0">
+                <a:latin typeface="+mn-lt"/>
+              </a:rPr>
               <a:t>Feature Engineering – Device Categorization</a:t>
             </a:r>
           </a:p>
@@ -51910,11 +51424,10 @@
               </a:spcAft>
             </a:pPr>
             <a:r>
-              <a:rPr lang="en-IN" sz="1400" kern="1200" dirty="0">
+              <a:rPr lang="en-IN" sz="1600" kern="1200" dirty="0">
                 <a:solidFill>
                   <a:schemeClr val="tx1"/>
                 </a:solidFill>
-                <a:latin typeface="Times New Roman" panose="02020603050405020304" pitchFamily="18" charset="0"/>
                 <a:ea typeface="+mn-ea"/>
                 <a:cs typeface="Times New Roman" panose="02020603050405020304" pitchFamily="18" charset="0"/>
               </a:rPr>
@@ -51928,8 +51441,7 @@
               </a:spcAft>
             </a:pPr>
             <a:r>
-              <a:rPr lang="en-GB" sz="1400" dirty="0">
-                <a:latin typeface="Times New Roman" panose="02020603050405020304" pitchFamily="18" charset="0"/>
+              <a:rPr lang="en-GB" sz="1600" dirty="0">
                 <a:cs typeface="Times New Roman" panose="02020603050405020304" pitchFamily="18" charset="0"/>
               </a:rPr>
               <a:t>Keywords in the function were used to assign categories:</a:t>
@@ -51944,8 +51456,7 @@
               <a:buChar char="•"/>
             </a:pPr>
             <a:r>
-              <a:rPr lang="en-GB" sz="1400" dirty="0">
-                <a:latin typeface="Times New Roman" panose="02020603050405020304" pitchFamily="18" charset="0"/>
+              <a:rPr lang="en-GB" sz="1600" dirty="0">
                 <a:cs typeface="Times New Roman" panose="02020603050405020304" pitchFamily="18" charset="0"/>
               </a:rPr>
               <a:t> IT → Workstation, Computer, Server </a:t>
@@ -51960,8 +51471,7 @@
               <a:buChar char="•"/>
             </a:pPr>
             <a:r>
-              <a:rPr lang="en-GB" sz="1400" dirty="0">
-                <a:latin typeface="Times New Roman" panose="02020603050405020304" pitchFamily="18" charset="0"/>
+              <a:rPr lang="en-GB" sz="1600" dirty="0">
                 <a:cs typeface="Times New Roman" panose="02020603050405020304" pitchFamily="18" charset="0"/>
               </a:rPr>
               <a:t> Network → Switch, Router, Firewall </a:t>
@@ -51976,8 +51486,7 @@
               <a:buChar char="•"/>
             </a:pPr>
             <a:r>
-              <a:rPr lang="en-GB" sz="1400" dirty="0">
-                <a:latin typeface="Times New Roman" panose="02020603050405020304" pitchFamily="18" charset="0"/>
+              <a:rPr lang="en-GB" sz="1600" dirty="0">
                 <a:cs typeface="Times New Roman" panose="02020603050405020304" pitchFamily="18" charset="0"/>
               </a:rPr>
               <a:t> Medical → CT, MRI, X-ray, Scanner </a:t>
@@ -51992,8 +51501,7 @@
               <a:buChar char="•"/>
             </a:pPr>
             <a:r>
-              <a:rPr lang="en-GB" sz="1400" dirty="0">
-                <a:latin typeface="Times New Roman" panose="02020603050405020304" pitchFamily="18" charset="0"/>
+              <a:rPr lang="en-GB" sz="1600" dirty="0">
                 <a:cs typeface="Times New Roman" panose="02020603050405020304" pitchFamily="18" charset="0"/>
               </a:rPr>
               <a:t> OT (Operational Technology) → PLC, HMI, RTU </a:t>
@@ -52008,8 +51516,7 @@
               <a:buChar char="•"/>
             </a:pPr>
             <a:r>
-              <a:rPr lang="en-GB" sz="1400" dirty="0">
-                <a:latin typeface="Times New Roman" panose="02020603050405020304" pitchFamily="18" charset="0"/>
+              <a:rPr lang="en-GB" sz="1600" dirty="0">
                 <a:cs typeface="Times New Roman" panose="02020603050405020304" pitchFamily="18" charset="0"/>
               </a:rPr>
               <a:t> IoT → Phones, Smart devices, others</a:t>
@@ -52021,11 +51528,10 @@
                 <a:spcPts val="600"/>
               </a:spcAft>
             </a:pPr>
-            <a:endParaRPr lang="en-IN" sz="1400" kern="1200" dirty="0">
+            <a:endParaRPr lang="en-IN" sz="1600" kern="1200" dirty="0">
               <a:solidFill>
                 <a:schemeClr val="tx1"/>
               </a:solidFill>
-              <a:latin typeface="Times New Roman" panose="02020603050405020304" pitchFamily="18" charset="0"/>
               <a:ea typeface="+mn-ea"/>
               <a:cs typeface="Times New Roman" panose="02020603050405020304" pitchFamily="18" charset="0"/>
             </a:endParaRPr>
@@ -52037,8 +51543,7 @@
               </a:spcAft>
             </a:pPr>
             <a:r>
-              <a:rPr lang="en-IN" sz="1400" dirty="0">
-                <a:latin typeface="Times New Roman" panose="02020603050405020304" pitchFamily="18" charset="0"/>
+              <a:rPr lang="en-IN" sz="1600" dirty="0">
                 <a:cs typeface="Times New Roman" panose="02020603050405020304" pitchFamily="18" charset="0"/>
               </a:rPr>
               <a:t>Device category distribution</a:t>
@@ -52050,11 +51555,10 @@
                 <a:spcPts val="600"/>
               </a:spcAft>
             </a:pPr>
-            <a:endParaRPr lang="en-IN" sz="1400" kern="1200" dirty="0">
+            <a:endParaRPr lang="en-IN" sz="1600" kern="1200" dirty="0">
               <a:solidFill>
                 <a:schemeClr val="tx1"/>
               </a:solidFill>
-              <a:latin typeface="Times New Roman" panose="02020603050405020304" pitchFamily="18" charset="0"/>
               <a:ea typeface="+mn-ea"/>
               <a:cs typeface="Times New Roman" panose="02020603050405020304" pitchFamily="18" charset="0"/>
             </a:endParaRPr>
@@ -52065,7 +51569,7 @@
                 <a:spcPts val="600"/>
               </a:spcAft>
             </a:pPr>
-            <a:endParaRPr lang="en-IN" dirty="0"/>
+            <a:endParaRPr lang="en-IN" sz="1600" dirty="0"/>
           </a:p>
         </p:txBody>
       </p:sp>
